--- a/vi/files/slides/Session_2_VN.pptx
+++ b/vi/files/slides/Session_2_VN.pptx
@@ -743,7 +743,7 @@
           <a:p>
             <a:r>
               <a:rPr lang="en-US" sz="1400" b="0" dirty="0"/>
-              <a:t>Ý chính: hôm qua mỗi nhóm đã viết một câu hỏi; hôm nay ta tìm xem điều gì đã được biết về câu hỏi đó, lưu tài liệu tham khảo an toàn, và đọc bài báo hiệu quả.</a:t>
+              <a:t>Ý chính: thứ Bảy tuần trước mỗi nhóm đã viết một câu hỏi; hôm nay ta tìm xem điều gì đã được biết về câu hỏi đó, lưu tài liệu tham khảo an toàn, và đọc bài báo hiệu quả.</a:t>
             </a:r>
           </a:p>
           <a:p>
@@ -1886,7 +1886,7 @@
           <a:p>
             <a:r>
               <a:rPr lang="en-US" sz="1400" b="0" dirty="0"/>
-              <a:t>Bài này cũng khơi lại từ vựng hôm qua cho buổi tìm kiếm hôm nay.</a:t>
+              <a:t>Bài này cũng khơi lại từ vựng thứ Bảy tuần trước cho buổi tìm kiếm hôm nay.</a:t>
             </a:r>
           </a:p>
           <a:p>
@@ -3962,7 +3962,7 @@
           <a:p>
             <a:r>
               <a:rPr lang="en-US" sz="1400" b="0" dirty="0"/>
-              <a:t>Ý chính: mọi điều học hôm nay được áp dụng cho câu hỏi của nhóm từ hôm qua. Đến 2:55 mỗi nhóm có một chuỗi tìm kiếm được ghi lại, ít nhất 3-5 tài liệu trong bảng ma trận, bản nháp đặt vấn đề và tên đề tài tạm.</a:t>
+              <a:t>Ý chính: mọi điều học hôm nay được áp dụng cho câu hỏi của nhóm từ thứ Bảy tuần trước. Đến 2:55 mỗi nhóm có một chuỗi tìm kiếm được ghi lại, ít nhất 3-5 tài liệu trong bảng ma trận, bản nháp đặt vấn đề và tên đề tài tạm.</a:t>
             </a:r>
           </a:p>
           <a:p>
@@ -4370,7 +4370,7 @@
           <a:p>
             <a:r>
               <a:rPr lang="en-US" sz="1400" b="0" dirty="0"/>
-              <a:t>Nối sang buổi sau: cuối tuần tới (Buổi 3 và 4) ta chọn THIẾT KẾ phù hợp cho câu hỏi của từng nhóm - và tìm hiểu sai lệch, yếu tố gây nhiễu và các số đo tác động qua hai bài báo về dịch truyền.</a:t>
+              <a:t>Nối sang buổi sau: hai thứ Bảy tới (Buổi 3 và 4) ta chọn THIẾT KẾ phù hợp cho câu hỏi của từng nhóm - và tìm hiểu sai lệch, yếu tố gây nhiễu và các số đo tác động qua hai bài báo về dịch truyền.</a:t>
             </a:r>
           </a:p>
           <a:p>
@@ -4562,7 +4562,7 @@
           <a:p>
             <a:r>
               <a:rPr lang="en-US" sz="1400" b="0" dirty="0"/>
-              <a:t>Nhắc các nhóm gửi Phần 1 cho giảng viên nếu khóa học có nhận xét bằng văn bản giữa các cuối tuần.</a:t>
+              <a:t>Nhắc các nhóm gửi Phần 1 cho giảng viên nếu khóa học có nhận xét bằng văn bản giữa các buổi.</a:t>
             </a:r>
           </a:p>
           <a:p>
@@ -8836,7 +8836,7 @@
                 <a:latin typeface="Segoe UI"/>
                 <a:cs typeface="Segoe UI"/>
               </a:rPr>
-              <a:t>Cuối tuần 1 · Chủ Nhật</a:t>
+              <a:t>Tuần 2 · Thứ Bảy</a:t>
             </a:r>
           </a:p>
           <a:p>
@@ -23589,7 +23589,7 @@
                 <a:latin typeface="Segoe UI"/>
                 <a:cs typeface="Segoe UI"/>
               </a:rPr>
-              <a:t>Xong cuối tuần 1: nhóm bạn có câu hỏi, năm bài báo và tên đề tài.</a:t>
+              <a:t>Xong Tuần 1-2: nhóm bạn có câu hỏi, năm bài báo và tên đề tài.</a:t>
             </a:r>
           </a:p>
         </p:txBody>
@@ -24170,7 +24170,7 @@
                 <a:latin typeface="Segoe UI"/>
                 <a:cs typeface="Segoe UI"/>
               </a:rPr>
-              <a:t>Bài về nhà trước Buổi 3 (cuối tuần tới)</a:t>
+              <a:t>Bài về nhà trước Buổi 3 (thứ Bảy tuần sau)</a:t>
             </a:r>
           </a:p>
         </p:txBody>
@@ -24465,7 +24465,7 @@
                 <a:latin typeface="Segoe UI"/>
                 <a:cs typeface="Segoe UI"/>
               </a:rPr>
-              <a:t>Mang theo cuối tuần tới</a:t>
+              <a:t>Mang theo thứ Bảy tuần sau</a:t>
             </a:r>
           </a:p>
           <a:p>

--- a/vi/files/slides/Session_2_VN.pptx
+++ b/vi/files/slides/Session_2_VN.pptx
@@ -749,7 +749,7 @@
           <a:p>
             <a:r>
               <a:rPr lang="en-US" sz="1400" b="0" dirty="0"/>
-              <a:t>Nhịp độ: chậm hơn vẻ ngoài. Phần nào cũng có trình diễn hoặc bài tập. Dùng các slide 'Kiểm tra hiểu bài' - đó là lúc phát hiện ai bị lạc.</a:t>
+              <a:t>Nhịp độ: chậm hơn vẻ ngoài. Phần nào cũng có trình diễn hoặc bài tập. Dùng các slide 'Kiểm tra hiểu bài': đó là lúc phát hiện ai bị lạc.</a:t>
             </a:r>
           </a:p>
           <a:p>
@@ -842,13 +842,13 @@
           <a:p>
             <a:r>
               <a:rPr lang="en-US" sz="1400" b="0" dirty="0"/>
-              <a:t>MeSH (Medical Subject Headings - Đề mục chủ đề y học) là bộ từ vựng chuẩn của Thư viện Y khoa Quốc gia Hoa Kỳ. Mỗi bài MEDLINE được gắn thuật ngữ MeSH, bất kể tác giả dùng từ gì.</a:t>
+              <a:t>MeSH (Medical Subject Headings, Đề mục chủ đề y học) là bộ từ vựng chuẩn của Thư viện Y khoa Quốc gia Hoa Kỳ. Mỗi bài MEDLINE được gắn thuật ngữ MeSH, bất kể tác giả dùng từ gì.</a:t>
             </a:r>
           </a:p>
           <a:p>
             <a:r>
               <a:rPr lang="en-US" sz="1400" b="0" dirty="0"/>
-              <a:t>Tìm một thuật ngữ MeSH sẽ gồm luôn các thuật ngữ hẹp hơn bên dưới ('explode' - mở rộng) - Sepsis[MeSH] bao gồm Shock, Septic.</a:t>
+              <a:t>Tìm một thuật ngữ MeSH sẽ gồm luôn các thuật ngữ hẹp hơn bên dưới ('explode', mở rộng). Ví dụ, Sepsis[MeSH] bao gồm Shock, Septic.</a:t>
             </a:r>
           </a:p>
           <a:p>
@@ -860,7 +860,7 @@
           <a:p>
             <a:r>
               <a:rPr lang="en-US" sz="1400" b="0" dirty="0"/>
-              <a:t>Hỏi cả lớp: 'MeSH giúp gì cho điều dưỡng tìm về tổn thương do tì đè?' Mong đợi: tác giả viết pressure ulcer, bedsore, decubitus ulcer - MeSH gom dưới một đề mục.</a:t>
+              <a:t>Hỏi cả lớp: 'MeSH giúp gì cho điều dưỡng tìm về tổn thương do tì đè?' Mong đợi: tác giả viết pressure ulcer, bedsore, decubitus ulcer, và MeSH gom dưới một đề mục.</a:t>
             </a:r>
           </a:p>
           <a:p>
@@ -947,7 +947,7 @@
           <a:p>
             <a:r>
               <a:rPr lang="en-US" sz="1400" b="0" dirty="0"/>
-              <a:t>Ngoặc kép giữ nguyên cụm từ. Cắt cụt tìm mọi đuôi từ - nhưng gốc quá ngắn (flu*) sẽ ra cả influenza và fluoride.</a:t>
+              <a:t>Ngoặc kép giữ nguyên cụm từ. Cắt cụt tìm mọi đuôi từ, nhưng gốc quá ngắn (flu*) sẽ ra cả influenza và fluoride.</a:t>
             </a:r>
           </a:p>
           <a:p>
@@ -1058,13 +1058,13 @@
           <a:p>
             <a:r>
               <a:rPr lang="en-US" sz="1400" b="0" dirty="0"/>
-              <a:t>Còn các cơ sở dữ liệu khác (Embase, CINAHL cho điều dưỡng, Thư viện Cochrane) - không cần ở Cấp độ 1.</a:t>
+              <a:t>Còn các cơ sở dữ liệu khác (Embase, CINAHL cho điều dưỡng, Thư viện Cochrane), nhưng không cần ở Cấp độ 1.</a:t>
             </a:r>
           </a:p>
           <a:p>
             <a:r>
               <a:rPr lang="en-US" sz="1400" b="0" dirty="0"/>
-              <a:t>Hỏi cả lớp: 'Đồng nghiệp tìm được bài hoàn hảo trên Google Scholar - cần kiểm tra gì?' Mong đợi: đã bình duyệt chưa hay chỉ là preprint? tạp chí có uy tín không? (tạp chí săn mồi - Buổi 8).</a:t>
+              <a:t>Hỏi cả lớp: 'Đồng nghiệp tìm được bài hoàn hảo trên Google Scholar. Cần kiểm tra gì?' Mong đợi: đã bình duyệt chưa hay chỉ là preprint? Tạp chí có uy tín không? (Tạp chí săn mồi: Buổi 8.)</a:t>
             </a:r>
           </a:p>
           <a:p>
@@ -1151,7 +1151,7 @@
           <a:p>
             <a:r>
               <a:rPr lang="en-US" sz="1400" b="0" dirty="0"/>
-              <a:t>Làm theo Course/Demos/s2_demo.md, Phần A (PubMed) - chuỗi tìm kiếm chính xác, chỗ cần bấm và phương án dự phòng.</a:t>
+              <a:t>Làm theo Course/Demos/s2_demo.md, Phần A (PubMed): chuỗi tìm kiếm chính xác, chỗ cần bấm và phương án dự phòng.</a:t>
             </a:r>
           </a:p>
           <a:p>
@@ -1169,7 +1169,7 @@
           <a:p>
             <a:r>
               <a:rPr lang="en-US" sz="1400" b="0" dirty="0"/>
-              <a:t>Nếu mất internet, chuyển sang ảnh chụp màn hình - không sửa lỗi mạng trước lớp.</a:t>
+              <a:t>Nếu mất internet, chuyển sang ảnh chụp màn hình. Không sửa lỗi mạng trước lớp.</a:t>
             </a:r>
           </a:p>
           <a:p>
@@ -1256,7 +1256,7 @@
           <a:p>
             <a:r>
               <a:rPr lang="en-US" sz="1400" b="0" dirty="0"/>
-              <a:t>Không cần máy tính - bài tập trên giấy với bảng xây dựng tìm kiếm Boolean.</a:t>
+              <a:t>Không cần máy tính: đây là bài tập trên giấy với bảng xây dựng tìm kiếm Boolean.</a:t>
             </a:r>
           </a:p>
           <a:p>
@@ -1361,7 +1361,7 @@
           <a:p>
             <a:r>
               <a:rPr lang="en-US" sz="1400" b="0" dirty="0"/>
-              <a:t>Ý chính: hai thói quen bảo vệ mọi đề cương và bài báo - lưu tài liệu vào phần mềm quản lý tài liệu ngay từ ngày đầu, và không bao giờ sao chép câu chữ từ nguồn.</a:t>
+              <a:t>Ý chính: hai thói quen bảo vệ mọi đề cương và bài báo: lưu tài liệu vào phần mềm quản lý tài liệu ngay từ ngày đầu, và không bao giờ sao chép câu chữ từ nguồn.</a:t>
             </a:r>
           </a:p>
           <a:p>
@@ -1769,31 +1769,31 @@
           <a:p>
             <a:r>
               <a:rPr lang="en-US" sz="1400" b="0" dirty="0"/>
-              <a:t>Bên trái: 'viết chắp vá' (patchwriting) - cùng câu đó chỉ thay vài từ. Dù có trích dẫn, đây vẫn là đạo văn vì cấu trúc và phần lớn từ ngữ bị sao chép. Phần mềm kiểm tra trùng lặp của tạp chí phát hiện dễ dàng.</a:t>
+              <a:t>Bên trái: 'viết chắp vá' (patchwriting): cùng câu đó chỉ thay vài từ. Dù có trích dẫn, đây vẫn là đạo văn vì cấu trúc và phần lớn từ ngữ bị sao chép. Phần mềm kiểm tra trùng lặp của tạp chí phát hiện dễ dàng.</a:t>
             </a:r>
           </a:p>
           <a:p>
             <a:r>
               <a:rPr lang="en-US" sz="1400" b="0" dirty="0"/>
-              <a:t>Bên phải: diễn đạt lại thật sự - cấu trúc mới, thêm bối cảnh từ bài báo (pilot, 48 bệnh nhân, loại dịch nào) và có trích dẫn.</a:t>
+              <a:t>Bên phải: diễn đạt lại thật sự, với cấu trúc mới, thêm bối cảnh từ bài báo (pilot, 48 bệnh nhân, loại dịch nào) và có trích dẫn.</a:t>
             </a:r>
           </a:p>
           <a:p>
             <a:r>
               <a:rPr lang="en-US" sz="1400" b="0" dirty="0"/>
-              <a:t>Cách làm: đọc, gấp bài báo, viết theo trí nhớ, kiểm tra lại dữ kiện, trích dẫn. Nếu cần nguyên văn, dùng ngoặc kép kèm trích dẫn - nhưng trong viết y khoa hiếm khi trích nguyên văn.</a:t>
+              <a:t>Cách làm: đọc, gấp bài báo, viết theo trí nhớ, kiểm tra lại dữ kiện, trích dẫn. Nếu cần nguyên văn, dùng ngoặc kép kèm trích dẫn. Tuy vậy, trong viết y khoa hiếm khi trích nguyên văn.</a:t>
             </a:r>
           </a:p>
           <a:p>
             <a:r>
               <a:rPr lang="en-US" sz="1400" b="0" dirty="0"/>
-              <a:t>Quan niệm sai: 'đã trích dẫn thì được chép'. Trích dẫn ghi công cho ý tưởng; không cho phép chép câu chữ. Công cụ AI viết lại câu cũng không giải quyết được - bạn vẫn chịu trách nhiệm (Buổi 7).</a:t>
+              <a:t>Quan niệm sai: 'đã trích dẫn thì được chép'. Trích dẫn ghi công cho ý tưởng; không cho phép chép câu chữ. Công cụ AI viết lại câu cũng không giải quyết được. Bạn vẫn chịu trách nhiệm (Buổi 7).</a:t>
             </a:r>
           </a:p>
           <a:p>
             <a:r>
               <a:rPr lang="en-US" sz="1400" b="0" dirty="0"/>
-              <a:t>Hỏi cả lớp: 'Chép phần Phương pháp từ bài báo cũ của chính mình có được không?' Mong đợi: đó là tái sử dụng văn bản - xem chính sách của tạp chí; thường phải viết lại hoặc trích dẫn.</a:t>
+              <a:t>Hỏi cả lớp: 'Chép phần Phương pháp từ bài báo cũ của chính mình có được không?' Mong đợi: đó là tái sử dụng văn bản. Xem chính sách của tạp chí, và thường phải viết lại hoặc trích dẫn.</a:t>
             </a:r>
           </a:p>
           <a:p>
@@ -1985,7 +1985,7 @@
           <a:p>
             <a:r>
               <a:rPr lang="en-US" sz="1400" b="0" dirty="0"/>
-              <a:t>Trích một bài chỉ thấy được nhắc lại ở nơi khác sẽ lan truyền lỗi - hãy kiểm tra bài gốc.</a:t>
+              <a:t>Trích một bài chỉ thấy được nhắc lại ở nơi khác sẽ lan truyền lỗi. Hãy kiểm tra bài gốc.</a:t>
             </a:r>
           </a:p>
           <a:p>
@@ -2078,7 +2078,7 @@
           <a:p>
             <a:r>
               <a:rPr lang="en-US" sz="1400" b="0" dirty="0"/>
-              <a:t>Đáp án: 1 Không được - viết chắp vá là đạo văn dù có trích dẫn. 2 Được (nhưng hiếm trong viết y khoa). 3 Không được - phát hiện của người khác cần trích dẫn. 4 Không được - có thể lặp lại lỗi; hãy đọc và trích bài gốc.</a:t>
+              <a:t>Đáp án: 1 Không được: viết chắp vá là đạo văn dù có trích dẫn. 2 Được (nhưng hiếm trong viết y khoa). 3 Không được: phát hiện của người khác cần trích dẫn. 4 Không được: có thể lặp lại lỗi, nên hãy đọc và trích bài gốc.</a:t>
             </a:r>
           </a:p>
           <a:p>
@@ -2171,13 +2171,13 @@
           <a:p>
             <a:r>
               <a:rPr lang="en-US" sz="1400" b="0" dirty="0"/>
-              <a:t>Vì sao quan trọng: nghiên cứu có kết quả âm tính hoặc gây thất vọng ít được công bố hơn (sai lệch xuất bản - publication bias), nên y văn đã công bố có thể trông tích cực hơn sự thật.</a:t>
+              <a:t>Vì sao quan trọng: nghiên cứu có kết quả âm tính hoặc gây thất vọng ít được công bố hơn (sai lệch xuất bản, publication bias), nên y văn đã công bố có thể trông tích cực hơn sự thật.</a:t>
             </a:r>
           </a:p>
           <a:p>
             <a:r>
               <a:rPr lang="en-US" sz="1400" b="0" dirty="0"/>
-              <a:t>Sổ đăng ký thử nghiệm - ClinicalTrials.gov và Nền tảng Đăng ký Thử nghiệm Lâm sàng Quốc tế của WHO (ICTRP) - liệt kê các thử nghiệm đang và đã làm kèm kết cục chính DỰ KIẾN. Hãy so sánh với bài báo: đổi kết cục là dấu hiệu cảnh báo.</a:t>
+              <a:t>Sổ đăng ký thử nghiệm (ClinicalTrials.gov và Nền tảng Đăng ký Thử nghiệm Lâm sàng Quốc tế của WHO, ICTRP) liệt kê các thử nghiệm đang và đã làm kèm kết cục chính DỰ KIẾN. Hãy so sánh với bài báo: đổi kết cục là dấu hiệu cảnh báo.</a:t>
             </a:r>
           </a:p>
           <a:p>
@@ -2189,7 +2189,7 @@
           <a:p>
             <a:r>
               <a:rPr lang="en-US" sz="1400" b="0" dirty="0"/>
-              <a:t>Bản thảo trước in (ví dụ medRxiv) chưa qua bình duyệt - đọc thật cẩn thận.</a:t>
+              <a:t>Bản thảo trước in (ví dụ medRxiv) chưa qua bình duyệt. Hãy đọc thật cẩn thận.</a:t>
             </a:r>
           </a:p>
           <a:p>
@@ -2201,7 +2201,7 @@
           <a:p>
             <a:r>
               <a:rPr lang="en-US" sz="1400" b="0" dirty="0"/>
-              <a:t>Thời gian: 3 phút. Phần 2.2 kết thúc lúc 1:10 - giải lao.</a:t>
+              <a:t>Thời gian: 3 phút. Phần 2.2 kết thúc lúc 1:10, rồi giải lao.</a:t>
             </a:r>
           </a:p>
         </p:txBody>
@@ -2294,7 +2294,7 @@
           <a:p>
             <a:r>
               <a:rPr lang="en-US" sz="1400" b="0" dirty="0"/>
-              <a:t>Bắt đầu lại đúng giờ - nói rõ giờ quay lại.</a:t>
+              <a:t>Bắt đầu lại đúng giờ. Nói rõ giờ quay lại.</a:t>
             </a:r>
           </a:p>
         </p:txBody>
@@ -2474,7 +2474,7 @@
           <a:p>
             <a:r>
               <a:rPr lang="en-US" sz="1400" b="0" dirty="0"/>
-              <a:t>IMRaD = Đặt vấn đề (Introduction), Phương pháp (Methods), Kết quả (Results) và Bàn luận (Discussion) - cấu trúc chuẩn của bài báo nghiên cứu gốc, với tiêu đề và tóm tắt ở trên cùng.</a:t>
+              <a:t>IMRaD = Đặt vấn đề (Introduction), Phương pháp (Methods), Kết quả (Results) và Bàn luận (Discussion): cấu trúc chuẩn của bài báo nghiên cứu gốc, với tiêu đề và tóm tắt ở trên cùng.</a:t>
             </a:r>
           </a:p>
           <a:p>
@@ -2708,13 +2708,13 @@
           <a:p>
             <a:r>
               <a:rPr lang="en-US" sz="1400" b="0" dirty="0"/>
-              <a:t>Kết quả phải có số sàng lọc và phân tích, và kết quả chính dưới dạng cỡ tác động kèm khoảng tin cậy (KTC) 95% - không chỉ giá trị p hay chữ 'có ý nghĩa'.</a:t>
+              <a:t>Kết quả phải có số sàng lọc và phân tích, và kết quả chính dưới dạng cỡ tác động kèm khoảng tin cậy (KTC) 95%, không chỉ giá trị p hay chữ 'có ý nghĩa'.</a:t>
             </a:r>
           </a:p>
           <a:p>
             <a:r>
               <a:rPr lang="en-US" sz="1400" b="0" dirty="0"/>
-              <a:t>Kết luận trả lời câu hỏi chính - không hơn, không kém. Các hướng dẫn báo cáo có bảng kiểm cho tóm tắt (CONSORT for Abstracts, STROBE) - Buổi 8.</a:t>
+              <a:t>Kết luận trả lời câu hỏi chính, không hơn, không kém. Các hướng dẫn báo cáo có bảng kiểm cho tóm tắt (CONSORT for Abstracts, STROBE), học ở Buổi 8.</a:t>
             </a:r>
           </a:p>
           <a:p>
@@ -2825,13 +2825,13 @@
           <a:p>
             <a:r>
               <a:rPr lang="en-US" sz="1400" b="0" dirty="0"/>
-              <a:t>Ý chính: 'lớn cỡ nào, chắc đến đâu, lúc nào?' - hỏi ba câu này với mọi kết quả bạn đọc. Khoảng tin cậy được giải thích kỹ ở Buổi 6.</a:t>
+              <a:t>Ý chính: hỏi 'lớn cỡ nào, chắc đến đâu, lúc nào?' với mọi kết quả bạn đọc. Khoảng tin cậy được giải thích kỹ ở Buổi 6.</a:t>
             </a:r>
           </a:p>
           <a:p>
             <a:r>
               <a:rPr lang="en-US" sz="1400" b="0" dirty="0"/>
-              <a:t>Hỏi cả lớp: 'Câu nào đủ tin cậy để thay đổi thực hành?' Mong đợi: câu bên phải - thấy được độ lớn và độ không chắc chắn.</a:t>
+              <a:t>Hỏi cả lớp: 'Câu nào đủ tin cậy để thay đổi thực hành?' Mong đợi: câu bên phải, vì thấy được độ lớn và độ không chắc chắn.</a:t>
             </a:r>
           </a:p>
           <a:p>
@@ -2936,13 +2936,13 @@
           <a:p>
             <a:r>
               <a:rPr lang="en-US" sz="1400" b="0" dirty="0"/>
-              <a:t>Dòng 3: từ ngữ nhân quả cho dữ liệu quan sát - tiêu đề Bài báo 2 viết 'Impact of...' (tác động) dù đoàn hệ chỉ cho thấy liên quan (phần kết luận tóm tắt viết đúng là 'associated').</a:t>
+              <a:t>Dòng 3: từ ngữ nhân quả cho dữ liệu quan sát. Tiêu đề Bài báo 2 viết 'Impact of...' (tác động) dù đoàn hệ chỉ cho thấy liên quan (phần kết luận tóm tắt viết đúng là 'associated').</a:t>
             </a:r>
           </a:p>
           <a:p>
             <a:r>
               <a:rPr lang="en-US" sz="1400" b="0" dirty="0"/>
-              <a:t>Dòng 4: tuyên bố cải thiện dựa trên thay đổi trước - sau trong một nhóm, không so sánh giữa các nhóm.</a:t>
+              <a:t>Dòng 4: tuyên bố cải thiện dựa trên thay đổi trước-sau trong một nhóm, không so sánh giữa các nhóm.</a:t>
             </a:r>
           </a:p>
           <a:p>
@@ -3128,7 +3128,7 @@
           <a:p>
             <a:r>
               <a:rPr lang="en-US" sz="1400" b="0" dirty="0"/>
-              <a:t>Đáp án: 1 từ nhân quả cho thiết kế quan sát - viết 'có liên quan với viêm phổi thấp hơn'. 2 p = 0,31 không phải bằng chứng có khác biệt - viết 'không có khác biệt có ý nghĩa; KTC rộng'. 3 tiêu điểm là kết cục phụ - nêu kết quả chính trước. 4 thay đổi trước - sau không có nhóm so sánh - các yếu tố khác có thể đã thay đổi; viết 'tử vong thấp hơn sau khi áp dụng; không có nhóm chứng nên không thể quy cho quy trình'.</a:t>
+              <a:t>Đáp án: 1 Từ nhân quả cho thiết kế quan sát: viết 'có liên quan với viêm phổi thấp hơn'. 2 p = 0,31 không phải bằng chứng có khác biệt: viết 'không có khác biệt có ý nghĩa; KTC rộng'. 3 Tiêu điểm là kết cục phụ: nêu kết quả chính trước. 4 Thay đổi trước-sau không có nhóm so sánh, và các yếu tố khác có thể đã thay đổi: viết 'tử vong thấp hơn sau khi áp dụng; không có nhóm chứng nên không thể quy cho quy trình'.</a:t>
             </a:r>
           </a:p>
           <a:p>
@@ -3215,19 +3215,19 @@
           <a:p>
             <a:r>
               <a:rPr lang="en-US" sz="1400" b="0" dirty="0"/>
-              <a:t>Làm cá nhân, yên lặng trong 8 phút, rồi 4 phút so sánh với người bên cạnh. Người mới cần thêm thời gian - đừng vội.</a:t>
+              <a:t>Làm cá nhân, yên lặng trong 8 phút, rồi 4 phút so sánh với người bên cạnh. Người mới cần thêm thời gian. Đừng vội.</a:t>
             </a:r>
           </a:p>
           <a:p>
             <a:r>
               <a:rPr lang="en-US" sz="1400" b="0" dirty="0"/>
-              <a:t>Học viên đọc tóm tắt thật từ bản phát tay (Course/Papers - có bản chú giải tiếng Anh và tiếng Việt, nhưng nên dùng tóm tắt gốc không chú giải cho bài tập này).</a:t>
+              <a:t>Học viên đọc tóm tắt thật từ bản phát tay (Course/Papers có bản chú giải tiếng Anh và tiếng Việt, nhưng nên dùng tóm tắt gốc không chú giải cho bài tập này).</a:t>
             </a:r>
           </a:p>
           <a:p>
             <a:r>
               <a:rPr lang="en-US" sz="1400" b="0" dirty="0"/>
-              <a:t>Đi vòng. Ô khó nhất: kết cục chính (nhiều người ghi 'tử vong' - thực ra là cân bằng dịch tích lũy ngày 5) và kết quả chính (cần chép chênh lệch kèm KTC 95%, -15,2 đến 41,6, cắt qua số 0).</a:t>
+              <a:t>Đi vòng. Ô khó nhất: kết cục chính (nhiều người ghi 'tử vong', nhưng thực ra là cân bằng dịch tích lũy ngày 5) và kết quả chính (cần chép chênh lệch kèm KTC 95%, -15,2 đến 41,6, cắt qua số 0).</a:t>
             </a:r>
           </a:p>
           <a:p>
@@ -3326,25 +3326,25 @@
           <a:p>
             <a:r>
               <a:rPr lang="en-US" sz="1400" b="0" dirty="0"/>
-              <a:t>Điểm chính: (1) thử nghiệm PILOT với 48 bệnh nhân được phân tích; (2) kết cục chính là cân bằng dịch tích lũy ngày 5, không phải tử vong; (3) KTC của chênh lệch (-15,2 đến 41,6 ml/kg) chứa số 0, nên không có bằng chứng khác biệt; (4) kết luận tóm tắt khớp với kết quả - thực hành tốt; (5) thử nghiệm đã được đăng ký.</a:t>
+              <a:t>Điểm chính: (1) thử nghiệm PILOT với 48 bệnh nhân được phân tích; (2) kết cục chính là cân bằng dịch tích lũy ngày 5, không phải tử vong; (3) KTC của chênh lệch (-15,2 đến 41,6 ml/kg) chứa số 0, nên không có bằng chứng khác biệt; (4) kết luận tóm tắt khớp với kết quả (thực hành tốt); (5) thử nghiệm đã được đăng ký.</a:t>
             </a:r>
           </a:p>
           <a:p>
             <a:r>
               <a:rPr lang="en-US" sz="1400" b="0" dirty="0"/>
-              <a:t>Nếu có học viên tinh ý hỏi: trung vị (6,9 vs 35,0 ml/kg) chênh nhau nhiều hơn mức chênh lệch được báo cáo 13,2 vì chênh lệch được ước tính theo cách khác - bản chú giải của khóa học có nêu điểm không khớp này. Để dành cho Buổi 6-8.</a:t>
+              <a:t>Nếu có học viên tinh ý hỏi: trung vị (6,9 vs 35,0 ml/kg) chênh nhau nhiều hơn mức chênh lệch được báo cáo 13,2 vì chênh lệch được ước tính theo cách khác. Bản chú giải của khóa học có nêu điểm không khớp này. Để dành cho Buổi 6-8.</a:t>
             </a:r>
           </a:p>
           <a:p>
             <a:r>
               <a:rPr lang="en-US" sz="1400" b="0" dirty="0"/>
-              <a:t>Liên hệ câu hỏi của ta: thử nghiệm này KHÔNG trả lời câu hỏi tử vong 28 ngày - nó trả lời câu hỏi kiểu khả thi về cân bằng dịch. Đó chính là 'phiên bản khả thi' ở slide FINER.</a:t>
+              <a:t>Liên hệ câu hỏi của ta: thử nghiệm này KHÔNG trả lời câu hỏi tử vong 28 ngày. Nó trả lời câu hỏi kiểu khả thi về cân bằng dịch. Đó chính là 'phiên bản khả thi' ở slide FINER.</a:t>
             </a:r>
           </a:p>
           <a:p>
             <a:r>
               <a:rPr lang="en-US" sz="1400" b="0" dirty="0"/>
-              <a:t>Thời gian: 5 phút - đi từng dòng. Phần 2.3 kết thúc lúc 2:05.</a:t>
+              <a:t>Thời gian: 5 phút, đi từng dòng. Phần 2.3 kết thúc lúc 2:05.</a:t>
             </a:r>
           </a:p>
         </p:txBody>
@@ -3518,25 +3518,25 @@
           <a:p>
             <a:r>
               <a:rPr lang="en-US" sz="1400" b="0" dirty="0"/>
-              <a:t>Phiếu nằm trong Course/Templates (phiếu tổng quan tài liệu - literature review worksheet). Mỗi bài một dòng, các cột giống nhau.</a:t>
+              <a:t>Phiếu nằm trong Course/Templates (phiếu tổng quan tài liệu, literature review worksheet). Mỗi bài một dòng, các cột giống nhau.</a:t>
             </a:r>
           </a:p>
           <a:p>
             <a:r>
               <a:rPr lang="en-US" sz="1400" b="0" dirty="0"/>
-              <a:t>Dòng 1-3 là các bài của khóa học: Bài báo 1 (Boulet 2024, RCT thử nghiệm - cân bằng dịch, khác biệt không có ý nghĩa), Bài báo 2 (Hyun 2023, đoàn hệ ghép cặp - cân bằng dương ở ngày 2-3 liên quan với tử vong 28 ngày cao hơn), và CLASSIC (Meyhoff 2022 - không khác biệt tử vong 90 ngày).</a:t>
+              <a:t>Dòng 1-3 là các bài của khóa học: Bài báo 1 (Boulet 2024, RCT thử nghiệm: cân bằng dịch, khác biệt không có ý nghĩa), Bài báo 2 (Hyun 2023, đoàn hệ ghép cặp: cân bằng dương ở ngày 2-3 liên quan với tử vong 28 ngày cao hơn), và CLASSIC (Meyhoff 2022: không khác biệt tử vong 90 ngày).</a:t>
             </a:r>
           </a:p>
           <a:p>
             <a:r>
               <a:rPr lang="en-US" sz="1400" b="0" dirty="0"/>
-              <a:t>Lưu ý: ba bài đo kết cục khác nhau ở thời điểm khác nhau - bảng ma trận làm điều này lộ ra ngay.</a:t>
+              <a:t>Lưu ý: ba bài đo kết cục khác nhau ở thời điểm khác nhau. Bảng ma trận làm điều này lộ ra ngay.</a:t>
             </a:r>
           </a:p>
           <a:p>
             <a:r>
               <a:rPr lang="en-US" sz="1400" b="0" dirty="0"/>
-              <a:t>Ý chính: cột 'hạn chế chính' là nơi khoảng trống - và lý do cho nghiên cứu của bạn - xuất hiện.</a:t>
+              <a:t>Ý chính: cột 'hạn chế chính' là nơi khoảng trống, và lý do cho nghiên cứu của bạn, xuất hiện.</a:t>
             </a:r>
           </a:p>
           <a:p>
@@ -3623,7 +3623,7 @@
           <a:p>
             <a:r>
               <a:rPr lang="en-US" sz="1400" b="0" dirty="0"/>
-              <a:t>Các bài báo bạn đọc trở thành phần Đặt vấn đề của đề cương - cùng cái phễu như phần trên của đồng hồ cát IMRaD.</a:t>
+              <a:t>Các bài báo bạn đọc trở thành phần Đặt vấn đề của đề cương. Đó là cùng cái phễu như phần trên của đồng hồ cát IMRaD.</a:t>
             </a:r>
           </a:p>
           <a:p>
@@ -3635,7 +3635,7 @@
           <a:p>
             <a:r>
               <a:rPr lang="en-US" sz="1400" b="0" dirty="0"/>
-              <a:t>Đoạn 2, điều chưa biết: khoảng trống - nghiên cứu mâu thuẫn, chưa có nghiên cứu trên bệnh nhân như của ta, kết cục chưa được đo. Cột 'hạn chế' trong bảng ma trận tài liệu nuôi đoạn này.</a:t>
+              <a:t>Đoạn 2, điều chưa biết: khoảng trống (nghiên cứu mâu thuẫn, chưa có nghiên cứu trên bệnh nhân như của ta, kết cục chưa được đo). Cột 'hạn chế' trong bảng ma trận tài liệu nuôi đoạn này.</a:t>
             </a:r>
           </a:p>
           <a:p>
@@ -3740,7 +3740,7 @@
           <a:p>
             <a:r>
               <a:rPr lang="en-US" sz="1400" b="0" dirty="0"/>
-              <a:t>Đoạn 1 (đã biết) trích Bài báo 2. Đoạn 2 (chưa biết) trích CLASSIC, CLOVERS và Bài báo 1, kết thúc bằng khoảng trống. Đoạn 3 (vì sao ở đây) dùng số liệu TẠI CHỖ - thay câu về audit bằng số liệu của bạn - và kết thúc bằng câu hỏi.</a:t>
+              <a:t>Đoạn 1 (đã biết) trích Bài báo 2. Đoạn 2 (chưa biết) trích CLASSIC, CLOVERS và Bài báo 1, kết thúc bằng khoảng trống. Đoạn 3 (vì sao ở đây) dùng số liệu TẠI CHỖ (thay câu về audit bằng số liệu của bạn) và kết thúc bằng câu hỏi.</a:t>
             </a:r>
           </a:p>
           <a:p>
@@ -3845,7 +3845,7 @@
           <a:p>
             <a:r>
               <a:rPr lang="en-US" sz="1400" b="0" dirty="0"/>
-              <a:t>Tên tốt nêu đối tượng, can thiệp và so sánh (hoặc phơi nhiễm), và thiết kế - khoảng 10 đến 16 từ.</a:t>
+              <a:t>Tên tốt nêu đối tượng, can thiệp và so sánh (hoặc phơi nhiễm), và thiết kế, khoảng 10 đến 16 từ.</a:t>
             </a:r>
           </a:p>
           <a:p>
@@ -3857,7 +3857,7 @@
           <a:p>
             <a:r>
               <a:rPr lang="en-US" sz="1400" b="0" dirty="0"/>
-              <a:t>Tránh viết tắt và từ quảng cáo hay nhân quả ('tác động', 'mới', 'hiệu quả của') - nhất là với thiết kế quan sát (so sánh tiêu đề Bài báo 2).</a:t>
+              <a:t>Tránh viết tắt và từ quảng cáo hay nhân quả ('tác động', 'mới', 'hiệu quả của'), nhất là với thiết kế quan sát (so sánh tiêu đề Bài báo 2).</a:t>
             </a:r>
           </a:p>
           <a:p>
@@ -3869,7 +3869,7 @@
           <a:p>
             <a:r>
               <a:rPr lang="en-US" sz="1400" b="0" dirty="0"/>
-              <a:t>Hỏi cả lớp: 'Dịch truyền ở ICU có phải tên đề tài tốt?' Mong đợi: không - thiếu đối tượng, so sánh và thiết kế.</a:t>
+              <a:t>Hỏi cả lớp: 'Dịch truyền ở ICU có phải tên đề tài tốt?' Mong đợi: không. Thiếu đối tượng, so sánh và thiết kế.</a:t>
             </a:r>
           </a:p>
           <a:p>
@@ -4061,7 +4061,7 @@
           <a:p>
             <a:r>
               <a:rPr lang="en-US" sz="1400" b="0" dirty="0"/>
-              <a:t>Giảng viên đi vòng. Lần ghé đầu: chuỗi tìm kiếm có hợp lý không (ngoặc, OR trong khối, AND giữa khối, không có khối so sánh)? Quá nhiều kết quả - thêm khối hoặc bộ lọc; quá ít - thêm từ đồng nghĩa.</a:t>
+              <a:t>Giảng viên đi vòng. Lần ghé đầu: chuỗi tìm kiếm có hợp lý không (ngoặc, OR trong khối, AND giữa khối, không có khối so sánh)? Quá nhiều kết quả: thêm khối hoặc bộ lọc. Quá ít: thêm từ đồng nghĩa.</a:t>
             </a:r>
           </a:p>
           <a:p>
@@ -4184,7 +4184,7 @@
           <a:p>
             <a:r>
               <a:rPr lang="en-US" sz="1400" b="0" dirty="0"/>
-              <a:t>Hỏi cả lớp: 'Khi cần bằng chứng nhanh, bạn thường làm gì?' Trả lời thật: Google, hỏi đồng nghiệp, UpToDate, hướng dẫn điều trị. Đều ổn cho chăm sóc - nhưng đề cương cần một chiến lược tìm kiếm được ghi lại.</a:t>
+              <a:t>Hỏi cả lớp: 'Khi cần bằng chứng nhanh, bạn thường làm gì?' Trả lời thật: Google, hỏi đồng nghiệp, UpToDate, hướng dẫn điều trị. Đều ổn cho chăm sóc, nhưng đề cương cần một chiến lược tìm kiếm được ghi lại.</a:t>
             </a:r>
           </a:p>
           <a:p>
@@ -4370,7 +4370,7 @@
           <a:p>
             <a:r>
               <a:rPr lang="en-US" sz="1400" b="0" dirty="0"/>
-              <a:t>Nối sang buổi sau: hai thứ Bảy tới (Buổi 3 và 4) ta chọn THIẾT KẾ phù hợp cho câu hỏi của từng nhóm - và tìm hiểu sai lệch, yếu tố gây nhiễu và các số đo tác động qua hai bài báo về dịch truyền.</a:t>
+              <a:t>Nối sang buổi sau: hai thứ Bảy tới (Buổi 3 và 4) ta chọn THIẾT KẾ phù hợp cho câu hỏi của từng nhóm, và tìm hiểu sai lệch, yếu tố gây nhiễu và các số đo tác động qua hai bài báo về dịch truyền.</a:t>
             </a:r>
           </a:p>
           <a:p>
@@ -4457,7 +4457,7 @@
           <a:p>
             <a:r>
               <a:rPr lang="en-US" sz="1400" b="0" dirty="0"/>
-              <a:t>Đáp án: câu 1 - OR (một trong hai từ). Câu 2 - cân bằng dịch tích lũy ngày 5 (ml/kg), không phải tử vong.</a:t>
+              <a:t>Đáp án: (1) OR (một trong hai từ). (2) Cân bằng dịch tích lũy ngày 5 (ml/kg), không phải tử vong.</a:t>
             </a:r>
           </a:p>
           <a:p>
@@ -4754,7 +4754,7 @@
           <a:p>
             <a:r>
               <a:rPr lang="en-US" sz="1400" b="0" dirty="0"/>
-              <a:t>Thư viện Cochrane: bắt đầu từ đây với câu hỏi điều trị - một tổng quan hệ thống tốt có thể đã trả lời câu hỏi của bạn.</a:t>
+              <a:t>Thư viện Cochrane: bắt đầu từ đây với câu hỏi điều trị. Một tổng quan hệ thống tốt có thể đã trả lời câu hỏi của bạn.</a:t>
             </a:r>
           </a:p>
           <a:p>
@@ -4871,7 +4871,7 @@
           <a:p>
             <a:r>
               <a:rPr lang="en-US" sz="1400" b="0" dirty="0"/>
-              <a:t>Giao diện thỉnh thoảng thay đổi - kiểm tra trước khi trình diễn trực tiếp.</a:t>
+              <a:t>Giao diện thỉnh thoảng thay đổi. Hãy kiểm tra trước khi trình diễn trực tiếp.</a:t>
             </a:r>
           </a:p>
           <a:p>
@@ -5162,7 +5162,7 @@
           <a:p>
             <a:r>
               <a:rPr lang="en-US" sz="1400" b="0" dirty="0"/>
-              <a:t>Slide bản quyền - để trên màn hình khi học viên ra về.</a:t>
+              <a:t>Slide bản quyền. Để trên màn hình khi học viên ra về.</a:t>
             </a:r>
           </a:p>
         </p:txBody>
@@ -5249,7 +5249,7 @@
           <a:p>
             <a:r>
               <a:rPr lang="en-US" sz="1400" b="0" dirty="0"/>
-              <a:t>Các con số chỉ là bậc độ lớn - thay đổi hằng ngày.</a:t>
+              <a:t>Các con số chỉ là bậc độ lớn và thay đổi hằng ngày.</a:t>
             </a:r>
           </a:p>
           <a:p>
@@ -5261,7 +5261,7 @@
           <a:p>
             <a:r>
               <a:rPr lang="en-US" sz="1400" b="0" dirty="0"/>
-              <a:t>Hỏi cả lớp: 'Vì sao phải ghi ngày và chuỗi tìm kiếm?' Mong đợi: để lặp lại được - tạp chí và người phản biện sẽ yêu cầu.</a:t>
+              <a:t>Hỏi cả lớp: 'Vì sao phải ghi ngày và chuỗi tìm kiếm?' Mong đợi: để lặp lại được. Tạp chí và người phản biện sẽ yêu cầu.</a:t>
             </a:r>
           </a:p>
           <a:p>
@@ -5360,13 +5360,13 @@
           <a:p>
             <a:r>
               <a:rPr lang="en-US" sz="1400" b="0" dirty="0"/>
-              <a:t>Nhóm so sánh (thường quy) thường bỏ ra - cách viết quá đa dạng.</a:t>
+              <a:t>Nhóm so sánh (thường quy) thường bỏ ra vì cách viết quá đa dạng.</a:t>
             </a:r>
           </a:p>
           <a:p>
             <a:r>
               <a:rPr lang="en-US" sz="1400" b="0" dirty="0"/>
-              <a:t>Lưu ý: PubMed là cơ sở dữ liệu tiếng Anh - luôn tìm bằng thuật ngữ tiếng Anh.</a:t>
+              <a:t>Lưu ý: PubMed là cơ sở dữ liệu tiếng Anh, nên luôn tìm bằng thuật ngữ tiếng Anh.</a:t>
             </a:r>
           </a:p>
           <a:p>
@@ -5477,13 +5477,13 @@
           <a:p>
             <a:r>
               <a:rPr lang="en-US" sz="1400" b="0" dirty="0"/>
-              <a:t>Ở đây P và O cùng một ý - tổn thương do tì đè - nên một khối chứa cả hai. Khối thứ hai là can thiệp.</a:t>
+              <a:t>Ở đây P và O cùng một ý (tổn thương do tì đè) nên một khối chứa cả hai. Khối thứ hai là can thiệp.</a:t>
             </a:r>
           </a:p>
           <a:p>
             <a:r>
               <a:rPr lang="en-US" sz="1400" b="0" dirty="0"/>
-              <a:t>MeSH: tác giả viết pressure ulcer, pressure injury, bedsore, decubitus - đề mục MeSH 'Pressure Ulcer' gom tất cả.</a:t>
+              <a:t>MeSH: tác giả viết pressure ulcer, pressure injury, bedsore, decubitus. Đề mục MeSH 'Pressure Ulcer' gom tất cả.</a:t>
             </a:r>
           </a:p>
           <a:p>
@@ -5576,13 +5576,13 @@
           <a:p>
             <a:r>
               <a:rPr lang="en-US" sz="1400" b="0" dirty="0"/>
-              <a:t>AND: chỉ bài có cả hai khái niệm - ít kết quả hơn. OR: một trong hai từ - nhiều hơn; dùng cho từ đồng nghĩa.</a:t>
+              <a:t>AND: chỉ bài có cả hai khái niệm, nên ít kết quả hơn. OR: một trong hai từ, nên nhiều hơn. Dùng OR cho từ đồng nghĩa.</a:t>
             </a:r>
           </a:p>
           <a:p>
             <a:r>
               <a:rPr lang="en-US" sz="1400" b="0" dirty="0"/>
-              <a:t>NOT loại mọi bài có nhắc từ thứ hai - kể cả bài tốt chỉ nhắc trẻ sơ sinh một lần. Vì vậy NOT rủi ro.</a:t>
+              <a:t>NOT loại mọi bài có nhắc từ thứ hai, kể cả bài tốt chỉ nhắc trẻ sơ sinh một lần. Vì vậy NOT rủi ro.</a:t>
             </a:r>
           </a:p>
           <a:p>
@@ -5594,7 +5594,7 @@
           <a:p>
             <a:r>
               <a:rPr lang="en-US" sz="1400" b="0" dirty="0"/>
-              <a:t>Hỏi cả lớp: 'septic shock AND fluids so với septic shock OR fluids - cái nào nhiều kết quả hơn?' Mong đợi: OR.</a:t>
+              <a:t>Hỏi cả lớp: 'septic shock AND fluids so với septic shock OR fluids: cái nào nhiều kết quả hơn?' Mong đợi: OR.</a:t>
             </a:r>
           </a:p>
           <a:p>
@@ -5681,7 +5681,7 @@
           <a:p>
             <a:r>
               <a:rPr lang="en-US" sz="1400" b="0" dirty="0"/>
-              <a:t>Đáp án: 1 AND. 2 OR. 3 Ít hơn (AND thu hẹp). 4 Nó loại mọi bài có nhắc trẻ em ở bất kỳ đâu - kể cả nghiên cứu tốt ở người lớn chỉ nhắc trẻ em một lần.</a:t>
+              <a:t>Đáp án: 1 AND. 2 OR. 3 Ít hơn (AND thu hẹp). 4 Nó loại mọi bài có nhắc trẻ em ở bất kỳ đâu, kể cả nghiên cứu tốt ở người lớn chỉ nhắc trẻ em một lần.</a:t>
             </a:r>
           </a:p>
           <a:p>
@@ -8937,7 +8937,7 @@
                 <a:latin typeface="Segoe UI"/>
                 <a:cs typeface="Segoe UI"/>
               </a:rPr>
-              <a:t>2.3  Đọc một bài báo trong 15 phút - và 2.4 từ y văn đến phần đặt vấn đề</a:t>
+              <a:t>2.3  Đọc một bài báo trong 15 phút và 2.4 từ y văn đến phần đặt vấn đề</a:t>
             </a:r>
           </a:p>
           <a:p>
@@ -10587,7 +10587,7 @@
                 <a:latin typeface="Segoe UI"/>
                 <a:cs typeface="Segoe UI"/>
               </a:rPr>
-              <a:t>Tìm một từ khóa: septic shock - ghi lại số kết quả</a:t>
+              <a:t>Tìm một từ khóa, septic shock, và ghi lại số kết quả</a:t>
             </a:r>
           </a:p>
           <a:p>
@@ -10742,7 +10742,7 @@
                 <a:latin typeface="Segoe UI"/>
                 <a:cs typeface="Segoe UI"/>
               </a:rPr>
-              <a:t>Send to - Citation manager (sẽ nhập vào ở phần 2.2)</a:t>
+              <a:t>Send to: Citation manager (sẽ nhập vào ở phần 2.2)</a:t>
             </a:r>
           </a:p>
         </p:txBody>
@@ -11385,7 +11385,7 @@
                 <a:latin typeface="Segoe UI"/>
                 <a:cs typeface="Segoe UI"/>
               </a:rPr>
-              <a:t>Một chuỗi tìm kiếm trên giấy - nhóm chạy nó trong Xây dựng đề cương 2</a:t>
+              <a:t>Một chuỗi tìm kiếm trên giấy, để nhóm chạy trong Xây dựng đề cương 2</a:t>
             </a:r>
           </a:p>
         </p:txBody>
@@ -11623,7 +11623,7 @@
                 <a:latin typeface="Segoe UI"/>
                 <a:cs typeface="Segoe UI"/>
               </a:rPr>
-              <a:t>Giữ lại mọi tài liệu bạn tìm được - và dùng công trình của người khác một cách trung thực.</a:t>
+              <a:t>Giữ lại mọi tài liệu bạn tìm được, và dùng công trình của người khác một cách trung thực.</a:t>
             </a:r>
           </a:p>
           <a:p>
@@ -12897,7 +12897,7 @@
                 <a:latin typeface="Segoe UI"/>
                 <a:cs typeface="Segoe UI"/>
               </a:rPr>
-              <a:t>Xem: tác giả, tiêu đề, tạp chí, năm, DOI - không gõ tay gì cả</a:t>
+              <a:t>Xem: tác giả, tiêu đề, tạp chí, năm, DOI, không gõ tay gì cả</a:t>
             </a:r>
           </a:p>
           <a:p>
@@ -12928,7 +12928,7 @@
                 <a:latin typeface="Segoe UI"/>
                 <a:cs typeface="Segoe UI"/>
               </a:rPr>
-              <a:t>Trong Word: thẻ Zotero - Add/Edit Citation - gõ 'Meyhoff'</a:t>
+              <a:t>Trong Word: thẻ Zotero, Add/Edit Citation, gõ 'Meyhoff'</a:t>
             </a:r>
           </a:p>
           <a:p>
@@ -12959,7 +12959,7 @@
                 <a:latin typeface="Segoe UI"/>
                 <a:cs typeface="Segoe UI"/>
               </a:rPr>
-              <a:t>Add/Edit Bibliography - danh mục tài liệu xuất hiện</a:t>
+              <a:t>Add/Edit Bibliography: danh mục tài liệu xuất hiện</a:t>
             </a:r>
           </a:p>
           <a:p>
@@ -13136,7 +13136,7 @@
                 <a:latin typeface="Segoe UI"/>
                 <a:cs typeface="Segoe UI"/>
               </a:rPr>
-              <a:t>Mọi người đã thấy trọn chu trình gom - trích dẫn - danh mục</a:t>
+              <a:t>Mọi người đã thấy trọn chu trình gom → trích dẫn → danh mục</a:t>
             </a:r>
           </a:p>
         </p:txBody>
@@ -13686,7 +13686,7 @@
                 <a:latin typeface="Segoe UI"/>
                 <a:cs typeface="Segoe UI"/>
               </a:rPr>
-              <a:t>Thay đổi cấu trúc, không chỉ thay từ - và luôn trích dẫn nguồn.</a:t>
+              <a:t>Thay đổi cả cấu trúc lẫn từ ngữ, và luôn trích dẫn nguồn.</a:t>
             </a:r>
           </a:p>
         </p:txBody>
@@ -14161,7 +14161,7 @@
                 <a:latin typeface="Segoe UI"/>
                 <a:cs typeface="Segoe UI"/>
               </a:rPr>
-              <a:t>Trả lời trên giấy - đối chiếu với slide sau</a:t>
+              <a:t>Trả lời trên giấy, đối chiếu với slide sau</a:t>
             </a:r>
           </a:p>
         </p:txBody>
@@ -16230,7 +16230,7 @@
                 <a:latin typeface="Segoe UI"/>
                 <a:cs typeface="Segoe UI"/>
               </a:rPr>
-              <a:t>Không cần đọc từng chữ - cần đọc đúng chỗ, theo đúng thứ tự.</a:t>
+              <a:t>Không cần đọc từng chữ. Hãy đọc đúng chỗ, theo đúng thứ tự.</a:t>
             </a:r>
           </a:p>
           <a:p>
@@ -16248,7 +16248,7 @@
                 <a:latin typeface="Segoe UI"/>
                 <a:cs typeface="Segoe UI"/>
               </a:rPr>
-              <a:t>40 phút: cấu trúc bài báo, thứ tự đọc, phần tóm tắt, thổi phồng - và bài tập đọc Bài báo 1</a:t>
+              <a:t>40 phút: cấu trúc bài báo, thứ tự đọc, phần tóm tắt, thổi phồng, và bài tập đọc Bài báo 1</a:t>
             </a:r>
           </a:p>
         </p:txBody>
@@ -16798,7 +16798,7 @@
                 <a:latin typeface="Segoe UI"/>
                 <a:cs typeface="Segoe UI"/>
               </a:rPr>
-              <a:t>Tiêu đề, tóm tắt, hình và bảng, phương pháp - dừng sớm nếu không liên quan.</a:t>
+              <a:t>Tiêu đề, tóm tắt, hình và bảng, phương pháp. Dừng sớm nếu không liên quan.</a:t>
             </a:r>
           </a:p>
         </p:txBody>
@@ -19835,7 +19835,7 @@
                 <a:latin typeface="Segoe UI"/>
                 <a:cs typeface="Segoe UI"/>
               </a:rPr>
-              <a:t>Kết cục chính là cân bằng dịch, không phải tử vong - đọc đúng điều nghiên cứu đã đo.</a:t>
+              <a:t>Kết cục chính là cân bằng dịch, không phải tử vong. Hãy đọc đúng điều nghiên cứu đã đo.</a:t>
             </a:r>
           </a:p>
         </p:txBody>
@@ -20641,7 +20641,7 @@
                 <a:latin typeface="Segoe UI"/>
                 <a:cs typeface="Segoe UI"/>
               </a:rPr>
-              <a:t>Đã biết, chưa biết, vì sao ở đây - rồi câu hỏi tự nhiên xuất hiện.</a:t>
+              <a:t>Đã biết, chưa biết, vì sao ở đây: rồi câu hỏi tự nhiên xuất hiện.</a:t>
             </a:r>
           </a:p>
         </p:txBody>
@@ -20916,7 +20916,7 @@
                 <a:latin typeface="Segoe UI"/>
                 <a:cs typeface="Segoe UI"/>
               </a:rPr>
-              <a:t>Ba đoạn ngắn, mỗi đoạn một nhiệm vụ - và tài liệu tham khảo trong ngoặc.</a:t>
+              <a:t>Ba đoạn ngắn, mỗi đoạn một nhiệm vụ, và tài liệu tham khảo trong ngoặc.</a:t>
             </a:r>
           </a:p>
         </p:txBody>
@@ -21447,7 +21447,7 @@
                 <a:latin typeface="Segoe UI"/>
                 <a:cs typeface="Segoe UI"/>
               </a:rPr>
-              <a:t>35 phút làm việc nhóm - hoàn thành Phần 1 của đề cương nghiên cứu</a:t>
+              <a:t>35 phút làm việc nhóm để hoàn thành Phần 1 của đề cương nghiên cứu</a:t>
             </a:r>
           </a:p>
         </p:txBody>
@@ -21834,7 +21834,7 @@
                 <a:latin typeface="Segoe UI"/>
                 <a:cs typeface="Segoe UI"/>
               </a:rPr>
-              <a:t>Viết nháp đặt vấn đề: đã biết - chưa biết - vì sao ở đây</a:t>
+              <a:t>Viết nháp đặt vấn đề: đã biết, chưa biết, vì sao ở đây</a:t>
             </a:r>
           </a:p>
           <a:p>
@@ -22380,7 +22380,7 @@
                 <a:latin typeface="Segoe UI"/>
                 <a:cs typeface="Segoe UI"/>
               </a:rPr>
-              <a:t>40 phút: phễu tìm kiếm, từ PICO đến khối tìm kiếm, Boolean, MeSH, công cụ tìm kiếm - và trình diễn PubMed trực tiếp</a:t>
+              <a:t>40 phút: phễu tìm kiếm, từ PICO đến khối tìm kiếm, Boolean, MeSH, công cụ tìm kiếm và trình diễn PubMed trực tiếp</a:t>
             </a:r>
           </a:p>
         </p:txBody>
@@ -22734,7 +22734,7 @@
                           </a:solidFill>
                           <a:latin typeface="Segoe UI"/>
                         </a:rPr>
-                        <a:t>Thu hẹp / mở rộng / loại bỏ - OR trong khối, AND giữa các khối</a:t>
+                        <a:t>Thu hẹp / mở rộng / loại bỏ. OR trong khối, AND giữa các khối</a:t>
                       </a:r>
                     </a:p>
                   </a:txBody>
@@ -22830,7 +22830,7 @@
                           </a:solidFill>
                           <a:latin typeface="Segoe UI"/>
                         </a:rPr>
-                        <a:t>Chép và đổi vài từ - là đạo văn dù có trích dẫn</a:t>
+                        <a:t>Chép và đổi vài từ: đạo văn dù có trích dẫn</a:t>
                       </a:r>
                     </a:p>
                   </a:txBody>
@@ -24737,7 +24737,7 @@
                 <a:latin typeface="Segoe UI"/>
                 <a:cs typeface="Segoe UI"/>
               </a:rPr>
-              <a:t>Slide bổ sung — Buổi 2</a:t>
+              <a:t>Slide bổ sung: Buổi 2</a:t>
             </a:r>
           </a:p>
           <a:p>
@@ -26337,7 +26337,7 @@
                 <a:latin typeface="Segoe UI"/>
                 <a:cs typeface="Segoe UI"/>
               </a:rPr>
-              <a:t>Lối tắt nhanh để hỏi 'có bằng chứng tốt không?' - không thay thế tìm kiếm của bạn.</a:t>
+              <a:t>Lối tắt nhanh để hỏi 'có bằng chứng tốt không?', không thay thế tìm kiếm của bạn.</a:t>
             </a:r>
           </a:p>
         </p:txBody>
@@ -26662,7 +26662,7 @@
                 <a:latin typeface="Segoe UI"/>
                 <a:cs typeface="Segoe UI"/>
               </a:rPr>
-              <a:t>Xem: tạp chí, luận văn, bản thảo trước in - xếp hạng bằng thuật toán ẩn</a:t>
+              <a:t>Xem: tạp chí, luận văn, bản thảo trước in, xếp hạng bằng thuật toán ẩn</a:t>
             </a:r>
           </a:p>
           <a:p>
@@ -26693,7 +26693,7 @@
                 <a:latin typeface="Segoe UI"/>
                 <a:cs typeface="Segoe UI"/>
               </a:rPr>
-              <a:t>Dưới một thử nghiệm chính, bấm 'Cited by' - tìm trong các bài trích dẫn</a:t>
+              <a:t>Dưới một thử nghiệm chính, bấm 'Cited by', rồi tìm trong các bài trích dẫn</a:t>
             </a:r>
           </a:p>
           <a:p>
@@ -26781,7 +26781,7 @@
                 <a:latin typeface="Segoe UI"/>
                 <a:cs typeface="Segoe UI"/>
               </a:rPr>
-              <a:t>Học viên thấy Scholar bổ sung gì - và thiếu gì</a:t>
+              <a:t>Học viên thấy Scholar bổ sung gì và thiếu gì</a:t>
             </a:r>
           </a:p>
         </p:txBody>
@@ -28944,7 +28944,7 @@
                 <a:latin typeface="Segoe UI"/>
                 <a:cs typeface="Segoe UI"/>
               </a:rPr>
-              <a:t>AND thu hẹp, OR mở rộng, NOT loại bỏ - hạn chế dùng NOT.</a:t>
+              <a:t>AND thu hẹp, OR mở rộng, NOT loại bỏ. Hạn chế dùng NOT.</a:t>
             </a:r>
           </a:p>
         </p:txBody>

--- a/vi/files/slides/Session_2_VN.pptx
+++ b/vi/files/slides/Session_2_VN.pptx
@@ -3332,7 +3332,7 @@
           <a:p>
             <a:r>
               <a:rPr lang="en-US" sz="1400" b="0" dirty="0"/>
-              <a:t>Nếu có học viên tinh ý hỏi: trung vị (6,9 vs 35,0 ml/kg) chênh nhau nhiều hơn mức chênh lệch được báo cáo 13,2 vì chênh lệch được ước tính theo cách khác. Bản chú giải của khóa học có nêu điểm không khớp này. Để dành cho Buổi 6-8.</a:t>
+              <a:t>Nếu có học viên tinh ý hỏi: trung vị (6,9 vs 35,0 ml/kg) chênh nhau nhiều hơn mức chênh lệch được báo cáo 13,2 vì 13,2 là chênh lệch giữa hai trung bình (phần Phương pháp báo cáo chênh lệch trung bình kèm KTC 95%), không phải chênh lệch giữa hai trung vị. Bản chú giải của khóa học có nêu điểm không khớp này. Để dành cho Buổi 6-8.</a:t>
             </a:r>
           </a:p>
           <a:p>
@@ -8765,8 +8765,8 @@
                 <a:solidFill>
                   <a:srgbClr val="0D7377"/>
                 </a:solidFill>
-                <a:latin typeface="Segoe UI"/>
-                <a:cs typeface="Segoe UI"/>
+                <a:latin typeface="Arial"/>
+                <a:cs typeface="Arial"/>
               </a:rPr>
               <a:t>Buổi 2 · Tìm &amp; đọc: bằng chứng</a:t>
             </a:r>
@@ -8833,8 +8833,8 @@
                 <a:solidFill>
                   <a:srgbClr val="0070C0"/>
                 </a:solidFill>
-                <a:latin typeface="Segoe UI"/>
-                <a:cs typeface="Segoe UI"/>
+                <a:latin typeface="Arial"/>
+                <a:cs typeface="Arial"/>
               </a:rPr>
               <a:t>Tuần 2 · Thứ Bảy</a:t>
             </a:r>
@@ -8858,8 +8858,8 @@
                 <a:solidFill>
                   <a:srgbClr val="000000"/>
                 </a:solidFill>
-                <a:latin typeface="Segoe UI"/>
-                <a:cs typeface="Segoe UI"/>
+                <a:latin typeface="Arial"/>
+                <a:cs typeface="Arial"/>
               </a:rPr>
               <a:t>Câu hỏi ôn tập Buổi 1</a:t>
             </a:r>
@@ -8877,8 +8877,8 @@
                 <a:solidFill>
                   <a:srgbClr val="000000"/>
                 </a:solidFill>
-                <a:latin typeface="Segoe UI"/>
-                <a:cs typeface="Segoe UI"/>
+                <a:latin typeface="Arial"/>
+                <a:cs typeface="Arial"/>
               </a:rPr>
               <a:t>2.1  Tìm bằng chứng: từ PICO đến tìm kiếm, Boolean, MeSH, trình diễn PubMed</a:t>
             </a:r>
@@ -8896,8 +8896,8 @@
                 <a:solidFill>
                   <a:srgbClr val="000000"/>
                 </a:solidFill>
-                <a:latin typeface="Segoe UI"/>
-                <a:cs typeface="Segoe UI"/>
+                <a:latin typeface="Arial"/>
+                <a:cs typeface="Arial"/>
               </a:rPr>
               <a:t>2.2  Quản lý và trích dẫn: trình diễn Zotero, kiểu trích dẫn, diễn đạt lại, y văn xám</a:t>
             </a:r>
@@ -8915,8 +8915,8 @@
                 <a:solidFill>
                   <a:srgbClr val="000000"/>
                 </a:solidFill>
-                <a:latin typeface="Segoe UI"/>
-                <a:cs typeface="Segoe UI"/>
+                <a:latin typeface="Arial"/>
+                <a:cs typeface="Arial"/>
               </a:rPr>
               <a:t>Giải lao</a:t>
             </a:r>
@@ -8934,8 +8934,8 @@
                 <a:solidFill>
                   <a:srgbClr val="000000"/>
                 </a:solidFill>
-                <a:latin typeface="Segoe UI"/>
-                <a:cs typeface="Segoe UI"/>
+                <a:latin typeface="Arial"/>
+                <a:cs typeface="Arial"/>
               </a:rPr>
               <a:t>2.3  Đọc một bài báo trong 15 phút và 2.4 từ y văn đến phần đặt vấn đề</a:t>
             </a:r>
@@ -8953,8 +8953,8 @@
                 <a:solidFill>
                   <a:srgbClr val="000000"/>
                 </a:solidFill>
-                <a:latin typeface="Segoe UI"/>
-                <a:cs typeface="Segoe UI"/>
+                <a:latin typeface="Arial"/>
+                <a:cs typeface="Arial"/>
               </a:rPr>
               <a:t>Xây dựng đề cương 2: chuỗi tìm kiếm, 5 tài liệu, đặt vấn đề, tên đề tài</a:t>
             </a:r>
@@ -8991,7 +8991,7 @@
                     <a:lumMod val="50000"/>
                   </a:schemeClr>
                 </a:solidFill>
-                <a:latin typeface="Verdana"/>
+                <a:latin typeface="Arial"/>
               </a:rPr>
               <a:t>Neudata | #ClearDataClearImpact</a:t>
             </a:r>
@@ -9121,8 +9121,8 @@
                 <a:solidFill>
                   <a:srgbClr val="0D7377"/>
                 </a:solidFill>
-                <a:latin typeface="Segoe UI"/>
-                <a:cs typeface="Segoe UI"/>
+                <a:latin typeface="Arial"/>
+                <a:cs typeface="Arial"/>
               </a:rPr>
               <a:t>MeSH: nhãn chung cho nhiều cách viết</a:t>
             </a:r>
@@ -9218,8 +9218,8 @@
                 <a:solidFill>
                   <a:srgbClr val="FFFFFF"/>
                 </a:solidFill>
-                <a:latin typeface="Segoe UI"/>
-                <a:cs typeface="Segoe UI"/>
+                <a:latin typeface="Arial"/>
+                <a:cs typeface="Arial"/>
               </a:rPr>
               <a:t>THÔNG ĐIỆP CHÍNH   </a:t>
             </a:r>
@@ -9228,8 +9228,8 @@
                 <a:solidFill>
                   <a:srgbClr val="FFFFFF"/>
                 </a:solidFill>
-                <a:latin typeface="Segoe UI"/>
-                <a:cs typeface="Segoe UI"/>
+                <a:latin typeface="Arial"/>
+                <a:cs typeface="Arial"/>
               </a:rPr>
               <a:t>Tìm cả thuật ngữ MeSH VÀ từ tự do, nối với nhau bằng OR.</a:t>
             </a:r>
@@ -9266,7 +9266,7 @@
                     <a:lumMod val="50000"/>
                   </a:schemeClr>
                 </a:solidFill>
-                <a:latin typeface="Verdana"/>
+                <a:latin typeface="Arial"/>
               </a:rPr>
               <a:t>Neudata | #ClearDataClearImpact</a:t>
             </a:r>
@@ -9396,8 +9396,8 @@
                 <a:solidFill>
                   <a:srgbClr val="0D7377"/>
                 </a:solidFill>
-                <a:latin typeface="Segoe UI"/>
-                <a:cs typeface="Segoe UI"/>
+                <a:latin typeface="Arial"/>
+                <a:cs typeface="Arial"/>
               </a:rPr>
               <a:t>Bốn công cụ giúp tìm chính xác hơn</a:t>
             </a:r>
@@ -9467,8 +9467,8 @@
                 <a:solidFill>
                   <a:srgbClr val="FFFFFF"/>
                 </a:solidFill>
-                <a:latin typeface="Segoe UI"/>
-                <a:cs typeface="Segoe UI"/>
+                <a:latin typeface="Arial"/>
+                <a:cs typeface="Arial"/>
               </a:rPr>
               <a:t>"Ngoặc kép"</a:t>
             </a:r>
@@ -9516,8 +9516,8 @@
                 <a:solidFill>
                   <a:srgbClr val="000000"/>
                 </a:solidFill>
-                <a:latin typeface="Segoe UI"/>
-                <a:cs typeface="Segoe UI"/>
+                <a:latin typeface="Arial"/>
+                <a:cs typeface="Arial"/>
               </a:rPr>
               <a:t>"septic shock"</a:t>
             </a:r>
@@ -9537,8 +9537,8 @@
                 <a:solidFill>
                   <a:srgbClr val="000000"/>
                 </a:solidFill>
-                <a:latin typeface="Segoe UI"/>
-                <a:cs typeface="Segoe UI"/>
+                <a:latin typeface="Arial"/>
+                <a:cs typeface="Arial"/>
               </a:rPr>
               <a:t>= đúng cụm từ,</a:t>
             </a:r>
@@ -9558,8 +9558,8 @@
                 <a:solidFill>
                   <a:srgbClr val="000000"/>
                 </a:solidFill>
-                <a:latin typeface="Segoe UI"/>
-                <a:cs typeface="Segoe UI"/>
+                <a:latin typeface="Arial"/>
+                <a:cs typeface="Arial"/>
               </a:rPr>
               <a:t>không phải hai từ rời</a:t>
             </a:r>
@@ -9601,8 +9601,8 @@
                 <a:solidFill>
                   <a:srgbClr val="FFFFFF"/>
                 </a:solidFill>
-                <a:latin typeface="Segoe UI"/>
-                <a:cs typeface="Segoe UI"/>
+                <a:latin typeface="Arial"/>
+                <a:cs typeface="Arial"/>
               </a:rPr>
               <a:t>Cắt cụt *</a:t>
             </a:r>
@@ -9650,8 +9650,8 @@
                 <a:solidFill>
                   <a:srgbClr val="000000"/>
                 </a:solidFill>
-                <a:latin typeface="Segoe UI"/>
-                <a:cs typeface="Segoe UI"/>
+                <a:latin typeface="Arial"/>
+                <a:cs typeface="Arial"/>
               </a:rPr>
               <a:t>restrict*</a:t>
             </a:r>
@@ -9671,8 +9671,8 @@
                 <a:solidFill>
                   <a:srgbClr val="000000"/>
                 </a:solidFill>
-                <a:latin typeface="Segoe UI"/>
-                <a:cs typeface="Segoe UI"/>
+                <a:latin typeface="Arial"/>
+                <a:cs typeface="Arial"/>
               </a:rPr>
               <a:t>= restrict, restricted,</a:t>
             </a:r>
@@ -9692,8 +9692,8 @@
                 <a:solidFill>
                   <a:srgbClr val="000000"/>
                 </a:solidFill>
-                <a:latin typeface="Segoe UI"/>
-                <a:cs typeface="Segoe UI"/>
+                <a:latin typeface="Arial"/>
+                <a:cs typeface="Arial"/>
               </a:rPr>
               <a:t>restriction, restrictive</a:t>
             </a:r>
@@ -9735,8 +9735,8 @@
                 <a:solidFill>
                   <a:srgbClr val="FFFFFF"/>
                 </a:solidFill>
-                <a:latin typeface="Segoe UI"/>
-                <a:cs typeface="Segoe UI"/>
+                <a:latin typeface="Arial"/>
+                <a:cs typeface="Arial"/>
               </a:rPr>
               <a:t>Thẻ trường</a:t>
             </a:r>
@@ -9784,8 +9784,8 @@
                 <a:solidFill>
                   <a:srgbClr val="000000"/>
                 </a:solidFill>
-                <a:latin typeface="Segoe UI"/>
-                <a:cs typeface="Segoe UI"/>
+                <a:latin typeface="Arial"/>
+                <a:cs typeface="Arial"/>
               </a:rPr>
               <a:t>[tiab] tiêu đề/tóm tắt</a:t>
             </a:r>
@@ -9805,8 +9805,8 @@
                 <a:solidFill>
                   <a:srgbClr val="000000"/>
                 </a:solidFill>
-                <a:latin typeface="Segoe UI"/>
-                <a:cs typeface="Segoe UI"/>
+                <a:latin typeface="Arial"/>
+                <a:cs typeface="Arial"/>
               </a:rPr>
               <a:t>[mh] thuật ngữ MeSH</a:t>
             </a:r>
@@ -9826,8 +9826,8 @@
                 <a:solidFill>
                   <a:srgbClr val="000000"/>
                 </a:solidFill>
-                <a:latin typeface="Segoe UI"/>
-                <a:cs typeface="Segoe UI"/>
+                <a:latin typeface="Arial"/>
+                <a:cs typeface="Arial"/>
               </a:rPr>
               <a:t>[pt] loại bài báo</a:t>
             </a:r>
@@ -9869,8 +9869,8 @@
                 <a:solidFill>
                   <a:srgbClr val="FFFFFF"/>
                 </a:solidFill>
-                <a:latin typeface="Segoe UI"/>
-                <a:cs typeface="Segoe UI"/>
+                <a:latin typeface="Arial"/>
+                <a:cs typeface="Arial"/>
               </a:rPr>
               <a:t>Bộ lọc</a:t>
             </a:r>
@@ -9918,8 +9918,8 @@
                 <a:solidFill>
                   <a:srgbClr val="000000"/>
                 </a:solidFill>
-                <a:latin typeface="Segoe UI"/>
-                <a:cs typeface="Segoe UI"/>
+                <a:latin typeface="Arial"/>
+                <a:cs typeface="Arial"/>
               </a:rPr>
               <a:t>Loại bài (RCT,</a:t>
             </a:r>
@@ -9939,8 +9939,8 @@
                 <a:solidFill>
                   <a:srgbClr val="000000"/>
                 </a:solidFill>
-                <a:latin typeface="Segoe UI"/>
-                <a:cs typeface="Segoe UI"/>
+                <a:latin typeface="Arial"/>
+                <a:cs typeface="Arial"/>
               </a:rPr>
               <a:t>tổng quan hệ thống)</a:t>
             </a:r>
@@ -9960,8 +9960,8 @@
                 <a:solidFill>
                   <a:srgbClr val="000000"/>
                 </a:solidFill>
-                <a:latin typeface="Segoe UI"/>
-                <a:cs typeface="Segoe UI"/>
+                <a:latin typeface="Arial"/>
+                <a:cs typeface="Arial"/>
               </a:rPr>
               <a:t>Năm, tuổi, người</a:t>
             </a:r>
@@ -10005,8 +10005,8 @@
                 <a:solidFill>
                   <a:srgbClr val="FFFFFF"/>
                 </a:solidFill>
-                <a:latin typeface="Segoe UI"/>
-                <a:cs typeface="Segoe UI"/>
+                <a:latin typeface="Arial"/>
+                <a:cs typeface="Arial"/>
               </a:rPr>
               <a:t>THÔNG ĐIỆP CHÍNH   </a:t>
             </a:r>
@@ -10015,8 +10015,8 @@
                 <a:solidFill>
                   <a:srgbClr val="FFFFFF"/>
                 </a:solidFill>
-                <a:latin typeface="Segoe UI"/>
-                <a:cs typeface="Segoe UI"/>
+                <a:latin typeface="Arial"/>
+                <a:cs typeface="Arial"/>
               </a:rPr>
               <a:t>Xem 'Search details' để biết chính xác PubMed đã tìm gì.</a:t>
             </a:r>
@@ -10053,7 +10053,7 @@
                     <a:lumMod val="50000"/>
                   </a:schemeClr>
                 </a:solidFill>
-                <a:latin typeface="Verdana"/>
+                <a:latin typeface="Arial"/>
               </a:rPr>
               <a:t>Neudata | #ClearDataClearImpact</a:t>
             </a:r>
@@ -10183,8 +10183,8 @@
                 <a:solidFill>
                   <a:srgbClr val="0D7377"/>
                 </a:solidFill>
-                <a:latin typeface="Segoe UI"/>
-                <a:cs typeface="Segoe UI"/>
+                <a:latin typeface="Arial"/>
+                <a:cs typeface="Arial"/>
               </a:rPr>
               <a:t>PubMed và Google Scholar</a:t>
             </a:r>
@@ -10280,8 +10280,8 @@
                 <a:solidFill>
                   <a:srgbClr val="FFFFFF"/>
                 </a:solidFill>
-                <a:latin typeface="Segoe UI"/>
-                <a:cs typeface="Segoe UI"/>
+                <a:latin typeface="Arial"/>
+                <a:cs typeface="Arial"/>
               </a:rPr>
               <a:t>THÔNG ĐIỆP CHÍNH   </a:t>
             </a:r>
@@ -10290,8 +10290,8 @@
                 <a:solidFill>
                   <a:srgbClr val="FFFFFF"/>
                 </a:solidFill>
-                <a:latin typeface="Segoe UI"/>
-                <a:cs typeface="Segoe UI"/>
+                <a:latin typeface="Arial"/>
+                <a:cs typeface="Arial"/>
               </a:rPr>
               <a:t>PubMed cho tìm kiếm chính; Google Scholar để kiểm tra và theo dấu trích dẫn.</a:t>
             </a:r>
@@ -10328,7 +10328,7 @@
                     <a:lumMod val="50000"/>
                   </a:schemeClr>
                 </a:solidFill>
-                <a:latin typeface="Verdana"/>
+                <a:latin typeface="Arial"/>
               </a:rPr>
               <a:t>Neudata | #ClearDataClearImpact</a:t>
             </a:r>
@@ -10458,8 +10458,8 @@
                 <a:solidFill>
                   <a:srgbClr val="0D7377"/>
                 </a:solidFill>
-                <a:latin typeface="Segoe UI"/>
-                <a:cs typeface="Segoe UI"/>
+                <a:latin typeface="Arial"/>
+                <a:cs typeface="Arial"/>
               </a:rPr>
               <a:t>Trình diễn: tìm câu hỏi của chúng ta trên PubMed</a:t>
             </a:r>
@@ -10529,8 +10529,8 @@
                 <a:solidFill>
                   <a:srgbClr val="FFFFFF"/>
                 </a:solidFill>
-                <a:latin typeface="Segoe UI"/>
-                <a:cs typeface="Segoe UI"/>
+                <a:latin typeface="Arial"/>
+                <a:cs typeface="Arial"/>
               </a:rPr>
               <a:t>TRÌNH DIỄN TRỰC TIẾP   |   10 phút</a:t>
             </a:r>
@@ -10567,25 +10567,19 @@
               <a:spcBef>
                 <a:spcPts val="450"/>
               </a:spcBef>
-              <a:buNone/>
-            </a:pPr>
-            <a:r>
-              <a:rPr lang="en-US" sz="1650" b="1" dirty="0">
-                <a:solidFill>
-                  <a:srgbClr val="B5651D"/>
-                </a:solidFill>
-                <a:latin typeface="Segoe UI"/>
-                <a:cs typeface="Segoe UI"/>
-              </a:rPr>
-              <a:t>1.  </a:t>
-            </a:r>
+              <a:buClr>
+                <a:srgbClr val="B5651D"/>
+              </a:buClr>
+              <a:buFont typeface="Arial"/>
+              <a:buChar char="•"/>
+            </a:pPr>
             <a:r>
               <a:rPr lang="en-US" sz="1650" dirty="0">
                 <a:solidFill>
                   <a:srgbClr val="000000"/>
                 </a:solidFill>
-                <a:latin typeface="Segoe UI"/>
-                <a:cs typeface="Segoe UI"/>
+                <a:latin typeface="Arial"/>
+                <a:cs typeface="Arial"/>
               </a:rPr>
               <a:t>Tìm một từ khóa, septic shock, và ghi lại số kết quả</a:t>
             </a:r>
@@ -10598,25 +10592,19 @@
               <a:spcBef>
                 <a:spcPts val="450"/>
               </a:spcBef>
-              <a:buNone/>
-            </a:pPr>
-            <a:r>
-              <a:rPr lang="en-US" sz="1650" b="1" dirty="0">
-                <a:solidFill>
-                  <a:srgbClr val="B5651D"/>
-                </a:solidFill>
-                <a:latin typeface="Segoe UI"/>
-                <a:cs typeface="Segoe UI"/>
-              </a:rPr>
-              <a:t>2.  </a:t>
-            </a:r>
+              <a:buClr>
+                <a:srgbClr val="B5651D"/>
+              </a:buClr>
+              <a:buFont typeface="Arial"/>
+              <a:buChar char="•"/>
+            </a:pPr>
             <a:r>
               <a:rPr lang="en-US" sz="1650" dirty="0">
                 <a:solidFill>
                   <a:srgbClr val="000000"/>
                 </a:solidFill>
-                <a:latin typeface="Segoe UI"/>
-                <a:cs typeface="Segoe UI"/>
+                <a:latin typeface="Arial"/>
+                <a:cs typeface="Arial"/>
               </a:rPr>
               <a:t>Dán chuỗi PICO đầy đủ: khối P, I và O nối bằng AND</a:t>
             </a:r>
@@ -10629,25 +10617,19 @@
               <a:spcBef>
                 <a:spcPts val="450"/>
               </a:spcBef>
-              <a:buNone/>
-            </a:pPr>
-            <a:r>
-              <a:rPr lang="en-US" sz="1650" b="1" dirty="0">
-                <a:solidFill>
-                  <a:srgbClr val="B5651D"/>
-                </a:solidFill>
-                <a:latin typeface="Segoe UI"/>
-                <a:cs typeface="Segoe UI"/>
-              </a:rPr>
-              <a:t>3.  </a:t>
-            </a:r>
+              <a:buClr>
+                <a:srgbClr val="B5651D"/>
+              </a:buClr>
+              <a:buFont typeface="Arial"/>
+              <a:buChar char="•"/>
+            </a:pPr>
             <a:r>
               <a:rPr lang="en-US" sz="1650" dirty="0">
                 <a:solidFill>
                   <a:srgbClr val="000000"/>
                 </a:solidFill>
-                <a:latin typeface="Segoe UI"/>
-                <a:cs typeface="Segoe UI"/>
+                <a:latin typeface="Arial"/>
+                <a:cs typeface="Arial"/>
               </a:rPr>
               <a:t>Xem 'Search details': PubMed thực sự đã tìm gì?</a:t>
             </a:r>
@@ -10660,25 +10642,19 @@
               <a:spcBef>
                 <a:spcPts val="450"/>
               </a:spcBef>
-              <a:buNone/>
-            </a:pPr>
-            <a:r>
-              <a:rPr lang="en-US" sz="1650" b="1" dirty="0">
-                <a:solidFill>
-                  <a:srgbClr val="B5651D"/>
-                </a:solidFill>
-                <a:latin typeface="Segoe UI"/>
-                <a:cs typeface="Segoe UI"/>
-              </a:rPr>
-              <a:t>4.  </a:t>
-            </a:r>
+              <a:buClr>
+                <a:srgbClr val="B5651D"/>
+              </a:buClr>
+              <a:buFont typeface="Arial"/>
+              <a:buChar char="•"/>
+            </a:pPr>
             <a:r>
               <a:rPr lang="en-US" sz="1650" dirty="0">
                 <a:solidFill>
                   <a:srgbClr val="000000"/>
                 </a:solidFill>
-                <a:latin typeface="Segoe UI"/>
-                <a:cs typeface="Segoe UI"/>
+                <a:latin typeface="Arial"/>
+                <a:cs typeface="Arial"/>
               </a:rPr>
               <a:t>Thêm bộ lọc: RCT và tổng quan hệ thống, người lớn, 10 năm gần đây</a:t>
             </a:r>
@@ -10691,25 +10667,19 @@
               <a:spcBef>
                 <a:spcPts val="450"/>
               </a:spcBef>
-              <a:buNone/>
-            </a:pPr>
-            <a:r>
-              <a:rPr lang="en-US" sz="1650" b="1" dirty="0">
-                <a:solidFill>
-                  <a:srgbClr val="B5651D"/>
-                </a:solidFill>
-                <a:latin typeface="Segoe UI"/>
-                <a:cs typeface="Segoe UI"/>
-              </a:rPr>
-              <a:t>5.  </a:t>
-            </a:r>
+              <a:buClr>
+                <a:srgbClr val="B5651D"/>
+              </a:buClr>
+              <a:buFont typeface="Arial"/>
+              <a:buChar char="•"/>
+            </a:pPr>
             <a:r>
               <a:rPr lang="en-US" sz="1650" dirty="0">
                 <a:solidFill>
                   <a:srgbClr val="000000"/>
                 </a:solidFill>
-                <a:latin typeface="Segoe UI"/>
-                <a:cs typeface="Segoe UI"/>
+                <a:latin typeface="Arial"/>
+                <a:cs typeface="Arial"/>
               </a:rPr>
               <a:t>Mở một kết quả: tóm tắt, MeSH, 'Similar articles', 'Cited by'</a:t>
             </a:r>
@@ -10722,25 +10692,19 @@
               <a:spcBef>
                 <a:spcPts val="450"/>
               </a:spcBef>
-              <a:buNone/>
-            </a:pPr>
-            <a:r>
-              <a:rPr lang="en-US" sz="1650" b="1" dirty="0">
-                <a:solidFill>
-                  <a:srgbClr val="B5651D"/>
-                </a:solidFill>
-                <a:latin typeface="Segoe UI"/>
-                <a:cs typeface="Segoe UI"/>
-              </a:rPr>
-              <a:t>6.  </a:t>
-            </a:r>
+              <a:buClr>
+                <a:srgbClr val="B5651D"/>
+              </a:buClr>
+              <a:buFont typeface="Arial"/>
+              <a:buChar char="•"/>
+            </a:pPr>
             <a:r>
               <a:rPr lang="en-US" sz="1650" dirty="0">
                 <a:solidFill>
                   <a:srgbClr val="000000"/>
                 </a:solidFill>
-                <a:latin typeface="Segoe UI"/>
-                <a:cs typeface="Segoe UI"/>
+                <a:latin typeface="Arial"/>
+                <a:cs typeface="Arial"/>
               </a:rPr>
               <a:t>Send to: Citation manager (sẽ nhập vào ở phần 2.2)</a:t>
             </a:r>
@@ -10784,8 +10748,8 @@
                 <a:solidFill>
                   <a:srgbClr val="B5651D"/>
                 </a:solidFill>
-                <a:latin typeface="Segoe UI"/>
-                <a:cs typeface="Segoe UI"/>
+                <a:latin typeface="Arial"/>
+                <a:cs typeface="Arial"/>
               </a:rPr>
               <a:t>Hãy để ý</a:t>
             </a:r>
@@ -10806,8 +10770,8 @@
                 <a:solidFill>
                   <a:srgbClr val="000000"/>
                 </a:solidFill>
-                <a:latin typeface="Segoe UI"/>
-                <a:cs typeface="Segoe UI"/>
+                <a:latin typeface="Arial"/>
+                <a:cs typeface="Arial"/>
               </a:rPr>
               <a:t>Số kết quả giảm thế nào sau mỗi bước</a:t>
             </a:r>
@@ -10828,8 +10792,8 @@
                 <a:solidFill>
                   <a:srgbClr val="000000"/>
                 </a:solidFill>
-                <a:latin typeface="Segoe UI"/>
-                <a:cs typeface="Segoe UI"/>
+                <a:latin typeface="Arial"/>
+                <a:cs typeface="Arial"/>
               </a:rPr>
               <a:t>Bài nào cứ xuất hiện lại</a:t>
             </a:r>
@@ -10850,8 +10814,8 @@
                 <a:solidFill>
                   <a:srgbClr val="000000"/>
                 </a:solidFill>
-                <a:latin typeface="Segoe UI"/>
-                <a:cs typeface="Segoe UI"/>
+                <a:latin typeface="Arial"/>
+                <a:cs typeface="Arial"/>
               </a:rPr>
               <a:t>Bạn có tìm thấy Bài báo 1 và CLASSIC?</a:t>
             </a:r>
@@ -10897,8 +10861,8 @@
                 <a:solidFill>
                   <a:srgbClr val="B5651D"/>
                 </a:solidFill>
-                <a:latin typeface="Segoe UI"/>
-                <a:cs typeface="Segoe UI"/>
+                <a:latin typeface="Arial"/>
+                <a:cs typeface="Arial"/>
               </a:rPr>
               <a:t>SẢN PHẨM   </a:t>
             </a:r>
@@ -10907,8 +10871,8 @@
                 <a:solidFill>
                   <a:srgbClr val="000000"/>
                 </a:solidFill>
-                <a:latin typeface="Segoe UI"/>
-                <a:cs typeface="Segoe UI"/>
+                <a:latin typeface="Arial"/>
+                <a:cs typeface="Arial"/>
               </a:rPr>
               <a:t>Một chuỗi tìm kiếm cả lớp có thể chép lại (Bài tập 1 trong phiếu)</a:t>
             </a:r>
@@ -10945,7 +10909,7 @@
                     <a:lumMod val="50000"/>
                   </a:schemeClr>
                 </a:solidFill>
-                <a:latin typeface="Verdana"/>
+                <a:latin typeface="Arial"/>
               </a:rPr>
               <a:t>Neudata | #ClearDataClearImpact</a:t>
             </a:r>
@@ -11075,8 +11039,8 @@
                 <a:solidFill>
                   <a:srgbClr val="0D7377"/>
                 </a:solidFill>
-                <a:latin typeface="Segoe UI"/>
-                <a:cs typeface="Segoe UI"/>
+                <a:latin typeface="Arial"/>
+                <a:cs typeface="Arial"/>
               </a:rPr>
               <a:t>Đến lượt bạn: xây chuỗi tìm kiếm Boolean</a:t>
             </a:r>
@@ -11146,8 +11110,8 @@
                 <a:solidFill>
                   <a:srgbClr val="FFFFFF"/>
                 </a:solidFill>
-                <a:latin typeface="Segoe UI"/>
-                <a:cs typeface="Segoe UI"/>
+                <a:latin typeface="Arial"/>
+                <a:cs typeface="Arial"/>
               </a:rPr>
               <a:t>BÀI TẬP CÁ NHÂN   |   5 phút</a:t>
             </a:r>
@@ -11184,25 +11148,19 @@
               <a:spcBef>
                 <a:spcPts val="450"/>
               </a:spcBef>
-              <a:buNone/>
-            </a:pPr>
-            <a:r>
-              <a:rPr lang="en-US" sz="1650" b="1" dirty="0">
-                <a:solidFill>
-                  <a:srgbClr val="0B376C"/>
-                </a:solidFill>
-                <a:latin typeface="Segoe UI"/>
-                <a:cs typeface="Segoe UI"/>
-              </a:rPr>
-              <a:t>1.  </a:t>
-            </a:r>
+              <a:buClr>
+                <a:srgbClr val="0B376C"/>
+              </a:buClr>
+              <a:buFont typeface="Arial"/>
+              <a:buChar char="•"/>
+            </a:pPr>
             <a:r>
               <a:rPr lang="en-US" sz="1650" dirty="0">
                 <a:solidFill>
                   <a:srgbClr val="000000"/>
                 </a:solidFill>
-                <a:latin typeface="Segoe UI"/>
-                <a:cs typeface="Segoe UI"/>
+                <a:latin typeface="Arial"/>
+                <a:cs typeface="Arial"/>
               </a:rPr>
               <a:t>Lấy câu hỏi PICO của nhóm và danh sách từ đồng nghĩa</a:t>
             </a:r>
@@ -11215,25 +11173,19 @@
               <a:spcBef>
                 <a:spcPts val="450"/>
               </a:spcBef>
-              <a:buNone/>
-            </a:pPr>
-            <a:r>
-              <a:rPr lang="en-US" sz="1650" b="1" dirty="0">
-                <a:solidFill>
-                  <a:srgbClr val="0B376C"/>
-                </a:solidFill>
-                <a:latin typeface="Segoe UI"/>
-                <a:cs typeface="Segoe UI"/>
-              </a:rPr>
-              <a:t>2.  </a:t>
-            </a:r>
+              <a:buClr>
+                <a:srgbClr val="0B376C"/>
+              </a:buClr>
+              <a:buFont typeface="Arial"/>
+              <a:buChar char="•"/>
+            </a:pPr>
             <a:r>
               <a:rPr lang="en-US" sz="1650" dirty="0">
                 <a:solidFill>
                   <a:srgbClr val="000000"/>
                 </a:solidFill>
-                <a:latin typeface="Segoe UI"/>
-                <a:cs typeface="Segoe UI"/>
+                <a:latin typeface="Arial"/>
+                <a:cs typeface="Arial"/>
               </a:rPr>
               <a:t>Bài tập 1: viết 2-4 từ đồng nghĩa (tiếng Anh) cho P, I (hoặc E) và O</a:t>
             </a:r>
@@ -11246,25 +11198,19 @@
               <a:spcBef>
                 <a:spcPts val="450"/>
               </a:spcBef>
-              <a:buNone/>
-            </a:pPr>
-            <a:r>
-              <a:rPr lang="en-US" sz="1650" b="1" dirty="0">
-                <a:solidFill>
-                  <a:srgbClr val="0B376C"/>
-                </a:solidFill>
-                <a:latin typeface="Segoe UI"/>
-                <a:cs typeface="Segoe UI"/>
-              </a:rPr>
-              <a:t>3.  </a:t>
-            </a:r>
+              <a:buClr>
+                <a:srgbClr val="0B376C"/>
+              </a:buClr>
+              <a:buFont typeface="Arial"/>
+              <a:buChar char="•"/>
+            </a:pPr>
             <a:r>
               <a:rPr lang="en-US" sz="1650" dirty="0">
                 <a:solidFill>
                   <a:srgbClr val="000000"/>
                 </a:solidFill>
-                <a:latin typeface="Segoe UI"/>
-                <a:cs typeface="Segoe UI"/>
+                <a:latin typeface="Arial"/>
+                <a:cs typeface="Arial"/>
               </a:rPr>
               <a:t>Nối từ đồng nghĩa bằng OR trong ngoặc, các khối bằng AND</a:t>
             </a:r>
@@ -11277,25 +11223,19 @@
               <a:spcBef>
                 <a:spcPts val="450"/>
               </a:spcBef>
-              <a:buNone/>
-            </a:pPr>
-            <a:r>
-              <a:rPr lang="en-US" sz="1650" b="1" dirty="0">
-                <a:solidFill>
-                  <a:srgbClr val="0B376C"/>
-                </a:solidFill>
-                <a:latin typeface="Segoe UI"/>
-                <a:cs typeface="Segoe UI"/>
-              </a:rPr>
-              <a:t>4.  </a:t>
-            </a:r>
+              <a:buClr>
+                <a:srgbClr val="0B376C"/>
+              </a:buClr>
+              <a:buFont typeface="Arial"/>
+              <a:buChar char="•"/>
+            </a:pPr>
             <a:r>
               <a:rPr lang="en-US" sz="1650" dirty="0">
                 <a:solidFill>
                   <a:srgbClr val="000000"/>
                 </a:solidFill>
-                <a:latin typeface="Segoe UI"/>
-                <a:cs typeface="Segoe UI"/>
+                <a:latin typeface="Arial"/>
+                <a:cs typeface="Arial"/>
               </a:rPr>
               <a:t>Đánh dấu từ nào có thể là thuật ngữ MeSH</a:t>
             </a:r>
@@ -11308,25 +11248,19 @@
               <a:spcBef>
                 <a:spcPts val="450"/>
               </a:spcBef>
-              <a:buNone/>
-            </a:pPr>
-            <a:r>
-              <a:rPr lang="en-US" sz="1650" b="1" dirty="0">
-                <a:solidFill>
-                  <a:srgbClr val="0B376C"/>
-                </a:solidFill>
-                <a:latin typeface="Segoe UI"/>
-                <a:cs typeface="Segoe UI"/>
-              </a:rPr>
-              <a:t>5.  </a:t>
-            </a:r>
+              <a:buClr>
+                <a:srgbClr val="0B376C"/>
+              </a:buClr>
+              <a:buFont typeface="Arial"/>
+              <a:buChar char="•"/>
+            </a:pPr>
             <a:r>
               <a:rPr lang="en-US" sz="1650" dirty="0">
                 <a:solidFill>
                   <a:srgbClr val="000000"/>
                 </a:solidFill>
-                <a:latin typeface="Segoe UI"/>
-                <a:cs typeface="Segoe UI"/>
+                <a:latin typeface="Arial"/>
+                <a:cs typeface="Arial"/>
               </a:rPr>
               <a:t>Đổi phiếu với người bên cạnh: tìm một từ đồng nghĩa còn thiếu</a:t>
             </a:r>
@@ -11372,8 +11306,8 @@
                 <a:solidFill>
                   <a:srgbClr val="0B376C"/>
                 </a:solidFill>
-                <a:latin typeface="Segoe UI"/>
-                <a:cs typeface="Segoe UI"/>
+                <a:latin typeface="Arial"/>
+                <a:cs typeface="Arial"/>
               </a:rPr>
               <a:t>SẢN PHẨM   </a:t>
             </a:r>
@@ -11382,8 +11316,8 @@
                 <a:solidFill>
                   <a:srgbClr val="000000"/>
                 </a:solidFill>
-                <a:latin typeface="Segoe UI"/>
-                <a:cs typeface="Segoe UI"/>
+                <a:latin typeface="Arial"/>
+                <a:cs typeface="Arial"/>
               </a:rPr>
               <a:t>Một chuỗi tìm kiếm trên giấy, để nhóm chạy trong Xây dựng đề cương 2</a:t>
             </a:r>
@@ -11420,7 +11354,7 @@
                     <a:lumMod val="50000"/>
                   </a:schemeClr>
                 </a:solidFill>
-                <a:latin typeface="Verdana"/>
+                <a:latin typeface="Arial"/>
               </a:rPr>
               <a:t>Neudata | #ClearDataClearImpact</a:t>
             </a:r>
@@ -11550,8 +11484,8 @@
                 <a:solidFill>
                   <a:srgbClr val="0D7377"/>
                 </a:solidFill>
-                <a:latin typeface="Segoe UI"/>
-                <a:cs typeface="Segoe UI"/>
+                <a:latin typeface="Arial"/>
+                <a:cs typeface="Arial"/>
               </a:rPr>
               <a:t>2.2  Quản lý và trích dẫn</a:t>
             </a:r>
@@ -11620,8 +11554,8 @@
                 <a:solidFill>
                   <a:srgbClr val="0D7377"/>
                 </a:solidFill>
-                <a:latin typeface="Segoe UI"/>
-                <a:cs typeface="Segoe UI"/>
+                <a:latin typeface="Arial"/>
+                <a:cs typeface="Arial"/>
               </a:rPr>
               <a:t>Giữ lại mọi tài liệu bạn tìm được, và dùng công trình của người khác một cách trung thực.</a:t>
             </a:r>
@@ -11638,8 +11572,8 @@
                 <a:solidFill>
                   <a:srgbClr val="595959"/>
                 </a:solidFill>
-                <a:latin typeface="Segoe UI"/>
-                <a:cs typeface="Segoe UI"/>
+                <a:latin typeface="Arial"/>
+                <a:cs typeface="Arial"/>
               </a:rPr>
               <a:t>20 phút: phần mềm quản lý tài liệu (trình diễn Zotero), kiểu trích dẫn, diễn đạt lại an toàn, y văn xám</a:t>
             </a:r>
@@ -11676,7 +11610,7 @@
                     <a:lumMod val="50000"/>
                   </a:schemeClr>
                 </a:solidFill>
-                <a:latin typeface="Verdana"/>
+                <a:latin typeface="Arial"/>
               </a:rPr>
               <a:t>Neudata | #ClearDataClearImpact</a:t>
             </a:r>
@@ -11806,8 +11740,8 @@
                 <a:solidFill>
                   <a:srgbClr val="0D7377"/>
                 </a:solidFill>
-                <a:latin typeface="Segoe UI"/>
-                <a:cs typeface="Segoe UI"/>
+                <a:latin typeface="Arial"/>
+                <a:cs typeface="Arial"/>
               </a:rPr>
               <a:t>Phần mềm quản lý tài liệu: lưu ngay khi tìm</a:t>
             </a:r>
@@ -11879,8 +11813,8 @@
                 <a:solidFill>
                   <a:srgbClr val="FFFFFF"/>
                 </a:solidFill>
-                <a:latin typeface="Segoe UI"/>
-                <a:cs typeface="Segoe UI"/>
+                <a:latin typeface="Arial"/>
+                <a:cs typeface="Arial"/>
               </a:rPr>
               <a:t>Gom</a:t>
             </a:r>
@@ -11928,8 +11862,8 @@
                 <a:solidFill>
                   <a:srgbClr val="000000"/>
                 </a:solidFill>
-                <a:latin typeface="Segoe UI"/>
-                <a:cs typeface="Segoe UI"/>
+                <a:latin typeface="Arial"/>
+                <a:cs typeface="Arial"/>
               </a:rPr>
               <a:t>Đánh dấu bài trên</a:t>
             </a:r>
@@ -11949,8 +11883,8 @@
                 <a:solidFill>
                   <a:srgbClr val="000000"/>
                 </a:solidFill>
-                <a:latin typeface="Segoe UI"/>
-                <a:cs typeface="Segoe UI"/>
+                <a:latin typeface="Arial"/>
+                <a:cs typeface="Arial"/>
               </a:rPr>
               <a:t>PubMed: Clipboard</a:t>
             </a:r>
@@ -11970,8 +11904,8 @@
                 <a:solidFill>
                   <a:srgbClr val="000000"/>
                 </a:solidFill>
-                <a:latin typeface="Segoe UI"/>
-                <a:cs typeface="Segoe UI"/>
+                <a:latin typeface="Arial"/>
+                <a:cs typeface="Arial"/>
               </a:rPr>
               <a:t>hoặc Collections</a:t>
             </a:r>
@@ -12015,8 +11949,8 @@
                 <a:solidFill>
                   <a:srgbClr val="FFFFFF"/>
                 </a:solidFill>
-                <a:latin typeface="Segoe UI"/>
-                <a:cs typeface="Segoe UI"/>
+                <a:latin typeface="Arial"/>
+                <a:cs typeface="Arial"/>
               </a:rPr>
               <a:t>Xuất</a:t>
             </a:r>
@@ -12064,8 +11998,8 @@
                 <a:solidFill>
                   <a:srgbClr val="000000"/>
                 </a:solidFill>
-                <a:latin typeface="Segoe UI"/>
-                <a:cs typeface="Segoe UI"/>
+                <a:latin typeface="Arial"/>
+                <a:cs typeface="Arial"/>
               </a:rPr>
               <a:t>Send to:</a:t>
             </a:r>
@@ -12085,8 +12019,8 @@
                 <a:solidFill>
                   <a:srgbClr val="000000"/>
                 </a:solidFill>
-                <a:latin typeface="Segoe UI"/>
-                <a:cs typeface="Segoe UI"/>
+                <a:latin typeface="Arial"/>
+                <a:cs typeface="Arial"/>
               </a:rPr>
               <a:t>Citation manager</a:t>
             </a:r>
@@ -12106,8 +12040,8 @@
                 <a:solidFill>
                   <a:srgbClr val="000000"/>
                 </a:solidFill>
-                <a:latin typeface="Segoe UI"/>
-                <a:cs typeface="Segoe UI"/>
+                <a:latin typeface="Arial"/>
+                <a:cs typeface="Arial"/>
               </a:rPr>
               <a:t>(tệp .nbib)</a:t>
             </a:r>
@@ -12151,8 +12085,8 @@
                 <a:solidFill>
                   <a:srgbClr val="FFFFFF"/>
                 </a:solidFill>
-                <a:latin typeface="Segoe UI"/>
-                <a:cs typeface="Segoe UI"/>
+                <a:latin typeface="Arial"/>
+                <a:cs typeface="Arial"/>
               </a:rPr>
               <a:t>Nhập</a:t>
             </a:r>
@@ -12200,8 +12134,8 @@
                 <a:solidFill>
                   <a:srgbClr val="000000"/>
                 </a:solidFill>
-                <a:latin typeface="Segoe UI"/>
-                <a:cs typeface="Segoe UI"/>
+                <a:latin typeface="Arial"/>
+                <a:cs typeface="Arial"/>
               </a:rPr>
               <a:t>Zotero hoặc Mendeley</a:t>
             </a:r>
@@ -12221,8 +12155,8 @@
                 <a:solidFill>
                   <a:srgbClr val="000000"/>
                 </a:solidFill>
-                <a:latin typeface="Segoe UI"/>
-                <a:cs typeface="Segoe UI"/>
+                <a:latin typeface="Arial"/>
+                <a:cs typeface="Arial"/>
               </a:rPr>
               <a:t>(miễn phí), EndNote</a:t>
             </a:r>
@@ -12242,8 +12176,8 @@
                 <a:solidFill>
                   <a:srgbClr val="000000"/>
                 </a:solidFill>
-                <a:latin typeface="Segoe UI"/>
-                <a:cs typeface="Segoe UI"/>
+                <a:latin typeface="Arial"/>
+                <a:cs typeface="Arial"/>
               </a:rPr>
               <a:t>(trả phí)</a:t>
             </a:r>
@@ -12287,8 +12221,8 @@
                 <a:solidFill>
                   <a:srgbClr val="FFFFFF"/>
                 </a:solidFill>
-                <a:latin typeface="Segoe UI"/>
-                <a:cs typeface="Segoe UI"/>
+                <a:latin typeface="Arial"/>
+                <a:cs typeface="Arial"/>
               </a:rPr>
               <a:t>Trích dẫn</a:t>
             </a:r>
@@ -12336,8 +12270,8 @@
                 <a:solidFill>
                   <a:srgbClr val="000000"/>
                 </a:solidFill>
-                <a:latin typeface="Segoe UI"/>
-                <a:cs typeface="Segoe UI"/>
+                <a:latin typeface="Arial"/>
+                <a:cs typeface="Arial"/>
               </a:rPr>
               <a:t>Chèn trích dẫn</a:t>
             </a:r>
@@ -12357,8 +12291,8 @@
                 <a:solidFill>
                   <a:srgbClr val="000000"/>
                 </a:solidFill>
-                <a:latin typeface="Segoe UI"/>
-                <a:cs typeface="Segoe UI"/>
+                <a:latin typeface="Arial"/>
+                <a:cs typeface="Arial"/>
               </a:rPr>
               <a:t>trong Word bằng</a:t>
             </a:r>
@@ -12378,8 +12312,8 @@
                 <a:solidFill>
                   <a:srgbClr val="000000"/>
                 </a:solidFill>
-                <a:latin typeface="Segoe UI"/>
-                <a:cs typeface="Segoe UI"/>
+                <a:latin typeface="Arial"/>
+                <a:cs typeface="Arial"/>
               </a:rPr>
               <a:t>plug-in</a:t>
             </a:r>
@@ -12423,8 +12357,8 @@
                 <a:solidFill>
                   <a:srgbClr val="FFFFFF"/>
                 </a:solidFill>
-                <a:latin typeface="Segoe UI"/>
-                <a:cs typeface="Segoe UI"/>
+                <a:latin typeface="Arial"/>
+                <a:cs typeface="Arial"/>
               </a:rPr>
               <a:t>Danh mục</a:t>
             </a:r>
@@ -12472,8 +12406,8 @@
                 <a:solidFill>
                   <a:srgbClr val="000000"/>
                 </a:solidFill>
-                <a:latin typeface="Segoe UI"/>
-                <a:cs typeface="Segoe UI"/>
+                <a:latin typeface="Arial"/>
+                <a:cs typeface="Arial"/>
               </a:rPr>
               <a:t>Danh mục tài liệu</a:t>
             </a:r>
@@ -12493,8 +12427,8 @@
                 <a:solidFill>
                   <a:srgbClr val="000000"/>
                 </a:solidFill>
-                <a:latin typeface="Segoe UI"/>
-                <a:cs typeface="Segoe UI"/>
+                <a:latin typeface="Arial"/>
+                <a:cs typeface="Arial"/>
               </a:rPr>
               <a:t>tự động, theo</a:t>
             </a:r>
@@ -12514,8 +12448,8 @@
                 <a:solidFill>
                   <a:srgbClr val="000000"/>
                 </a:solidFill>
-                <a:latin typeface="Segoe UI"/>
-                <a:cs typeface="Segoe UI"/>
+                <a:latin typeface="Arial"/>
+                <a:cs typeface="Arial"/>
               </a:rPr>
               <a:t>mọi kiểu trích dẫn</a:t>
             </a:r>
@@ -12559,8 +12493,8 @@
                 <a:solidFill>
                   <a:srgbClr val="FFFFFF"/>
                 </a:solidFill>
-                <a:latin typeface="Segoe UI"/>
-                <a:cs typeface="Segoe UI"/>
+                <a:latin typeface="Arial"/>
+                <a:cs typeface="Arial"/>
               </a:rPr>
               <a:t>THÔNG ĐIỆP CHÍNH   </a:t>
             </a:r>
@@ -12569,8 +12503,8 @@
                 <a:solidFill>
                   <a:srgbClr val="FFFFFF"/>
                 </a:solidFill>
-                <a:latin typeface="Segoe UI"/>
-                <a:cs typeface="Segoe UI"/>
+                <a:latin typeface="Arial"/>
+                <a:cs typeface="Arial"/>
               </a:rPr>
               <a:t>Phần mềm quản lý tài liệu ngăn lỗi phổ biến nhất trong đề cương: trích dẫn sai.</a:t>
             </a:r>
@@ -12607,7 +12541,7 @@
                     <a:lumMod val="50000"/>
                   </a:schemeClr>
                 </a:solidFill>
-                <a:latin typeface="Verdana"/>
+                <a:latin typeface="Arial"/>
               </a:rPr>
               <a:t>Neudata | #ClearDataClearImpact</a:t>
             </a:r>
@@ -12737,8 +12671,8 @@
                 <a:solidFill>
                   <a:srgbClr val="0D7377"/>
                 </a:solidFill>
-                <a:latin typeface="Segoe UI"/>
-                <a:cs typeface="Segoe UI"/>
+                <a:latin typeface="Arial"/>
+                <a:cs typeface="Arial"/>
               </a:rPr>
               <a:t>Trình diễn: từ PubMed sang Zotero đến Word</a:t>
             </a:r>
@@ -12808,8 +12742,8 @@
                 <a:solidFill>
                   <a:srgbClr val="FFFFFF"/>
                 </a:solidFill>
-                <a:latin typeface="Segoe UI"/>
-                <a:cs typeface="Segoe UI"/>
+                <a:latin typeface="Arial"/>
+                <a:cs typeface="Arial"/>
               </a:rPr>
               <a:t>TRÌNH DIỄN TRỰC TIẾP   |   5 phút</a:t>
             </a:r>
@@ -12846,25 +12780,19 @@
               <a:spcBef>
                 <a:spcPts val="450"/>
               </a:spcBef>
-              <a:buNone/>
-            </a:pPr>
-            <a:r>
-              <a:rPr lang="en-US" sz="1650" b="1" dirty="0">
-                <a:solidFill>
-                  <a:srgbClr val="B5651D"/>
-                </a:solidFill>
-                <a:latin typeface="Segoe UI"/>
-                <a:cs typeface="Segoe UI"/>
-              </a:rPr>
-              <a:t>1.  </a:t>
-            </a:r>
+              <a:buClr>
+                <a:srgbClr val="B5651D"/>
+              </a:buClr>
+              <a:buFont typeface="Arial"/>
+              <a:buChar char="•"/>
+            </a:pPr>
             <a:r>
               <a:rPr lang="en-US" sz="1650" dirty="0">
                 <a:solidFill>
                   <a:srgbClr val="000000"/>
                 </a:solidFill>
-                <a:latin typeface="Segoe UI"/>
-                <a:cs typeface="Segoe UI"/>
+                <a:latin typeface="Arial"/>
+                <a:cs typeface="Arial"/>
               </a:rPr>
               <a:t>Nhập tệp .nbib từ phần trình diễn PubMed vào Zotero</a:t>
             </a:r>
@@ -12877,25 +12805,19 @@
               <a:spcBef>
                 <a:spcPts val="450"/>
               </a:spcBef>
-              <a:buNone/>
-            </a:pPr>
-            <a:r>
-              <a:rPr lang="en-US" sz="1650" b="1" dirty="0">
-                <a:solidFill>
-                  <a:srgbClr val="B5651D"/>
-                </a:solidFill>
-                <a:latin typeface="Segoe UI"/>
-                <a:cs typeface="Segoe UI"/>
-              </a:rPr>
-              <a:t>2.  </a:t>
-            </a:r>
+              <a:buClr>
+                <a:srgbClr val="B5651D"/>
+              </a:buClr>
+              <a:buFont typeface="Arial"/>
+              <a:buChar char="•"/>
+            </a:pPr>
             <a:r>
               <a:rPr lang="en-US" sz="1650" dirty="0">
                 <a:solidFill>
                   <a:srgbClr val="000000"/>
                 </a:solidFill>
-                <a:latin typeface="Segoe UI"/>
-                <a:cs typeface="Segoe UI"/>
+                <a:latin typeface="Arial"/>
+                <a:cs typeface="Arial"/>
               </a:rPr>
               <a:t>Xem: tác giả, tiêu đề, tạp chí, năm, DOI, không gõ tay gì cả</a:t>
             </a:r>
@@ -12908,25 +12830,19 @@
               <a:spcBef>
                 <a:spcPts val="450"/>
               </a:spcBef>
-              <a:buNone/>
-            </a:pPr>
-            <a:r>
-              <a:rPr lang="en-US" sz="1650" b="1" dirty="0">
-                <a:solidFill>
-                  <a:srgbClr val="B5651D"/>
-                </a:solidFill>
-                <a:latin typeface="Segoe UI"/>
-                <a:cs typeface="Segoe UI"/>
-              </a:rPr>
-              <a:t>3.  </a:t>
-            </a:r>
+              <a:buClr>
+                <a:srgbClr val="B5651D"/>
+              </a:buClr>
+              <a:buFont typeface="Arial"/>
+              <a:buChar char="•"/>
+            </a:pPr>
             <a:r>
               <a:rPr lang="en-US" sz="1650" dirty="0">
                 <a:solidFill>
                   <a:srgbClr val="000000"/>
                 </a:solidFill>
-                <a:latin typeface="Segoe UI"/>
-                <a:cs typeface="Segoe UI"/>
+                <a:latin typeface="Arial"/>
+                <a:cs typeface="Arial"/>
               </a:rPr>
               <a:t>Trong Word: thẻ Zotero, Add/Edit Citation, gõ 'Meyhoff'</a:t>
             </a:r>
@@ -12939,25 +12855,19 @@
               <a:spcBef>
                 <a:spcPts val="450"/>
               </a:spcBef>
-              <a:buNone/>
-            </a:pPr>
-            <a:r>
-              <a:rPr lang="en-US" sz="1650" b="1" dirty="0">
-                <a:solidFill>
-                  <a:srgbClr val="B5651D"/>
-                </a:solidFill>
-                <a:latin typeface="Segoe UI"/>
-                <a:cs typeface="Segoe UI"/>
-              </a:rPr>
-              <a:t>4.  </a:t>
-            </a:r>
+              <a:buClr>
+                <a:srgbClr val="B5651D"/>
+              </a:buClr>
+              <a:buFont typeface="Arial"/>
+              <a:buChar char="•"/>
+            </a:pPr>
             <a:r>
               <a:rPr lang="en-US" sz="1650" dirty="0">
                 <a:solidFill>
                   <a:srgbClr val="000000"/>
                 </a:solidFill>
-                <a:latin typeface="Segoe UI"/>
-                <a:cs typeface="Segoe UI"/>
+                <a:latin typeface="Arial"/>
+                <a:cs typeface="Arial"/>
               </a:rPr>
               <a:t>Add/Edit Bibliography: danh mục tài liệu xuất hiện</a:t>
             </a:r>
@@ -12970,25 +12880,19 @@
               <a:spcBef>
                 <a:spcPts val="450"/>
               </a:spcBef>
-              <a:buNone/>
-            </a:pPr>
-            <a:r>
-              <a:rPr lang="en-US" sz="1650" b="1" dirty="0">
-                <a:solidFill>
-                  <a:srgbClr val="B5651D"/>
-                </a:solidFill>
-                <a:latin typeface="Segoe UI"/>
-                <a:cs typeface="Segoe UI"/>
-              </a:rPr>
-              <a:t>5.  </a:t>
-            </a:r>
+              <a:buClr>
+                <a:srgbClr val="B5651D"/>
+              </a:buClr>
+              <a:buFont typeface="Arial"/>
+              <a:buChar char="•"/>
+            </a:pPr>
             <a:r>
               <a:rPr lang="en-US" sz="1650" dirty="0">
                 <a:solidFill>
                   <a:srgbClr val="000000"/>
                 </a:solidFill>
-                <a:latin typeface="Segoe UI"/>
-                <a:cs typeface="Segoe UI"/>
+                <a:latin typeface="Arial"/>
+                <a:cs typeface="Arial"/>
               </a:rPr>
               <a:t>Document Preferences: đổi Vancouver sang APA rồi đổi lại</a:t>
             </a:r>
@@ -13032,8 +12936,8 @@
                 <a:solidFill>
                   <a:srgbClr val="B5651D"/>
                 </a:solidFill>
-                <a:latin typeface="Segoe UI"/>
-                <a:cs typeface="Segoe UI"/>
+                <a:latin typeface="Arial"/>
+                <a:cs typeface="Arial"/>
               </a:rPr>
               <a:t>Hãy để ý</a:t>
             </a:r>
@@ -13054,8 +12958,8 @@
                 <a:solidFill>
                   <a:srgbClr val="000000"/>
                 </a:solidFill>
-                <a:latin typeface="Segoe UI"/>
-                <a:cs typeface="Segoe UI"/>
+                <a:latin typeface="Arial"/>
+                <a:cs typeface="Arial"/>
               </a:rPr>
               <a:t>[1] thành (Meyhoff et al., 2022)</a:t>
             </a:r>
@@ -13076,8 +12980,8 @@
                 <a:solidFill>
                   <a:srgbClr val="000000"/>
                 </a:solidFill>
-                <a:latin typeface="Segoe UI"/>
-                <a:cs typeface="Segoe UI"/>
+                <a:latin typeface="Arial"/>
+                <a:cs typeface="Arial"/>
               </a:rPr>
               <a:t>Danh mục tự định dạng lại</a:t>
             </a:r>
@@ -13123,8 +13027,8 @@
                 <a:solidFill>
                   <a:srgbClr val="B5651D"/>
                 </a:solidFill>
-                <a:latin typeface="Segoe UI"/>
-                <a:cs typeface="Segoe UI"/>
+                <a:latin typeface="Arial"/>
+                <a:cs typeface="Arial"/>
               </a:rPr>
               <a:t>SẢN PHẨM   </a:t>
             </a:r>
@@ -13133,8 +13037,8 @@
                 <a:solidFill>
                   <a:srgbClr val="000000"/>
                 </a:solidFill>
-                <a:latin typeface="Segoe UI"/>
-                <a:cs typeface="Segoe UI"/>
+                <a:latin typeface="Arial"/>
+                <a:cs typeface="Arial"/>
               </a:rPr>
               <a:t>Mọi người đã thấy trọn chu trình gom → trích dẫn → danh mục</a:t>
             </a:r>
@@ -13171,7 +13075,7 @@
                     <a:lumMod val="50000"/>
                   </a:schemeClr>
                 </a:solidFill>
-                <a:latin typeface="Verdana"/>
+                <a:latin typeface="Arial"/>
               </a:rPr>
               <a:t>Neudata | #ClearDataClearImpact</a:t>
             </a:r>
@@ -13301,8 +13205,8 @@
                 <a:solidFill>
                   <a:srgbClr val="0D7377"/>
                 </a:solidFill>
-                <a:latin typeface="Segoe UI"/>
-                <a:cs typeface="Segoe UI"/>
+                <a:latin typeface="Arial"/>
+                <a:cs typeface="Arial"/>
               </a:rPr>
               <a:t>Kiểu trích dẫn: một bài, hai cách trình bày</a:t>
             </a:r>
@@ -13398,8 +13302,8 @@
                 <a:solidFill>
                   <a:srgbClr val="FFFFFF"/>
                 </a:solidFill>
-                <a:latin typeface="Segoe UI"/>
-                <a:cs typeface="Segoe UI"/>
+                <a:latin typeface="Arial"/>
+                <a:cs typeface="Arial"/>
               </a:rPr>
               <a:t>THÔNG ĐIỆP CHÍNH   </a:t>
             </a:r>
@@ -13408,8 +13312,8 @@
                 <a:solidFill>
                   <a:srgbClr val="FFFFFF"/>
                 </a:solidFill>
-                <a:latin typeface="Segoe UI"/>
-                <a:cs typeface="Segoe UI"/>
+                <a:latin typeface="Arial"/>
+                <a:cs typeface="Arial"/>
               </a:rPr>
               <a:t>Chọn kiểu tạp chí đích dùng; để phần mềm lo việc định dạng.</a:t>
             </a:r>
@@ -13446,7 +13350,7 @@
                     <a:lumMod val="50000"/>
                   </a:schemeClr>
                 </a:solidFill>
-                <a:latin typeface="Verdana"/>
+                <a:latin typeface="Arial"/>
               </a:rPr>
               <a:t>Neudata | #ClearDataClearImpact</a:t>
             </a:r>
@@ -13576,8 +13480,8 @@
                 <a:solidFill>
                   <a:srgbClr val="0D7377"/>
                 </a:solidFill>
-                <a:latin typeface="Segoe UI"/>
-                <a:cs typeface="Segoe UI"/>
+                <a:latin typeface="Arial"/>
+                <a:cs typeface="Arial"/>
               </a:rPr>
               <a:t>Trích dẫn và sao chép: diễn đạt lại an toàn</a:t>
             </a:r>
@@ -13673,8 +13577,8 @@
                 <a:solidFill>
                   <a:srgbClr val="FFFFFF"/>
                 </a:solidFill>
-                <a:latin typeface="Segoe UI"/>
-                <a:cs typeface="Segoe UI"/>
+                <a:latin typeface="Arial"/>
+                <a:cs typeface="Arial"/>
               </a:rPr>
               <a:t>THÔNG ĐIỆP CHÍNH   </a:t>
             </a:r>
@@ -13683,8 +13587,8 @@
                 <a:solidFill>
                   <a:srgbClr val="FFFFFF"/>
                 </a:solidFill>
-                <a:latin typeface="Segoe UI"/>
-                <a:cs typeface="Segoe UI"/>
+                <a:latin typeface="Arial"/>
+                <a:cs typeface="Arial"/>
               </a:rPr>
               <a:t>Thay đổi cả cấu trúc lẫn từ ngữ, và luôn trích dẫn nguồn.</a:t>
             </a:r>
@@ -13721,7 +13625,7 @@
                     <a:lumMod val="50000"/>
                   </a:schemeClr>
                 </a:solidFill>
-                <a:latin typeface="Verdana"/>
+                <a:latin typeface="Arial"/>
               </a:rPr>
               <a:t>Neudata | #ClearDataClearImpact</a:t>
             </a:r>
@@ -13851,8 +13755,8 @@
                 <a:solidFill>
                   <a:srgbClr val="0D7377"/>
                 </a:solidFill>
-                <a:latin typeface="Segoe UI"/>
-                <a:cs typeface="Segoe UI"/>
+                <a:latin typeface="Arial"/>
+                <a:cs typeface="Arial"/>
               </a:rPr>
               <a:t>Câu hỏi ôn tập: Buổi 1</a:t>
             </a:r>
@@ -13922,8 +13826,8 @@
                 <a:solidFill>
                   <a:srgbClr val="FFFFFF"/>
                 </a:solidFill>
-                <a:latin typeface="Segoe UI"/>
-                <a:cs typeface="Segoe UI"/>
+                <a:latin typeface="Arial"/>
+                <a:cs typeface="Arial"/>
               </a:rPr>
               <a:t>CÂU HỎI NHANH   |   8 phút</a:t>
             </a:r>
@@ -13960,25 +13864,19 @@
               <a:spcBef>
                 <a:spcPts val="450"/>
               </a:spcBef>
-              <a:buNone/>
-            </a:pPr>
-            <a:r>
-              <a:rPr lang="en-US" sz="1650" b="1" dirty="0">
-                <a:solidFill>
-                  <a:srgbClr val="6C3483"/>
-                </a:solidFill>
-                <a:latin typeface="Segoe UI"/>
-                <a:cs typeface="Segoe UI"/>
-              </a:rPr>
-              <a:t>1.  </a:t>
-            </a:r>
+              <a:buClr>
+                <a:srgbClr val="6C3483"/>
+              </a:buClr>
+              <a:buFont typeface="Arial"/>
+              <a:buChar char="•"/>
+            </a:pPr>
             <a:r>
               <a:rPr lang="en-US" sz="1650" dirty="0">
                 <a:solidFill>
                   <a:srgbClr val="000000"/>
                 </a:solidFill>
-                <a:latin typeface="Segoe UI"/>
-                <a:cs typeface="Segoe UI"/>
+                <a:latin typeface="Arial"/>
+                <a:cs typeface="Arial"/>
               </a:rPr>
               <a:t>Kiểm tra cân bằng dịch có được ghi hằng ngày theo quy trình: nghiên cứu, audit hay QI?</a:t>
             </a:r>
@@ -13991,25 +13889,19 @@
               <a:spcBef>
                 <a:spcPts val="450"/>
               </a:spcBef>
-              <a:buNone/>
-            </a:pPr>
-            <a:r>
-              <a:rPr lang="en-US" sz="1650" b="1" dirty="0">
-                <a:solidFill>
-                  <a:srgbClr val="6C3483"/>
-                </a:solidFill>
-                <a:latin typeface="Segoe UI"/>
-                <a:cs typeface="Segoe UI"/>
-              </a:rPr>
-              <a:t>2.  </a:t>
-            </a:r>
+              <a:buClr>
+                <a:srgbClr val="6C3483"/>
+              </a:buClr>
+              <a:buFont typeface="Arial"/>
+              <a:buChar char="•"/>
+            </a:pPr>
             <a:r>
               <a:rPr lang="en-US" sz="1650" dirty="0">
                 <a:solidFill>
                   <a:srgbClr val="000000"/>
                 </a:solidFill>
-                <a:latin typeface="Segoe UI"/>
-                <a:cs typeface="Segoe UI"/>
+                <a:latin typeface="Arial"/>
+                <a:cs typeface="Arial"/>
               </a:rPr>
               <a:t>'Ở nhân viên ICU, phản hồi vệ sinh tay so với không phản hồi có tăng tuân thủ sau 3 tháng?' Nêu P, I, C, O, T</a:t>
             </a:r>
@@ -14022,25 +13914,19 @@
               <a:spcBef>
                 <a:spcPts val="450"/>
               </a:spcBef>
-              <a:buNone/>
-            </a:pPr>
-            <a:r>
-              <a:rPr lang="en-US" sz="1650" b="1" dirty="0">
-                <a:solidFill>
-                  <a:srgbClr val="6C3483"/>
-                </a:solidFill>
-                <a:latin typeface="Segoe UI"/>
-                <a:cs typeface="Segoe UI"/>
-              </a:rPr>
-              <a:t>3.  </a:t>
-            </a:r>
+              <a:buClr>
+                <a:srgbClr val="6C3483"/>
+              </a:buClr>
+              <a:buFont typeface="Arial"/>
+              <a:buChar char="•"/>
+            </a:pPr>
             <a:r>
               <a:rPr lang="en-US" sz="1650" dirty="0">
                 <a:solidFill>
                   <a:srgbClr val="000000"/>
                 </a:solidFill>
-                <a:latin typeface="Segoe UI"/>
-                <a:cs typeface="Segoe UI"/>
+                <a:latin typeface="Arial"/>
+                <a:cs typeface="Arial"/>
               </a:rPr>
               <a:t>Ví dụ xuyên suốt trượt tiêu chí FINER nào?</a:t>
             </a:r>
@@ -14053,25 +13939,19 @@
               <a:spcBef>
                 <a:spcPts val="450"/>
               </a:spcBef>
-              <a:buNone/>
-            </a:pPr>
-            <a:r>
-              <a:rPr lang="en-US" sz="1650" b="1" dirty="0">
-                <a:solidFill>
-                  <a:srgbClr val="6C3483"/>
-                </a:solidFill>
-                <a:latin typeface="Segoe UI"/>
-                <a:cs typeface="Segoe UI"/>
-              </a:rPr>
-              <a:t>4.  </a:t>
-            </a:r>
+              <a:buClr>
+                <a:srgbClr val="6C3483"/>
+              </a:buClr>
+              <a:buFont typeface="Arial"/>
+              <a:buChar char="•"/>
+            </a:pPr>
             <a:r>
               <a:rPr lang="en-US" sz="1650" dirty="0">
                 <a:solidFill>
                   <a:srgbClr val="000000"/>
                 </a:solidFill>
-                <a:latin typeface="Segoe UI"/>
-                <a:cs typeface="Segoe UI"/>
+                <a:latin typeface="Arial"/>
+                <a:cs typeface="Arial"/>
               </a:rPr>
               <a:t>Câu nào là mục tiêu: 'tìm hiểu về mê sảng' hay 'ước tính tỷ lệ mê sảng'?</a:t>
             </a:r>
@@ -14084,25 +13964,19 @@
               <a:spcBef>
                 <a:spcPts val="450"/>
               </a:spcBef>
-              <a:buNone/>
-            </a:pPr>
-            <a:r>
-              <a:rPr lang="en-US" sz="1650" b="1" dirty="0">
-                <a:solidFill>
-                  <a:srgbClr val="6C3483"/>
-                </a:solidFill>
-                <a:latin typeface="Segoe UI"/>
-                <a:cs typeface="Segoe UI"/>
-              </a:rPr>
-              <a:t>5.  </a:t>
-            </a:r>
+              <a:buClr>
+                <a:srgbClr val="6C3483"/>
+              </a:buClr>
+              <a:buFont typeface="Arial"/>
+              <a:buChar char="•"/>
+            </a:pPr>
             <a:r>
               <a:rPr lang="en-US" sz="1650" dirty="0">
                 <a:solidFill>
                   <a:srgbClr val="000000"/>
                 </a:solidFill>
-                <a:latin typeface="Segoe UI"/>
-                <a:cs typeface="Segoe UI"/>
+                <a:latin typeface="Arial"/>
+                <a:cs typeface="Arial"/>
               </a:rPr>
               <a:t>Viết H0 cho: vận động sớm có rút ngắn thời gian nằm ICU không?</a:t>
             </a:r>
@@ -14148,8 +14022,8 @@
                 <a:solidFill>
                   <a:srgbClr val="6C3483"/>
                 </a:solidFill>
-                <a:latin typeface="Segoe UI"/>
-                <a:cs typeface="Segoe UI"/>
+                <a:latin typeface="Arial"/>
+                <a:cs typeface="Arial"/>
               </a:rPr>
               <a:t>SẢN PHẨM   </a:t>
             </a:r>
@@ -14158,8 +14032,8 @@
                 <a:solidFill>
                   <a:srgbClr val="000000"/>
                 </a:solidFill>
-                <a:latin typeface="Segoe UI"/>
-                <a:cs typeface="Segoe UI"/>
+                <a:latin typeface="Arial"/>
+                <a:cs typeface="Arial"/>
               </a:rPr>
               <a:t>Trả lời trên giấy, đối chiếu với slide sau</a:t>
             </a:r>
@@ -14196,7 +14070,7 @@
                     <a:lumMod val="50000"/>
                   </a:schemeClr>
                 </a:solidFill>
-                <a:latin typeface="Verdana"/>
+                <a:latin typeface="Arial"/>
               </a:rPr>
               <a:t>Neudata | #ClearDataClearImpact</a:t>
             </a:r>
@@ -14326,8 +14200,8 @@
                 <a:solidFill>
                   <a:srgbClr val="0D7377"/>
                 </a:solidFill>
-                <a:latin typeface="Segoe UI"/>
-                <a:cs typeface="Segoe UI"/>
+                <a:latin typeface="Arial"/>
+                <a:cs typeface="Arial"/>
               </a:rPr>
               <a:t>Bốn quy tắc trích dẫn an toàn</a:t>
             </a:r>
@@ -14397,8 +14271,8 @@
                 <a:solidFill>
                   <a:srgbClr val="FFFFFF"/>
                 </a:solidFill>
-                <a:latin typeface="Segoe UI"/>
-                <a:cs typeface="Segoe UI"/>
+                <a:latin typeface="Arial"/>
+                <a:cs typeface="Arial"/>
               </a:rPr>
               <a:t>Trích dữ kiện</a:t>
             </a:r>
@@ -14446,8 +14320,8 @@
                 <a:solidFill>
                   <a:srgbClr val="000000"/>
                 </a:solidFill>
-                <a:latin typeface="Segoe UI"/>
-                <a:cs typeface="Segoe UI"/>
+                <a:latin typeface="Arial"/>
+                <a:cs typeface="Arial"/>
               </a:rPr>
               <a:t>Con số, phát hiện</a:t>
             </a:r>
@@ -14467,8 +14341,8 @@
                 <a:solidFill>
                   <a:srgbClr val="000000"/>
                 </a:solidFill>
-                <a:latin typeface="Segoe UI"/>
-                <a:cs typeface="Segoe UI"/>
+                <a:latin typeface="Arial"/>
+                <a:cs typeface="Arial"/>
               </a:rPr>
               <a:t>và ý tưởng của người</a:t>
             </a:r>
@@ -14488,8 +14362,8 @@
                 <a:solidFill>
                   <a:srgbClr val="000000"/>
                 </a:solidFill>
-                <a:latin typeface="Segoe UI"/>
-                <a:cs typeface="Segoe UI"/>
+                <a:latin typeface="Arial"/>
+                <a:cs typeface="Arial"/>
               </a:rPr>
               <a:t>khác cần trích dẫn</a:t>
             </a:r>
@@ -14531,8 +14405,8 @@
                 <a:solidFill>
                   <a:srgbClr val="FFFFFF"/>
                 </a:solidFill>
-                <a:latin typeface="Segoe UI"/>
-                <a:cs typeface="Segoe UI"/>
+                <a:latin typeface="Arial"/>
+                <a:cs typeface="Arial"/>
               </a:rPr>
               <a:t>Trích nguồn gốc</a:t>
             </a:r>
@@ -14580,8 +14454,8 @@
                 <a:solidFill>
                   <a:srgbClr val="000000"/>
                 </a:solidFill>
-                <a:latin typeface="Segoe UI"/>
-                <a:cs typeface="Segoe UI"/>
+                <a:latin typeface="Arial"/>
+                <a:cs typeface="Arial"/>
               </a:rPr>
               <a:t>Đọc và trích</a:t>
             </a:r>
@@ -14601,8 +14475,8 @@
                 <a:solidFill>
                   <a:srgbClr val="000000"/>
                 </a:solidFill>
-                <a:latin typeface="Segoe UI"/>
-                <a:cs typeface="Segoe UI"/>
+                <a:latin typeface="Arial"/>
+                <a:cs typeface="Arial"/>
               </a:rPr>
               <a:t>bài báo gốc,</a:t>
             </a:r>
@@ -14622,8 +14496,8 @@
                 <a:solidFill>
                   <a:srgbClr val="000000"/>
                 </a:solidFill>
-                <a:latin typeface="Segoe UI"/>
-                <a:cs typeface="Segoe UI"/>
+                <a:latin typeface="Arial"/>
+                <a:cs typeface="Arial"/>
               </a:rPr>
               <a:t>không trích bản tóm lược</a:t>
             </a:r>
@@ -14665,8 +14539,8 @@
                 <a:solidFill>
                   <a:srgbClr val="FFFFFF"/>
                 </a:solidFill>
-                <a:latin typeface="Segoe UI"/>
-                <a:cs typeface="Segoe UI"/>
+                <a:latin typeface="Arial"/>
+                <a:cs typeface="Arial"/>
               </a:rPr>
               <a:t>Lời của mình</a:t>
             </a:r>
@@ -14714,8 +14588,8 @@
                 <a:solidFill>
                   <a:srgbClr val="000000"/>
                 </a:solidFill>
-                <a:latin typeface="Segoe UI"/>
-                <a:cs typeface="Segoe UI"/>
+                <a:latin typeface="Arial"/>
+                <a:cs typeface="Arial"/>
               </a:rPr>
               <a:t>Cấu trúc mới;</a:t>
             </a:r>
@@ -14735,8 +14609,8 @@
                 <a:solidFill>
                   <a:srgbClr val="000000"/>
                 </a:solidFill>
-                <a:latin typeface="Segoe UI"/>
-                <a:cs typeface="Segoe UI"/>
+                <a:latin typeface="Arial"/>
+                <a:cs typeface="Arial"/>
               </a:rPr>
               <a:t>nguyên văn phải</a:t>
             </a:r>
@@ -14756,8 +14630,8 @@
                 <a:solidFill>
                   <a:srgbClr val="000000"/>
                 </a:solidFill>
-                <a:latin typeface="Segoe UI"/>
-                <a:cs typeface="Segoe UI"/>
+                <a:latin typeface="Arial"/>
+                <a:cs typeface="Arial"/>
               </a:rPr>
               <a:t>có ngoặc kép</a:t>
             </a:r>
@@ -14799,8 +14673,8 @@
                 <a:solidFill>
                   <a:srgbClr val="FFFFFF"/>
                 </a:solidFill>
-                <a:latin typeface="Segoe UI"/>
-                <a:cs typeface="Segoe UI"/>
+                <a:latin typeface="Arial"/>
+                <a:cs typeface="Arial"/>
               </a:rPr>
               <a:t>Kiểm tra</a:t>
             </a:r>
@@ -14848,8 +14722,8 @@
                 <a:solidFill>
                   <a:srgbClr val="000000"/>
                 </a:solidFill>
-                <a:latin typeface="Segoe UI"/>
-                <a:cs typeface="Segoe UI"/>
+                <a:latin typeface="Arial"/>
+                <a:cs typeface="Arial"/>
               </a:rPr>
               <a:t>Mỗi tài liệu</a:t>
             </a:r>
@@ -14869,8 +14743,8 @@
                 <a:solidFill>
                   <a:srgbClr val="000000"/>
                 </a:solidFill>
-                <a:latin typeface="Segoe UI"/>
-                <a:cs typeface="Segoe UI"/>
+                <a:latin typeface="Arial"/>
+                <a:cs typeface="Arial"/>
               </a:rPr>
               <a:t>nói đúng điều</a:t>
             </a:r>
@@ -14890,8 +14764,8 @@
                 <a:solidFill>
                   <a:srgbClr val="000000"/>
                 </a:solidFill>
-                <a:latin typeface="Segoe UI"/>
-                <a:cs typeface="Segoe UI"/>
+                <a:latin typeface="Arial"/>
+                <a:cs typeface="Arial"/>
               </a:rPr>
               <a:t>bạn dẫn ra</a:t>
             </a:r>
@@ -14935,8 +14809,8 @@
                 <a:solidFill>
                   <a:srgbClr val="FFFFFF"/>
                 </a:solidFill>
-                <a:latin typeface="Segoe UI"/>
-                <a:cs typeface="Segoe UI"/>
+                <a:latin typeface="Arial"/>
+                <a:cs typeface="Arial"/>
               </a:rPr>
               <a:t>THÔNG ĐIỆP CHÍNH   </a:t>
             </a:r>
@@ -14945,8 +14819,8 @@
                 <a:solidFill>
                   <a:srgbClr val="FFFFFF"/>
                 </a:solidFill>
-                <a:latin typeface="Segoe UI"/>
-                <a:cs typeface="Segoe UI"/>
+                <a:latin typeface="Arial"/>
+                <a:cs typeface="Arial"/>
               </a:rPr>
               <a:t>Không bao giờ trích dẫn một bài báo bạn chưa đọc.</a:t>
             </a:r>
@@ -14983,7 +14857,7 @@
                     <a:lumMod val="50000"/>
                   </a:schemeClr>
                 </a:solidFill>
-                <a:latin typeface="Verdana"/>
+                <a:latin typeface="Arial"/>
               </a:rPr>
               <a:t>Neudata | #ClearDataClearImpact</a:t>
             </a:r>
@@ -15113,8 +14987,8 @@
                 <a:solidFill>
                   <a:srgbClr val="0D7377"/>
                 </a:solidFill>
-                <a:latin typeface="Segoe UI"/>
-                <a:cs typeface="Segoe UI"/>
+                <a:latin typeface="Arial"/>
+                <a:cs typeface="Arial"/>
               </a:rPr>
               <a:t>Kiểm tra hiểu bài: được hay không được?</a:t>
             </a:r>
@@ -15184,8 +15058,8 @@
                 <a:solidFill>
                   <a:srgbClr val="FFFFFF"/>
                 </a:solidFill>
-                <a:latin typeface="Segoe UI"/>
-                <a:cs typeface="Segoe UI"/>
+                <a:latin typeface="Arial"/>
+                <a:cs typeface="Arial"/>
               </a:rPr>
               <a:t>CÂU HỎI NHANH   |   2 phút</a:t>
             </a:r>
@@ -15222,25 +15096,19 @@
               <a:spcBef>
                 <a:spcPts val="450"/>
               </a:spcBef>
-              <a:buNone/>
-            </a:pPr>
-            <a:r>
-              <a:rPr lang="en-US" sz="1650" b="1" dirty="0">
-                <a:solidFill>
-                  <a:srgbClr val="6C3483"/>
-                </a:solidFill>
-                <a:latin typeface="Segoe UI"/>
-                <a:cs typeface="Segoe UI"/>
-              </a:rPr>
-              <a:t>1.  </a:t>
-            </a:r>
+              <a:buClr>
+                <a:srgbClr val="6C3483"/>
+              </a:buClr>
+              <a:buFont typeface="Arial"/>
+              <a:buChar char="•"/>
+            </a:pPr>
             <a:r>
               <a:rPr lang="en-US" sz="1650" dirty="0">
                 <a:solidFill>
                   <a:srgbClr val="000000"/>
                 </a:solidFill>
-                <a:latin typeface="Segoe UI"/>
-                <a:cs typeface="Segoe UI"/>
+                <a:latin typeface="Arial"/>
+                <a:cs typeface="Arial"/>
               </a:rPr>
               <a:t>Bạn chép một câu từ tóm tắt, đổi hai từ và thêm [3]</a:t>
             </a:r>
@@ -15253,25 +15121,19 @@
               <a:spcBef>
                 <a:spcPts val="450"/>
               </a:spcBef>
-              <a:buNone/>
-            </a:pPr>
-            <a:r>
-              <a:rPr lang="en-US" sz="1650" b="1" dirty="0">
-                <a:solidFill>
-                  <a:srgbClr val="6C3483"/>
-                </a:solidFill>
-                <a:latin typeface="Segoe UI"/>
-                <a:cs typeface="Segoe UI"/>
-              </a:rPr>
-              <a:t>2.  </a:t>
-            </a:r>
+              <a:buClr>
+                <a:srgbClr val="6C3483"/>
+              </a:buClr>
+              <a:buFont typeface="Arial"/>
+              <a:buChar char="•"/>
+            </a:pPr>
             <a:r>
               <a:rPr lang="en-US" sz="1650" dirty="0">
                 <a:solidFill>
                   <a:srgbClr val="000000"/>
                 </a:solidFill>
-                <a:latin typeface="Segoe UI"/>
-                <a:cs typeface="Segoe UI"/>
+                <a:latin typeface="Arial"/>
+                <a:cs typeface="Arial"/>
               </a:rPr>
               <a:t>Bạn trích nguyên văn một câu, trong ngoặc kép, có [3]</a:t>
             </a:r>
@@ -15284,25 +15146,19 @@
               <a:spcBef>
                 <a:spcPts val="450"/>
               </a:spcBef>
-              <a:buNone/>
-            </a:pPr>
-            <a:r>
-              <a:rPr lang="en-US" sz="1650" b="1" dirty="0">
-                <a:solidFill>
-                  <a:srgbClr val="6C3483"/>
-                </a:solidFill>
-                <a:latin typeface="Segoe UI"/>
-                <a:cs typeface="Segoe UI"/>
-              </a:rPr>
-              <a:t>3.  </a:t>
-            </a:r>
+              <a:buClr>
+                <a:srgbClr val="6C3483"/>
+              </a:buClr>
+              <a:buFont typeface="Arial"/>
+              <a:buChar char="•"/>
+            </a:pPr>
             <a:r>
               <a:rPr lang="en-US" sz="1650" dirty="0">
                 <a:solidFill>
                   <a:srgbClr val="000000"/>
                 </a:solidFill>
-                <a:latin typeface="Segoe UI"/>
-                <a:cs typeface="Segoe UI"/>
+                <a:latin typeface="Arial"/>
+                <a:cs typeface="Arial"/>
               </a:rPr>
               <a:t>Bạn viết một phát hiện bằng lời của mình nhưng quên trích dẫn</a:t>
             </a:r>
@@ -15315,25 +15171,19 @@
               <a:spcBef>
                 <a:spcPts val="450"/>
               </a:spcBef>
-              <a:buNone/>
-            </a:pPr>
-            <a:r>
-              <a:rPr lang="en-US" sz="1650" b="1" dirty="0">
-                <a:solidFill>
-                  <a:srgbClr val="6C3483"/>
-                </a:solidFill>
-                <a:latin typeface="Segoe UI"/>
-                <a:cs typeface="Segoe UI"/>
-              </a:rPr>
-              <a:t>4.  </a:t>
-            </a:r>
+              <a:buClr>
+                <a:srgbClr val="6C3483"/>
+              </a:buClr>
+              <a:buFont typeface="Arial"/>
+              <a:buChar char="•"/>
+            </a:pPr>
             <a:r>
               <a:rPr lang="en-US" sz="1650" dirty="0">
                 <a:solidFill>
                   <a:srgbClr val="000000"/>
                 </a:solidFill>
-                <a:latin typeface="Segoe UI"/>
-                <a:cs typeface="Segoe UI"/>
+                <a:latin typeface="Arial"/>
+                <a:cs typeface="Arial"/>
               </a:rPr>
               <a:t>Bạn trích dẫn một bài thấy được nhắc trong bài tổng quan, mà không đọc</a:t>
             </a:r>
@@ -15379,8 +15229,8 @@
                 <a:solidFill>
                   <a:srgbClr val="6C3483"/>
                 </a:solidFill>
-                <a:latin typeface="Segoe UI"/>
-                <a:cs typeface="Segoe UI"/>
+                <a:latin typeface="Arial"/>
+                <a:cs typeface="Arial"/>
               </a:rPr>
               <a:t>SẢN PHẨM   </a:t>
             </a:r>
@@ -15389,8 +15239,8 @@
                 <a:solidFill>
                   <a:srgbClr val="000000"/>
                 </a:solidFill>
-                <a:latin typeface="Segoe UI"/>
-                <a:cs typeface="Segoe UI"/>
+                <a:latin typeface="Arial"/>
+                <a:cs typeface="Arial"/>
               </a:rPr>
               <a:t>Giơ ngón cái lên (được) hoặc xuống (không được)</a:t>
             </a:r>
@@ -15427,7 +15277,7 @@
                     <a:lumMod val="50000"/>
                   </a:schemeClr>
                 </a:solidFill>
-                <a:latin typeface="Verdana"/>
+                <a:latin typeface="Arial"/>
               </a:rPr>
               <a:t>Neudata | #ClearDataClearImpact</a:t>
             </a:r>
@@ -15557,8 +15407,8 @@
                 <a:solidFill>
                   <a:srgbClr val="0D7377"/>
                 </a:solidFill>
-                <a:latin typeface="Segoe UI"/>
-                <a:cs typeface="Segoe UI"/>
+                <a:latin typeface="Arial"/>
+                <a:cs typeface="Arial"/>
               </a:rPr>
               <a:t>Y văn xám và sổ đăng ký thử nghiệm</a:t>
             </a:r>
@@ -15654,8 +15504,8 @@
                 <a:solidFill>
                   <a:srgbClr val="FFFFFF"/>
                 </a:solidFill>
-                <a:latin typeface="Segoe UI"/>
-                <a:cs typeface="Segoe UI"/>
+                <a:latin typeface="Arial"/>
+                <a:cs typeface="Arial"/>
               </a:rPr>
               <a:t>THÔNG ĐIỆP CHÍNH   </a:t>
             </a:r>
@@ -15664,8 +15514,8 @@
                 <a:solidFill>
                   <a:srgbClr val="FFFFFF"/>
                 </a:solidFill>
-                <a:latin typeface="Segoe UI"/>
-                <a:cs typeface="Segoe UI"/>
+                <a:latin typeface="Arial"/>
+                <a:cs typeface="Arial"/>
               </a:rPr>
               <a:t>Hãy nhìn dưới mặt nước: sổ đăng ký và y văn xám giảm sai lệch xuất bản.</a:t>
             </a:r>
@@ -15702,7 +15552,7 @@
                     <a:lumMod val="50000"/>
                   </a:schemeClr>
                 </a:solidFill>
-                <a:latin typeface="Verdana"/>
+                <a:latin typeface="Arial"/>
               </a:rPr>
               <a:t>Neudata | #ClearDataClearImpact</a:t>
             </a:r>
@@ -15832,8 +15682,8 @@
                 <a:solidFill>
                   <a:srgbClr val="0D7377"/>
                 </a:solidFill>
-                <a:latin typeface="Segoe UI"/>
-                <a:cs typeface="Segoe UI"/>
+                <a:latin typeface="Arial"/>
+                <a:cs typeface="Arial"/>
               </a:rPr>
               <a:t>Giải lao</a:t>
             </a:r>
@@ -15903,8 +15753,8 @@
                 <a:solidFill>
                   <a:srgbClr val="FFFFFF"/>
                 </a:solidFill>
-                <a:latin typeface="Segoe UI"/>
-                <a:cs typeface="Segoe UI"/>
+                <a:latin typeface="Arial"/>
+                <a:cs typeface="Arial"/>
               </a:rPr>
               <a:t>GIẢI LAO   |   15 phút</a:t>
             </a:r>
@@ -15941,25 +15791,19 @@
               <a:spcBef>
                 <a:spcPts val="450"/>
               </a:spcBef>
-              <a:buNone/>
-            </a:pPr>
-            <a:r>
-              <a:rPr lang="en-US" sz="1650" b="1" dirty="0">
-                <a:solidFill>
-                  <a:srgbClr val="8A99A3"/>
-                </a:solidFill>
-                <a:latin typeface="Segoe UI"/>
-                <a:cs typeface="Segoe UI"/>
-              </a:rPr>
-              <a:t>1.  </a:t>
-            </a:r>
+              <a:buClr>
+                <a:srgbClr val="8A99A3"/>
+              </a:buClr>
+              <a:buFont typeface="Arial"/>
+              <a:buChar char="•"/>
+            </a:pPr>
             <a:r>
               <a:rPr lang="en-US" sz="1650" dirty="0">
                 <a:solidFill>
                   <a:srgbClr val="000000"/>
                 </a:solidFill>
-                <a:latin typeface="Segoe UI"/>
-                <a:cs typeface="Segoe UI"/>
+                <a:latin typeface="Arial"/>
+                <a:cs typeface="Arial"/>
               </a:rPr>
               <a:t>Thư giãn, uống cà phê, trò chuyện với người khác nghề</a:t>
             </a:r>
@@ -15972,25 +15816,19 @@
               <a:spcBef>
                 <a:spcPts val="450"/>
               </a:spcBef>
-              <a:buNone/>
-            </a:pPr>
-            <a:r>
-              <a:rPr lang="en-US" sz="1650" b="1" dirty="0">
-                <a:solidFill>
-                  <a:srgbClr val="8A99A3"/>
-                </a:solidFill>
-                <a:latin typeface="Segoe UI"/>
-                <a:cs typeface="Segoe UI"/>
-              </a:rPr>
-              <a:t>2.  </a:t>
-            </a:r>
+              <a:buClr>
+                <a:srgbClr val="8A99A3"/>
+              </a:buClr>
+              <a:buFont typeface="Arial"/>
+              <a:buChar char="•"/>
+            </a:pPr>
             <a:r>
               <a:rPr lang="en-US" sz="1650" dirty="0">
                 <a:solidFill>
                   <a:srgbClr val="000000"/>
                 </a:solidFill>
-                <a:latin typeface="Segoe UI"/>
-                <a:cs typeface="Segoe UI"/>
+                <a:latin typeface="Arial"/>
+                <a:cs typeface="Arial"/>
               </a:rPr>
               <a:t>Suy nghĩ: nhóm bạn có thể làm vấn đề nào từ khoa mình hôm nay?</a:t>
             </a:r>
@@ -16027,7 +15865,7 @@
                     <a:lumMod val="50000"/>
                   </a:schemeClr>
                 </a:solidFill>
-                <a:latin typeface="Verdana"/>
+                <a:latin typeface="Arial"/>
               </a:rPr>
               <a:t>Neudata | #ClearDataClearImpact</a:t>
             </a:r>
@@ -16157,8 +15995,8 @@
                 <a:solidFill>
                   <a:srgbClr val="0D7377"/>
                 </a:solidFill>
-                <a:latin typeface="Segoe UI"/>
-                <a:cs typeface="Segoe UI"/>
+                <a:latin typeface="Arial"/>
+                <a:cs typeface="Arial"/>
               </a:rPr>
               <a:t>2.3  Đọc một bài báo trong 15 phút</a:t>
             </a:r>
@@ -16227,8 +16065,8 @@
                 <a:solidFill>
                   <a:srgbClr val="0D7377"/>
                 </a:solidFill>
-                <a:latin typeface="Segoe UI"/>
-                <a:cs typeface="Segoe UI"/>
+                <a:latin typeface="Arial"/>
+                <a:cs typeface="Arial"/>
               </a:rPr>
               <a:t>Không cần đọc từng chữ. Hãy đọc đúng chỗ, theo đúng thứ tự.</a:t>
             </a:r>
@@ -16245,8 +16083,8 @@
                 <a:solidFill>
                   <a:srgbClr val="595959"/>
                 </a:solidFill>
-                <a:latin typeface="Segoe UI"/>
-                <a:cs typeface="Segoe UI"/>
+                <a:latin typeface="Arial"/>
+                <a:cs typeface="Arial"/>
               </a:rPr>
               <a:t>40 phút: cấu trúc bài báo, thứ tự đọc, phần tóm tắt, thổi phồng, và bài tập đọc Bài báo 1</a:t>
             </a:r>
@@ -16283,7 +16121,7 @@
                     <a:lumMod val="50000"/>
                   </a:schemeClr>
                 </a:solidFill>
-                <a:latin typeface="Verdana"/>
+                <a:latin typeface="Arial"/>
               </a:rPr>
               <a:t>Neudata | #ClearDataClearImpact</a:t>
             </a:r>
@@ -16413,8 +16251,8 @@
                 <a:solidFill>
                   <a:srgbClr val="0D7377"/>
                 </a:solidFill>
-                <a:latin typeface="Segoe UI"/>
-                <a:cs typeface="Segoe UI"/>
+                <a:latin typeface="Arial"/>
+                <a:cs typeface="Arial"/>
               </a:rPr>
               <a:t>Cấu trúc bài báo: IMRaD</a:t>
             </a:r>
@@ -16510,8 +16348,8 @@
                 <a:solidFill>
                   <a:srgbClr val="FFFFFF"/>
                 </a:solidFill>
-                <a:latin typeface="Segoe UI"/>
-                <a:cs typeface="Segoe UI"/>
+                <a:latin typeface="Arial"/>
+                <a:cs typeface="Arial"/>
               </a:rPr>
               <a:t>THÔNG ĐIỆP CHÍNH   </a:t>
             </a:r>
@@ -16520,8 +16358,8 @@
                 <a:solidFill>
                   <a:srgbClr val="FFFFFF"/>
                 </a:solidFill>
-                <a:latin typeface="Segoe UI"/>
-                <a:cs typeface="Segoe UI"/>
+                <a:latin typeface="Arial"/>
+                <a:cs typeface="Arial"/>
               </a:rPr>
               <a:t>Mọi bài báo gốc có cùng hình dạng: vì sao, làm gì, thấy gì, ý nghĩa gì.</a:t>
             </a:r>
@@ -16558,7 +16396,7 @@
                     <a:lumMod val="50000"/>
                   </a:schemeClr>
                 </a:solidFill>
-                <a:latin typeface="Verdana"/>
+                <a:latin typeface="Arial"/>
               </a:rPr>
               <a:t>Neudata | #ClearDataClearImpact</a:t>
             </a:r>
@@ -16688,8 +16526,8 @@
                 <a:solidFill>
                   <a:srgbClr val="0D7377"/>
                 </a:solidFill>
-                <a:latin typeface="Segoe UI"/>
-                <a:cs typeface="Segoe UI"/>
+                <a:latin typeface="Arial"/>
+                <a:cs typeface="Arial"/>
               </a:rPr>
               <a:t>Thứ tự đọc trong 15 phút</a:t>
             </a:r>
@@ -16785,8 +16623,8 @@
                 <a:solidFill>
                   <a:srgbClr val="FFFFFF"/>
                 </a:solidFill>
-                <a:latin typeface="Segoe UI"/>
-                <a:cs typeface="Segoe UI"/>
+                <a:latin typeface="Arial"/>
+                <a:cs typeface="Arial"/>
               </a:rPr>
               <a:t>THÔNG ĐIỆP CHÍNH   </a:t>
             </a:r>
@@ -16795,8 +16633,8 @@
                 <a:solidFill>
                   <a:srgbClr val="FFFFFF"/>
                 </a:solidFill>
-                <a:latin typeface="Segoe UI"/>
-                <a:cs typeface="Segoe UI"/>
+                <a:latin typeface="Arial"/>
+                <a:cs typeface="Arial"/>
               </a:rPr>
               <a:t>Tiêu đề, tóm tắt, hình và bảng, phương pháp. Dừng sớm nếu không liên quan.</a:t>
             </a:r>
@@ -16833,7 +16671,7 @@
                     <a:lumMod val="50000"/>
                   </a:schemeClr>
                 </a:solidFill>
-                <a:latin typeface="Verdana"/>
+                <a:latin typeface="Arial"/>
               </a:rPr>
               <a:t>Neudata | #ClearDataClearImpact</a:t>
             </a:r>
@@ -16963,8 +16801,8 @@
                 <a:solidFill>
                   <a:srgbClr val="0D7377"/>
                 </a:solidFill>
-                <a:latin typeface="Segoe UI"/>
-                <a:cs typeface="Segoe UI"/>
+                <a:latin typeface="Arial"/>
+                <a:cs typeface="Arial"/>
               </a:rPr>
               <a:t>Phần tóm tắt phải có gì</a:t>
             </a:r>
@@ -17060,8 +16898,8 @@
                 <a:solidFill>
                   <a:srgbClr val="FFFFFF"/>
                 </a:solidFill>
-                <a:latin typeface="Segoe UI"/>
-                <a:cs typeface="Segoe UI"/>
+                <a:latin typeface="Arial"/>
+                <a:cs typeface="Arial"/>
               </a:rPr>
               <a:t>THÔNG ĐIỆP CHÍNH   </a:t>
             </a:r>
@@ -17070,8 +16908,8 @@
                 <a:solidFill>
                   <a:srgbClr val="FFFFFF"/>
                 </a:solidFill>
-                <a:latin typeface="Segoe UI"/>
-                <a:cs typeface="Segoe UI"/>
+                <a:latin typeface="Arial"/>
+                <a:cs typeface="Arial"/>
               </a:rPr>
               <a:t>Tóm tắt tốt giúp bạn viết PICO và kết quả chính mà không cần mở bài báo.</a:t>
             </a:r>
@@ -17108,7 +16946,7 @@
                     <a:lumMod val="50000"/>
                   </a:schemeClr>
                 </a:solidFill>
-                <a:latin typeface="Verdana"/>
+                <a:latin typeface="Arial"/>
               </a:rPr>
               <a:t>Neudata | #ClearDataClearImpact</a:t>
             </a:r>
@@ -17238,8 +17076,8 @@
                 <a:solidFill>
                   <a:srgbClr val="0D7377"/>
                 </a:solidFill>
-                <a:latin typeface="Segoe UI"/>
-                <a:cs typeface="Segoe UI"/>
+                <a:latin typeface="Arial"/>
+                <a:cs typeface="Arial"/>
               </a:rPr>
               <a:t>Một câu kết quả: kém và tốt</a:t>
             </a:r>
@@ -17335,8 +17173,8 @@
                 <a:solidFill>
                   <a:srgbClr val="FFFFFF"/>
                 </a:solidFill>
-                <a:latin typeface="Segoe UI"/>
-                <a:cs typeface="Segoe UI"/>
+                <a:latin typeface="Arial"/>
+                <a:cs typeface="Arial"/>
               </a:rPr>
               <a:t>THÔNG ĐIỆP CHÍNH   </a:t>
             </a:r>
@@ -17345,8 +17183,8 @@
                 <a:solidFill>
                   <a:srgbClr val="FFFFFF"/>
                 </a:solidFill>
-                <a:latin typeface="Segoe UI"/>
-                <a:cs typeface="Segoe UI"/>
+                <a:latin typeface="Arial"/>
+                <a:cs typeface="Arial"/>
               </a:rPr>
               <a:t>Mỗi kết quả chính cần: số mỗi nhóm, cỡ tác động, KTC 95% và mốc thời gian.</a:t>
             </a:r>
@@ -17383,7 +17221,7 @@
                     <a:lumMod val="50000"/>
                   </a:schemeClr>
                 </a:solidFill>
-                <a:latin typeface="Verdana"/>
+                <a:latin typeface="Arial"/>
               </a:rPr>
               <a:t>Neudata | #ClearDataClearImpact</a:t>
             </a:r>
@@ -17513,8 +17351,8 @@
                 <a:solidFill>
                   <a:srgbClr val="0D7377"/>
                 </a:solidFill>
-                <a:latin typeface="Segoe UI"/>
-                <a:cs typeface="Segoe UI"/>
+                <a:latin typeface="Arial"/>
+                <a:cs typeface="Arial"/>
               </a:rPr>
               <a:t>Thổi phồng (spin): khi lời văn vượt quá dữ liệu</a:t>
             </a:r>
@@ -17610,8 +17448,8 @@
                 <a:solidFill>
                   <a:srgbClr val="FFFFFF"/>
                 </a:solidFill>
-                <a:latin typeface="Segoe UI"/>
-                <a:cs typeface="Segoe UI"/>
+                <a:latin typeface="Arial"/>
+                <a:cs typeface="Arial"/>
               </a:rPr>
               <a:t>THÔNG ĐIỆP CHÍNH   </a:t>
             </a:r>
@@ -17620,8 +17458,8 @@
                 <a:solidFill>
                   <a:srgbClr val="FFFFFF"/>
                 </a:solidFill>
-                <a:latin typeface="Segoe UI"/>
-                <a:cs typeface="Segoe UI"/>
+                <a:latin typeface="Arial"/>
+                <a:cs typeface="Arial"/>
               </a:rPr>
               <a:t>Đọc con số trước, rồi kiểm tra lời văn có khớp với chúng không.</a:t>
             </a:r>
@@ -17658,7 +17496,7 @@
                     <a:lumMod val="50000"/>
                   </a:schemeClr>
                 </a:solidFill>
-                <a:latin typeface="Verdana"/>
+                <a:latin typeface="Arial"/>
               </a:rPr>
               <a:t>Neudata | #ClearDataClearImpact</a:t>
             </a:r>
@@ -17788,8 +17626,8 @@
                 <a:solidFill>
                   <a:srgbClr val="0D7377"/>
                 </a:solidFill>
-                <a:latin typeface="Segoe UI"/>
-                <a:cs typeface="Segoe UI"/>
+                <a:latin typeface="Arial"/>
+                <a:cs typeface="Arial"/>
               </a:rPr>
               <a:t>Câu hỏi ôn tập: đáp án</a:t>
             </a:r>
@@ -17859,10 +17697,10 @@
                 <a:solidFill>
                   <a:srgbClr val="FFFFFF"/>
                 </a:solidFill>
-                <a:latin typeface="Segoe UI"/>
-                <a:cs typeface="Segoe UI"/>
-              </a:rPr>
-              <a:t>1. Audit</a:t>
+                <a:latin typeface="Arial"/>
+                <a:cs typeface="Arial"/>
+              </a:rPr>
+              <a:t>Audit</a:t>
             </a:r>
           </a:p>
         </p:txBody>
@@ -17908,8 +17746,8 @@
                 <a:solidFill>
                   <a:srgbClr val="000000"/>
                 </a:solidFill>
-                <a:latin typeface="Segoe UI"/>
-                <a:cs typeface="Segoe UI"/>
+                <a:latin typeface="Arial"/>
+                <a:cs typeface="Arial"/>
               </a:rPr>
               <a:t>Kiểm tra thực hành</a:t>
             </a:r>
@@ -17929,8 +17767,8 @@
                 <a:solidFill>
                   <a:srgbClr val="000000"/>
                 </a:solidFill>
-                <a:latin typeface="Segoe UI"/>
-                <a:cs typeface="Segoe UI"/>
+                <a:latin typeface="Arial"/>
+                <a:cs typeface="Arial"/>
               </a:rPr>
               <a:t>so với tiêu chuẩn</a:t>
             </a:r>
@@ -17972,10 +17810,10 @@
                 <a:solidFill>
                   <a:srgbClr val="FFFFFF"/>
                 </a:solidFill>
-                <a:latin typeface="Segoe UI"/>
-                <a:cs typeface="Segoe UI"/>
-              </a:rPr>
-              <a:t>2. PICO(T)</a:t>
+                <a:latin typeface="Arial"/>
+                <a:cs typeface="Arial"/>
+              </a:rPr>
+              <a:t>PICO(T)</a:t>
             </a:r>
           </a:p>
         </p:txBody>
@@ -18021,8 +17859,8 @@
                 <a:solidFill>
                   <a:srgbClr val="000000"/>
                 </a:solidFill>
-                <a:latin typeface="Segoe UI"/>
-                <a:cs typeface="Segoe UI"/>
+                <a:latin typeface="Arial"/>
+                <a:cs typeface="Arial"/>
               </a:rPr>
               <a:t>P nhân viên ICU</a:t>
             </a:r>
@@ -18042,8 +17880,8 @@
                 <a:solidFill>
                   <a:srgbClr val="000000"/>
                 </a:solidFill>
-                <a:latin typeface="Segoe UI"/>
-                <a:cs typeface="Segoe UI"/>
+                <a:latin typeface="Arial"/>
+                <a:cs typeface="Arial"/>
               </a:rPr>
               <a:t>I phản hồi  C không</a:t>
             </a:r>
@@ -18063,8 +17901,8 @@
                 <a:solidFill>
                   <a:srgbClr val="000000"/>
                 </a:solidFill>
-                <a:latin typeface="Segoe UI"/>
-                <a:cs typeface="Segoe UI"/>
+                <a:latin typeface="Arial"/>
+                <a:cs typeface="Arial"/>
               </a:rPr>
               <a:t>O tuân thủ</a:t>
             </a:r>
@@ -18084,8 +17922,8 @@
                 <a:solidFill>
                   <a:srgbClr val="000000"/>
                 </a:solidFill>
-                <a:latin typeface="Segoe UI"/>
-                <a:cs typeface="Segoe UI"/>
+                <a:latin typeface="Arial"/>
+                <a:cs typeface="Arial"/>
               </a:rPr>
               <a:t>T 3 tháng</a:t>
             </a:r>
@@ -18127,10 +17965,10 @@
                 <a:solidFill>
                   <a:srgbClr val="FFFFFF"/>
                 </a:solidFill>
-                <a:latin typeface="Segoe UI"/>
-                <a:cs typeface="Segoe UI"/>
-              </a:rPr>
-              <a:t>3. Khả thi</a:t>
+                <a:latin typeface="Arial"/>
+                <a:cs typeface="Arial"/>
+              </a:rPr>
+              <a:t>Khả thi</a:t>
             </a:r>
           </a:p>
         </p:txBody>
@@ -18176,8 +18014,8 @@
                 <a:solidFill>
                   <a:srgbClr val="000000"/>
                 </a:solidFill>
-                <a:latin typeface="Segoe UI"/>
-                <a:cs typeface="Segoe UI"/>
+                <a:latin typeface="Arial"/>
+                <a:cs typeface="Arial"/>
               </a:rPr>
               <a:t>Tử vong cần</a:t>
             </a:r>
@@ -18197,8 +18035,8 @@
                 <a:solidFill>
                   <a:srgbClr val="000000"/>
                 </a:solidFill>
-                <a:latin typeface="Segoe UI"/>
-                <a:cs typeface="Segoe UI"/>
+                <a:latin typeface="Arial"/>
+                <a:cs typeface="Arial"/>
               </a:rPr>
               <a:t>&gt;1.000 bệnh nhân</a:t>
             </a:r>
@@ -18240,10 +18078,10 @@
                 <a:solidFill>
                   <a:srgbClr val="FFFFFF"/>
                 </a:solidFill>
-                <a:latin typeface="Segoe UI"/>
-                <a:cs typeface="Segoe UI"/>
-              </a:rPr>
-              <a:t>4. Ước tính</a:t>
+                <a:latin typeface="Arial"/>
+                <a:cs typeface="Arial"/>
+              </a:rPr>
+              <a:t>Ước tính</a:t>
             </a:r>
           </a:p>
         </p:txBody>
@@ -18289,8 +18127,8 @@
                 <a:solidFill>
                   <a:srgbClr val="000000"/>
                 </a:solidFill>
-                <a:latin typeface="Segoe UI"/>
-                <a:cs typeface="Segoe UI"/>
+                <a:latin typeface="Arial"/>
+                <a:cs typeface="Arial"/>
               </a:rPr>
               <a:t>Động từ đo được;</a:t>
             </a:r>
@@ -18310,8 +18148,8 @@
                 <a:solidFill>
                   <a:srgbClr val="000000"/>
                 </a:solidFill>
-                <a:latin typeface="Segoe UI"/>
-                <a:cs typeface="Segoe UI"/>
+                <a:latin typeface="Arial"/>
+                <a:cs typeface="Arial"/>
               </a:rPr>
               <a:t>'tìm hiểu' thì không</a:t>
             </a:r>
@@ -18353,10 +18191,10 @@
                 <a:solidFill>
                   <a:srgbClr val="FFFFFF"/>
                 </a:solidFill>
-                <a:latin typeface="Segoe UI"/>
-                <a:cs typeface="Segoe UI"/>
-              </a:rPr>
-              <a:t>5. H0</a:t>
+                <a:latin typeface="Arial"/>
+                <a:cs typeface="Arial"/>
+              </a:rPr>
+              <a:t>H0</a:t>
             </a:r>
           </a:p>
         </p:txBody>
@@ -18402,8 +18240,8 @@
                 <a:solidFill>
                   <a:srgbClr val="000000"/>
                 </a:solidFill>
-                <a:latin typeface="Segoe UI"/>
-                <a:cs typeface="Segoe UI"/>
+                <a:latin typeface="Arial"/>
+                <a:cs typeface="Arial"/>
               </a:rPr>
               <a:t>Thời gian nằm ICU</a:t>
             </a:r>
@@ -18423,8 +18261,8 @@
                 <a:solidFill>
                   <a:srgbClr val="000000"/>
                 </a:solidFill>
-                <a:latin typeface="Segoe UI"/>
-                <a:cs typeface="Segoe UI"/>
+                <a:latin typeface="Arial"/>
+                <a:cs typeface="Arial"/>
               </a:rPr>
               <a:t>như nhau giữa vận</a:t>
             </a:r>
@@ -18444,8 +18282,8 @@
                 <a:solidFill>
                   <a:srgbClr val="000000"/>
                 </a:solidFill>
-                <a:latin typeface="Segoe UI"/>
-                <a:cs typeface="Segoe UI"/>
+                <a:latin typeface="Arial"/>
+                <a:cs typeface="Arial"/>
               </a:rPr>
               <a:t>động sớm và</a:t>
             </a:r>
@@ -18465,8 +18303,8 @@
                 <a:solidFill>
                   <a:srgbClr val="000000"/>
                 </a:solidFill>
-                <a:latin typeface="Segoe UI"/>
-                <a:cs typeface="Segoe UI"/>
+                <a:latin typeface="Arial"/>
+                <a:cs typeface="Arial"/>
               </a:rPr>
               <a:t>thường quy</a:t>
             </a:r>
@@ -18510,8 +18348,8 @@
                 <a:solidFill>
                   <a:srgbClr val="FFFFFF"/>
                 </a:solidFill>
-                <a:latin typeface="Segoe UI"/>
-                <a:cs typeface="Segoe UI"/>
+                <a:latin typeface="Arial"/>
+                <a:cs typeface="Arial"/>
               </a:rPr>
               <a:t>THÔNG ĐIỆP CHÍNH   </a:t>
             </a:r>
@@ -18520,8 +18358,8 @@
                 <a:solidFill>
                   <a:srgbClr val="FFFFFF"/>
                 </a:solidFill>
-                <a:latin typeface="Segoe UI"/>
-                <a:cs typeface="Segoe UI"/>
+                <a:latin typeface="Arial"/>
+                <a:cs typeface="Arial"/>
               </a:rPr>
               <a:t>Nếu đúng 4 hoặc 5 câu, bạn đã sẵn sàng cho hôm nay.</a:t>
             </a:r>
@@ -18558,7 +18396,7 @@
                     <a:lumMod val="50000"/>
                   </a:schemeClr>
                 </a:solidFill>
-                <a:latin typeface="Verdana"/>
+                <a:latin typeface="Arial"/>
               </a:rPr>
               <a:t>Neudata | #ClearDataClearImpact</a:t>
             </a:r>
@@ -18688,8 +18526,8 @@
                 <a:solidFill>
                   <a:srgbClr val="0D7377"/>
                 </a:solidFill>
-                <a:latin typeface="Segoe UI"/>
-                <a:cs typeface="Segoe UI"/>
+                <a:latin typeface="Arial"/>
+                <a:cs typeface="Arial"/>
               </a:rPr>
               <a:t>Kiểm tra hiểu bài: tìm chỗ thổi phồng</a:t>
             </a:r>
@@ -18759,8 +18597,8 @@
                 <a:solidFill>
                   <a:srgbClr val="FFFFFF"/>
                 </a:solidFill>
-                <a:latin typeface="Segoe UI"/>
-                <a:cs typeface="Segoe UI"/>
+                <a:latin typeface="Arial"/>
+                <a:cs typeface="Arial"/>
               </a:rPr>
               <a:t>CÂU HỎI NHANH   |   3 phút</a:t>
             </a:r>
@@ -18797,25 +18635,19 @@
               <a:spcBef>
                 <a:spcPts val="450"/>
               </a:spcBef>
-              <a:buNone/>
-            </a:pPr>
-            <a:r>
-              <a:rPr lang="en-US" sz="1650" b="1" dirty="0">
-                <a:solidFill>
-                  <a:srgbClr val="6C3483"/>
-                </a:solidFill>
-                <a:latin typeface="Segoe UI"/>
-                <a:cs typeface="Segoe UI"/>
-              </a:rPr>
-              <a:t>1.  </a:t>
-            </a:r>
+              <a:buClr>
+                <a:srgbClr val="6C3483"/>
+              </a:buClr>
+              <a:buFont typeface="Arial"/>
+              <a:buChar char="•"/>
+            </a:pPr>
             <a:r>
               <a:rPr lang="en-US" sz="1650" dirty="0">
                 <a:solidFill>
                   <a:srgbClr val="000000"/>
                 </a:solidFill>
-                <a:latin typeface="Segoe UI"/>
-                <a:cs typeface="Segoe UI"/>
+                <a:latin typeface="Arial"/>
+                <a:cs typeface="Arial"/>
               </a:rPr>
               <a:t>Một nghiên cứu đoàn hệ: 'Cho ăn sớm LÀM GIẢM viêm phổi ở bệnh nhân đột quỵ'</a:t>
             </a:r>
@@ -18828,25 +18660,19 @@
               <a:spcBef>
                 <a:spcPts val="450"/>
               </a:spcBef>
-              <a:buNone/>
-            </a:pPr>
-            <a:r>
-              <a:rPr lang="en-US" sz="1650" b="1" dirty="0">
-                <a:solidFill>
-                  <a:srgbClr val="6C3483"/>
-                </a:solidFill>
-                <a:latin typeface="Segoe UI"/>
-                <a:cs typeface="Segoe UI"/>
-              </a:rPr>
-              <a:t>2.  </a:t>
-            </a:r>
+              <a:buClr>
+                <a:srgbClr val="6C3483"/>
+              </a:buClr>
+              <a:buFont typeface="Arial"/>
+              <a:buChar char="•"/>
+            </a:pPr>
             <a:r>
               <a:rPr lang="en-US" sz="1650" dirty="0">
                 <a:solidFill>
                   <a:srgbClr val="000000"/>
                 </a:solidFill>
-                <a:latin typeface="Segoe UI"/>
-                <a:cs typeface="Segoe UI"/>
+                <a:latin typeface="Arial"/>
+                <a:cs typeface="Arial"/>
               </a:rPr>
               <a:t>Kết cục chính p = 0,31: 'một xu hướng có lợi đầy hứa hẹn'</a:t>
             </a:r>
@@ -18859,25 +18685,19 @@
               <a:spcBef>
                 <a:spcPts val="450"/>
               </a:spcBef>
-              <a:buNone/>
-            </a:pPr>
-            <a:r>
-              <a:rPr lang="en-US" sz="1650" b="1" dirty="0">
-                <a:solidFill>
-                  <a:srgbClr val="6C3483"/>
-                </a:solidFill>
-                <a:latin typeface="Segoe UI"/>
-                <a:cs typeface="Segoe UI"/>
-              </a:rPr>
-              <a:t>3.  </a:t>
-            </a:r>
+              <a:buClr>
+                <a:srgbClr val="6C3483"/>
+              </a:buClr>
+              <a:buFont typeface="Arial"/>
+              <a:buChar char="•"/>
+            </a:pPr>
             <a:r>
               <a:rPr lang="en-US" sz="1650" dirty="0">
                 <a:solidFill>
                   <a:srgbClr val="000000"/>
                 </a:solidFill>
-                <a:latin typeface="Segoe UI"/>
-                <a:cs typeface="Segoe UI"/>
+                <a:latin typeface="Arial"/>
+                <a:cs typeface="Arial"/>
               </a:rPr>
               <a:t>Kết cục chính không khác biệt; tiêu điểm tóm tắt: 'cải thiện sự hài lòng của bệnh nhân'</a:t>
             </a:r>
@@ -18890,25 +18710,19 @@
               <a:spcBef>
                 <a:spcPts val="450"/>
               </a:spcBef>
-              <a:buNone/>
-            </a:pPr>
-            <a:r>
-              <a:rPr lang="en-US" sz="1650" b="1" dirty="0">
-                <a:solidFill>
-                  <a:srgbClr val="6C3483"/>
-                </a:solidFill>
-                <a:latin typeface="Segoe UI"/>
-                <a:cs typeface="Segoe UI"/>
-              </a:rPr>
-              <a:t>4.  </a:t>
-            </a:r>
+              <a:buClr>
+                <a:srgbClr val="6C3483"/>
+              </a:buClr>
+              <a:buFont typeface="Arial"/>
+              <a:buChar char="•"/>
+            </a:pPr>
             <a:r>
               <a:rPr lang="en-US" sz="1650" dirty="0">
                 <a:solidFill>
                   <a:srgbClr val="000000"/>
                 </a:solidFill>
-                <a:latin typeface="Segoe UI"/>
-                <a:cs typeface="Segoe UI"/>
+                <a:latin typeface="Arial"/>
+                <a:cs typeface="Arial"/>
               </a:rPr>
               <a:t>'Tử vong giảm từ 30% xuống 22% sau quy trình mới' (không có nhóm chứng)</a:t>
             </a:r>
@@ -18954,8 +18768,8 @@
                 <a:solidFill>
                   <a:srgbClr val="6C3483"/>
                 </a:solidFill>
-                <a:latin typeface="Segoe UI"/>
-                <a:cs typeface="Segoe UI"/>
+                <a:latin typeface="Arial"/>
+                <a:cs typeface="Arial"/>
               </a:rPr>
               <a:t>SẢN PHẨM   </a:t>
             </a:r>
@@ -18964,8 +18778,8 @@
                 <a:solidFill>
                   <a:srgbClr val="000000"/>
                 </a:solidFill>
-                <a:latin typeface="Segoe UI"/>
-                <a:cs typeface="Segoe UI"/>
+                <a:latin typeface="Arial"/>
+                <a:cs typeface="Arial"/>
               </a:rPr>
               <a:t>Mỗi câu: thổi phồng ở đâu, và bạn viết lại thế nào?</a:t>
             </a:r>
@@ -19002,7 +18816,7 @@
                     <a:lumMod val="50000"/>
                   </a:schemeClr>
                 </a:solidFill>
-                <a:latin typeface="Verdana"/>
+                <a:latin typeface="Arial"/>
               </a:rPr>
               <a:t>Neudata | #ClearDataClearImpact</a:t>
             </a:r>
@@ -19132,8 +18946,8 @@
                 <a:solidFill>
                   <a:srgbClr val="0D7377"/>
                 </a:solidFill>
-                <a:latin typeface="Segoe UI"/>
-                <a:cs typeface="Segoe UI"/>
+                <a:latin typeface="Arial"/>
+                <a:cs typeface="Arial"/>
               </a:rPr>
               <a:t>Đến lượt bạn: đọc tóm tắt Bài báo 1</a:t>
             </a:r>
@@ -19203,8 +19017,8 @@
                 <a:solidFill>
                   <a:srgbClr val="FFFFFF"/>
                 </a:solidFill>
-                <a:latin typeface="Segoe UI"/>
-                <a:cs typeface="Segoe UI"/>
+                <a:latin typeface="Arial"/>
+                <a:cs typeface="Arial"/>
               </a:rPr>
               <a:t>BÀI TẬP CÁ NHÂN   |   12 phút</a:t>
             </a:r>
@@ -19241,25 +19055,19 @@
               <a:spcBef>
                 <a:spcPts val="450"/>
               </a:spcBef>
-              <a:buNone/>
-            </a:pPr>
-            <a:r>
-              <a:rPr lang="en-US" sz="1650" b="1" dirty="0">
-                <a:solidFill>
-                  <a:srgbClr val="0B376C"/>
-                </a:solidFill>
-                <a:latin typeface="Segoe UI"/>
-                <a:cs typeface="Segoe UI"/>
-              </a:rPr>
-              <a:t>1.  </a:t>
-            </a:r>
+              <a:buClr>
+                <a:srgbClr val="0B376C"/>
+              </a:buClr>
+              <a:buFont typeface="Arial"/>
+              <a:buChar char="•"/>
+            </a:pPr>
             <a:r>
               <a:rPr lang="en-US" sz="1650" dirty="0">
                 <a:solidFill>
                   <a:srgbClr val="000000"/>
                 </a:solidFill>
-                <a:latin typeface="Segoe UI"/>
-                <a:cs typeface="Segoe UI"/>
+                <a:latin typeface="Arial"/>
+                <a:cs typeface="Arial"/>
               </a:rPr>
               <a:t>Lấy phần tóm tắt của Bài báo 1 (Boulet 2024, Crit Care)</a:t>
             </a:r>
@@ -19272,25 +19080,19 @@
               <a:spcBef>
                 <a:spcPts val="450"/>
               </a:spcBef>
-              <a:buNone/>
-            </a:pPr>
-            <a:r>
-              <a:rPr lang="en-US" sz="1650" b="1" dirty="0">
-                <a:solidFill>
-                  <a:srgbClr val="0B376C"/>
-                </a:solidFill>
-                <a:latin typeface="Segoe UI"/>
-                <a:cs typeface="Segoe UI"/>
-              </a:rPr>
-              <a:t>2.  </a:t>
-            </a:r>
+              <a:buClr>
+                <a:srgbClr val="0B376C"/>
+              </a:buClr>
+              <a:buFont typeface="Arial"/>
+              <a:buChar char="•"/>
+            </a:pPr>
             <a:r>
               <a:rPr lang="en-US" sz="1650" dirty="0">
                 <a:solidFill>
                   <a:srgbClr val="000000"/>
                 </a:solidFill>
-                <a:latin typeface="Segoe UI"/>
-                <a:cs typeface="Segoe UI"/>
+                <a:latin typeface="Arial"/>
+                <a:cs typeface="Arial"/>
               </a:rPr>
               <a:t>Điền bảng đọc (Bài tập 3): thiết kế, P, I vs C</a:t>
             </a:r>
@@ -19303,25 +19105,19 @@
               <a:spcBef>
                 <a:spcPts val="450"/>
               </a:spcBef>
-              <a:buNone/>
-            </a:pPr>
-            <a:r>
-              <a:rPr lang="en-US" sz="1650" b="1" dirty="0">
-                <a:solidFill>
-                  <a:srgbClr val="0B376C"/>
-                </a:solidFill>
-                <a:latin typeface="Segoe UI"/>
-                <a:cs typeface="Segoe UI"/>
-              </a:rPr>
-              <a:t>3.  </a:t>
-            </a:r>
+              <a:buClr>
+                <a:srgbClr val="0B376C"/>
+              </a:buClr>
+              <a:buFont typeface="Arial"/>
+              <a:buChar char="•"/>
+            </a:pPr>
             <a:r>
               <a:rPr lang="en-US" sz="1650" dirty="0">
                 <a:solidFill>
                   <a:srgbClr val="000000"/>
                 </a:solidFill>
-                <a:latin typeface="Segoe UI"/>
-                <a:cs typeface="Segoe UI"/>
+                <a:latin typeface="Arial"/>
+                <a:cs typeface="Arial"/>
               </a:rPr>
               <a:t>Kết cục chính, số sàng lọc và số phân tích</a:t>
             </a:r>
@@ -19334,25 +19130,19 @@
               <a:spcBef>
                 <a:spcPts val="450"/>
               </a:spcBef>
-              <a:buNone/>
-            </a:pPr>
-            <a:r>
-              <a:rPr lang="en-US" sz="1650" b="1" dirty="0">
-                <a:solidFill>
-                  <a:srgbClr val="0B376C"/>
-                </a:solidFill>
-                <a:latin typeface="Segoe UI"/>
-                <a:cs typeface="Segoe UI"/>
-              </a:rPr>
-              <a:t>4.  </a:t>
-            </a:r>
+              <a:buClr>
+                <a:srgbClr val="0B376C"/>
+              </a:buClr>
+              <a:buFont typeface="Arial"/>
+              <a:buChar char="•"/>
+            </a:pPr>
             <a:r>
               <a:rPr lang="en-US" sz="1650" dirty="0">
                 <a:solidFill>
                   <a:srgbClr val="000000"/>
                 </a:solidFill>
-                <a:latin typeface="Segoe UI"/>
-                <a:cs typeface="Segoe UI"/>
+                <a:latin typeface="Arial"/>
+                <a:cs typeface="Arial"/>
               </a:rPr>
               <a:t>Kết quả chính kèm KTC 95% và giá trị p</a:t>
             </a:r>
@@ -19365,25 +19155,19 @@
               <a:spcBef>
                 <a:spcPts val="450"/>
               </a:spcBef>
-              <a:buNone/>
-            </a:pPr>
-            <a:r>
-              <a:rPr lang="en-US" sz="1650" b="1" dirty="0">
-                <a:solidFill>
-                  <a:srgbClr val="0B376C"/>
-                </a:solidFill>
-                <a:latin typeface="Segoe UI"/>
-                <a:cs typeface="Segoe UI"/>
-              </a:rPr>
-              <a:t>5.  </a:t>
-            </a:r>
+              <a:buClr>
+                <a:srgbClr val="0B376C"/>
+              </a:buClr>
+              <a:buFont typeface="Arial"/>
+              <a:buChar char="•"/>
+            </a:pPr>
             <a:r>
               <a:rPr lang="en-US" sz="1650" dirty="0">
                 <a:solidFill>
                   <a:srgbClr val="000000"/>
                 </a:solidFill>
-                <a:latin typeface="Segoe UI"/>
-                <a:cs typeface="Segoe UI"/>
+                <a:latin typeface="Arial"/>
+                <a:cs typeface="Arial"/>
               </a:rPr>
               <a:t>Kết luận có khớp với kết quả? Có thổi phồng không?</a:t>
             </a:r>
@@ -19396,25 +19180,19 @@
               <a:spcBef>
                 <a:spcPts val="450"/>
               </a:spcBef>
-              <a:buNone/>
-            </a:pPr>
-            <a:r>
-              <a:rPr lang="en-US" sz="1650" b="1" dirty="0">
-                <a:solidFill>
-                  <a:srgbClr val="0B376C"/>
-                </a:solidFill>
-                <a:latin typeface="Segoe UI"/>
-                <a:cs typeface="Segoe UI"/>
-              </a:rPr>
-              <a:t>6.  </a:t>
-            </a:r>
+              <a:buClr>
+                <a:srgbClr val="0B376C"/>
+              </a:buClr>
+              <a:buFont typeface="Arial"/>
+              <a:buChar char="•"/>
+            </a:pPr>
             <a:r>
               <a:rPr lang="en-US" sz="1650" dirty="0">
                 <a:solidFill>
                   <a:srgbClr val="000000"/>
                 </a:solidFill>
-                <a:latin typeface="Segoe UI"/>
-                <a:cs typeface="Segoe UI"/>
+                <a:latin typeface="Arial"/>
+                <a:cs typeface="Arial"/>
               </a:rPr>
               <a:t>So sánh bảng của bạn với người bên cạnh</a:t>
             </a:r>
@@ -19458,8 +19236,8 @@
                 <a:solidFill>
                   <a:srgbClr val="0B376C"/>
                 </a:solidFill>
-                <a:latin typeface="Segoe UI"/>
-                <a:cs typeface="Segoe UI"/>
+                <a:latin typeface="Arial"/>
+                <a:cs typeface="Arial"/>
               </a:rPr>
               <a:t>Thời gian</a:t>
             </a:r>
@@ -19479,8 +19257,8 @@
                 <a:solidFill>
                   <a:srgbClr val="000000"/>
                 </a:solidFill>
-                <a:latin typeface="Segoe UI"/>
-                <a:cs typeface="Segoe UI"/>
+                <a:latin typeface="Arial"/>
+                <a:cs typeface="Arial"/>
               </a:rPr>
               <a:t>8 phút đọc</a:t>
             </a:r>
@@ -19500,8 +19278,8 @@
                 <a:solidFill>
                   <a:srgbClr val="000000"/>
                 </a:solidFill>
-                <a:latin typeface="Segoe UI"/>
-                <a:cs typeface="Segoe UI"/>
+                <a:latin typeface="Arial"/>
+                <a:cs typeface="Arial"/>
               </a:rPr>
               <a:t>4 phút so sánh</a:t>
             </a:r>
@@ -19547,8 +19325,8 @@
                 <a:solidFill>
                   <a:srgbClr val="0B376C"/>
                 </a:solidFill>
-                <a:latin typeface="Segoe UI"/>
-                <a:cs typeface="Segoe UI"/>
+                <a:latin typeface="Arial"/>
+                <a:cs typeface="Arial"/>
               </a:rPr>
               <a:t>SẢN PHẨM   </a:t>
             </a:r>
@@ -19557,8 +19335,8 @@
                 <a:solidFill>
                   <a:srgbClr val="000000"/>
                 </a:solidFill>
-                <a:latin typeface="Segoe UI"/>
-                <a:cs typeface="Segoe UI"/>
+                <a:latin typeface="Arial"/>
+                <a:cs typeface="Arial"/>
               </a:rPr>
               <a:t>Một bảng đọc tóm tắt đã điền đủ</a:t>
             </a:r>
@@ -19595,7 +19373,7 @@
                     <a:lumMod val="50000"/>
                   </a:schemeClr>
                 </a:solidFill>
-                <a:latin typeface="Verdana"/>
+                <a:latin typeface="Arial"/>
               </a:rPr>
               <a:t>Neudata | #ClearDataClearImpact</a:t>
             </a:r>
@@ -19725,8 +19503,8 @@
                 <a:solidFill>
                   <a:srgbClr val="0D7377"/>
                 </a:solidFill>
-                <a:latin typeface="Segoe UI"/>
-                <a:cs typeface="Segoe UI"/>
+                <a:latin typeface="Arial"/>
+                <a:cs typeface="Arial"/>
               </a:rPr>
               <a:t>Tóm tắt Bài báo 1: đáp án</a:t>
             </a:r>
@@ -19822,8 +19600,8 @@
                 <a:solidFill>
                   <a:srgbClr val="FFFFFF"/>
                 </a:solidFill>
-                <a:latin typeface="Segoe UI"/>
-                <a:cs typeface="Segoe UI"/>
+                <a:latin typeface="Arial"/>
+                <a:cs typeface="Arial"/>
               </a:rPr>
               <a:t>THÔNG ĐIỆP CHÍNH   </a:t>
             </a:r>
@@ -19832,8 +19610,8 @@
                 <a:solidFill>
                   <a:srgbClr val="FFFFFF"/>
                 </a:solidFill>
-                <a:latin typeface="Segoe UI"/>
-                <a:cs typeface="Segoe UI"/>
+                <a:latin typeface="Arial"/>
+                <a:cs typeface="Arial"/>
               </a:rPr>
               <a:t>Kết cục chính là cân bằng dịch, không phải tử vong. Hãy đọc đúng điều nghiên cứu đã đo.</a:t>
             </a:r>
@@ -19870,7 +19648,7 @@
                     <a:lumMod val="50000"/>
                   </a:schemeClr>
                 </a:solidFill>
-                <a:latin typeface="Verdana"/>
+                <a:latin typeface="Arial"/>
               </a:rPr>
               <a:t>Neudata | #ClearDataClearImpact</a:t>
             </a:r>
@@ -20000,8 +19778,8 @@
                 <a:solidFill>
                   <a:srgbClr val="0D7377"/>
                 </a:solidFill>
-                <a:latin typeface="Segoe UI"/>
-                <a:cs typeface="Segoe UI"/>
+                <a:latin typeface="Arial"/>
+                <a:cs typeface="Arial"/>
               </a:rPr>
               <a:t>2.4  Từ y văn đến phần đặt vấn đề</a:t>
             </a:r>
@@ -20070,8 +19848,8 @@
                 <a:solidFill>
                   <a:srgbClr val="0D7377"/>
                 </a:solidFill>
-                <a:latin typeface="Segoe UI"/>
-                <a:cs typeface="Segoe UI"/>
+                <a:latin typeface="Arial"/>
+                <a:cs typeface="Arial"/>
               </a:rPr>
               <a:t>Các bài báo bạn đọc trở thành trang đầu tiên của đề cương.</a:t>
             </a:r>
@@ -20088,8 +19866,8 @@
                 <a:solidFill>
                   <a:srgbClr val="595959"/>
                 </a:solidFill>
-                <a:latin typeface="Segoe UI"/>
-                <a:cs typeface="Segoe UI"/>
+                <a:latin typeface="Arial"/>
+                <a:cs typeface="Arial"/>
               </a:rPr>
               <a:t>15 phút: bảng ma trận tài liệu, phễu đặt vấn đề, một đoạn đặt vấn đề mẫu, tên đề tài tạm và từ khóa</a:t>
             </a:r>
@@ -20126,7 +19904,7 @@
                     <a:lumMod val="50000"/>
                   </a:schemeClr>
                 </a:solidFill>
-                <a:latin typeface="Verdana"/>
+                <a:latin typeface="Arial"/>
               </a:rPr>
               <a:t>Neudata | #ClearDataClearImpact</a:t>
             </a:r>
@@ -20256,8 +20034,8 @@
                 <a:solidFill>
                   <a:srgbClr val="0D7377"/>
                 </a:solidFill>
-                <a:latin typeface="Segoe UI"/>
-                <a:cs typeface="Segoe UI"/>
+                <a:latin typeface="Arial"/>
+                <a:cs typeface="Arial"/>
               </a:rPr>
               <a:t>Phiếu tổng quan tài liệu</a:t>
             </a:r>
@@ -20353,8 +20131,8 @@
                 <a:solidFill>
                   <a:srgbClr val="FFFFFF"/>
                 </a:solidFill>
-                <a:latin typeface="Segoe UI"/>
-                <a:cs typeface="Segoe UI"/>
+                <a:latin typeface="Arial"/>
+                <a:cs typeface="Arial"/>
               </a:rPr>
               <a:t>THÔNG ĐIỆP CHÍNH   </a:t>
             </a:r>
@@ -20363,8 +20141,8 @@
                 <a:solidFill>
                   <a:srgbClr val="FFFFFF"/>
                 </a:solidFill>
-                <a:latin typeface="Segoe UI"/>
-                <a:cs typeface="Segoe UI"/>
+                <a:latin typeface="Arial"/>
+                <a:cs typeface="Arial"/>
               </a:rPr>
               <a:t>Mỗi bài một dòng: hôm nay 5 dòng, mọi bài cùng các cột.</a:t>
             </a:r>
@@ -20401,7 +20179,7 @@
                     <a:lumMod val="50000"/>
                   </a:schemeClr>
                 </a:solidFill>
-                <a:latin typeface="Verdana"/>
+                <a:latin typeface="Arial"/>
               </a:rPr>
               <a:t>Neudata | #ClearDataClearImpact</a:t>
             </a:r>
@@ -20531,8 +20309,8 @@
                 <a:solidFill>
                   <a:srgbClr val="0D7377"/>
                 </a:solidFill>
-                <a:latin typeface="Segoe UI"/>
-                <a:cs typeface="Segoe UI"/>
+                <a:latin typeface="Arial"/>
+                <a:cs typeface="Arial"/>
               </a:rPr>
               <a:t>Từ y văn đến phần Đặt vấn đề</a:t>
             </a:r>
@@ -20628,8 +20406,8 @@
                 <a:solidFill>
                   <a:srgbClr val="FFFFFF"/>
                 </a:solidFill>
-                <a:latin typeface="Segoe UI"/>
-                <a:cs typeface="Segoe UI"/>
+                <a:latin typeface="Arial"/>
+                <a:cs typeface="Arial"/>
               </a:rPr>
               <a:t>THÔNG ĐIỆP CHÍNH   </a:t>
             </a:r>
@@ -20638,8 +20416,8 @@
                 <a:solidFill>
                   <a:srgbClr val="FFFFFF"/>
                 </a:solidFill>
-                <a:latin typeface="Segoe UI"/>
-                <a:cs typeface="Segoe UI"/>
+                <a:latin typeface="Arial"/>
+                <a:cs typeface="Arial"/>
               </a:rPr>
               <a:t>Đã biết, chưa biết, vì sao ở đây: rồi câu hỏi tự nhiên xuất hiện.</a:t>
             </a:r>
@@ -20676,7 +20454,7 @@
                     <a:lumMod val="50000"/>
                   </a:schemeClr>
                 </a:solidFill>
-                <a:latin typeface="Verdana"/>
+                <a:latin typeface="Arial"/>
               </a:rPr>
               <a:t>Neudata | #ClearDataClearImpact</a:t>
             </a:r>
@@ -20806,8 +20584,8 @@
                 <a:solidFill>
                   <a:srgbClr val="0D7377"/>
                 </a:solidFill>
-                <a:latin typeface="Segoe UI"/>
-                <a:cs typeface="Segoe UI"/>
+                <a:latin typeface="Arial"/>
+                <a:cs typeface="Arial"/>
               </a:rPr>
               <a:t>Một đoạn đặt vấn đề mẫu</a:t>
             </a:r>
@@ -20903,8 +20681,8 @@
                 <a:solidFill>
                   <a:srgbClr val="FFFFFF"/>
                 </a:solidFill>
-                <a:latin typeface="Segoe UI"/>
-                <a:cs typeface="Segoe UI"/>
+                <a:latin typeface="Arial"/>
+                <a:cs typeface="Arial"/>
               </a:rPr>
               <a:t>THÔNG ĐIỆP CHÍNH   </a:t>
             </a:r>
@@ -20913,8 +20691,8 @@
                 <a:solidFill>
                   <a:srgbClr val="FFFFFF"/>
                 </a:solidFill>
-                <a:latin typeface="Segoe UI"/>
-                <a:cs typeface="Segoe UI"/>
+                <a:latin typeface="Arial"/>
+                <a:cs typeface="Arial"/>
               </a:rPr>
               <a:t>Ba đoạn ngắn, mỗi đoạn một nhiệm vụ, và tài liệu tham khảo trong ngoặc.</a:t>
             </a:r>
@@ -20951,7 +20729,7 @@
                     <a:lumMod val="50000"/>
                   </a:schemeClr>
                 </a:solidFill>
-                <a:latin typeface="Verdana"/>
+                <a:latin typeface="Arial"/>
               </a:rPr>
               <a:t>Neudata | #ClearDataClearImpact</a:t>
             </a:r>
@@ -21081,8 +20859,8 @@
                 <a:solidFill>
                   <a:srgbClr val="0D7377"/>
                 </a:solidFill>
-                <a:latin typeface="Segoe UI"/>
-                <a:cs typeface="Segoe UI"/>
+                <a:latin typeface="Arial"/>
+                <a:cs typeface="Arial"/>
               </a:rPr>
               <a:t>Tên đề tài tạm và từ khóa từ PICO</a:t>
             </a:r>
@@ -21178,8 +20956,8 @@
                 <a:solidFill>
                   <a:srgbClr val="FFFFFF"/>
                 </a:solidFill>
-                <a:latin typeface="Segoe UI"/>
-                <a:cs typeface="Segoe UI"/>
+                <a:latin typeface="Arial"/>
+                <a:cs typeface="Arial"/>
               </a:rPr>
               <a:t>THÔNG ĐIỆP CHÍNH   </a:t>
             </a:r>
@@ -21188,8 +20966,8 @@
                 <a:solidFill>
                   <a:srgbClr val="FFFFFF"/>
                 </a:solidFill>
-                <a:latin typeface="Segoe UI"/>
-                <a:cs typeface="Segoe UI"/>
+                <a:latin typeface="Arial"/>
+                <a:cs typeface="Arial"/>
               </a:rPr>
               <a:t>PICO đã chứa sẵn tên đề tài: thêm thiết kế và giữ ngắn gọn.</a:t>
             </a:r>
@@ -21226,7 +21004,7 @@
                     <a:lumMod val="50000"/>
                   </a:schemeClr>
                 </a:solidFill>
-                <a:latin typeface="Verdana"/>
+                <a:latin typeface="Arial"/>
               </a:rPr>
               <a:t>Neudata | #ClearDataClearImpact</a:t>
             </a:r>
@@ -21356,8 +21134,8 @@
                 <a:solidFill>
                   <a:srgbClr val="0D7377"/>
                 </a:solidFill>
-                <a:latin typeface="Segoe UI"/>
-                <a:cs typeface="Segoe UI"/>
+                <a:latin typeface="Arial"/>
+                <a:cs typeface="Arial"/>
               </a:rPr>
               <a:t>Xây dựng đề cương 2</a:t>
             </a:r>
@@ -21426,8 +21204,8 @@
                 <a:solidFill>
                   <a:srgbClr val="0D7377"/>
                 </a:solidFill>
-                <a:latin typeface="Segoe UI"/>
-                <a:cs typeface="Segoe UI"/>
+                <a:latin typeface="Arial"/>
+                <a:cs typeface="Arial"/>
               </a:rPr>
               <a:t>Giờ hãy tìm bằng chứng cho nhóm: một chuỗi tìm kiếm, năm bài báo, một đoạn đặt vấn đề, một tên đề tài.</a:t>
             </a:r>
@@ -21444,8 +21222,8 @@
                 <a:solidFill>
                   <a:srgbClr val="595959"/>
                 </a:solidFill>
-                <a:latin typeface="Segoe UI"/>
-                <a:cs typeface="Segoe UI"/>
+                <a:latin typeface="Arial"/>
+                <a:cs typeface="Arial"/>
               </a:rPr>
               <a:t>35 phút làm việc nhóm để hoàn thành Phần 1 của đề cương nghiên cứu</a:t>
             </a:r>
@@ -21482,7 +21260,7 @@
                     <a:lumMod val="50000"/>
                   </a:schemeClr>
                 </a:solidFill>
-                <a:latin typeface="Verdana"/>
+                <a:latin typeface="Arial"/>
               </a:rPr>
               <a:t>Neudata | #ClearDataClearImpact</a:t>
             </a:r>
@@ -21612,8 +21390,8 @@
                 <a:solidFill>
                   <a:srgbClr val="0D7377"/>
                 </a:solidFill>
-                <a:latin typeface="Segoe UI"/>
-                <a:cs typeface="Segoe UI"/>
+                <a:latin typeface="Arial"/>
+                <a:cs typeface="Arial"/>
               </a:rPr>
               <a:t>Xây dựng đề cương 2: bằng chứng của nhóm</a:t>
             </a:r>
@@ -21683,8 +21461,8 @@
                 <a:solidFill>
                   <a:srgbClr val="FFFFFF"/>
                 </a:solidFill>
-                <a:latin typeface="Segoe UI"/>
-                <a:cs typeface="Segoe UI"/>
+                <a:latin typeface="Arial"/>
+                <a:cs typeface="Arial"/>
               </a:rPr>
               <a:t>XÂY DỰNG ĐỀ CƯƠNG   |   33 phút</a:t>
             </a:r>
@@ -21721,25 +21499,19 @@
               <a:spcBef>
                 <a:spcPts val="450"/>
               </a:spcBef>
-              <a:buNone/>
-            </a:pPr>
-            <a:r>
-              <a:rPr lang="en-US" sz="1650" b="1" dirty="0">
-                <a:solidFill>
-                  <a:srgbClr val="055F56"/>
-                </a:solidFill>
-                <a:latin typeface="Segoe UI"/>
-                <a:cs typeface="Segoe UI"/>
-              </a:rPr>
-              <a:t>1.  </a:t>
-            </a:r>
+              <a:buClr>
+                <a:srgbClr val="055F56"/>
+              </a:buClr>
+              <a:buFont typeface="Arial"/>
+              <a:buChar char="•"/>
+            </a:pPr>
             <a:r>
               <a:rPr lang="en-US" sz="1650" dirty="0">
                 <a:solidFill>
                   <a:srgbClr val="000000"/>
                 </a:solidFill>
-                <a:latin typeface="Segoe UI"/>
-                <a:cs typeface="Segoe UI"/>
+                <a:latin typeface="Arial"/>
+                <a:cs typeface="Arial"/>
               </a:rPr>
               <a:t>Chạy chuỗi tìm kiếm trên PubMed; ghi ngày và số kết quả</a:t>
             </a:r>
@@ -21752,25 +21524,19 @@
               <a:spcBef>
                 <a:spcPts val="450"/>
               </a:spcBef>
-              <a:buNone/>
-            </a:pPr>
-            <a:r>
-              <a:rPr lang="en-US" sz="1650" b="1" dirty="0">
-                <a:solidFill>
-                  <a:srgbClr val="055F56"/>
-                </a:solidFill>
-                <a:latin typeface="Segoe UI"/>
-                <a:cs typeface="Segoe UI"/>
-              </a:rPr>
-              <a:t>2.  </a:t>
-            </a:r>
+              <a:buClr>
+                <a:srgbClr val="055F56"/>
+              </a:buClr>
+              <a:buFont typeface="Arial"/>
+              <a:buChar char="•"/>
+            </a:pPr>
             <a:r>
               <a:rPr lang="en-US" sz="1650" dirty="0">
                 <a:solidFill>
                   <a:srgbClr val="000000"/>
                 </a:solidFill>
-                <a:latin typeface="Segoe UI"/>
-                <a:cs typeface="Segoe UI"/>
+                <a:latin typeface="Arial"/>
+                <a:cs typeface="Arial"/>
               </a:rPr>
               <a:t>Sàng lọc tiêu đề và tóm tắt; chọn 5 bài chính; xuất sang Zotero</a:t>
             </a:r>
@@ -21783,25 +21549,19 @@
               <a:spcBef>
                 <a:spcPts val="450"/>
               </a:spcBef>
-              <a:buNone/>
-            </a:pPr>
-            <a:r>
-              <a:rPr lang="en-US" sz="1650" b="1" dirty="0">
-                <a:solidFill>
-                  <a:srgbClr val="055F56"/>
-                </a:solidFill>
-                <a:latin typeface="Segoe UI"/>
-                <a:cs typeface="Segoe UI"/>
-              </a:rPr>
-              <a:t>3.  </a:t>
-            </a:r>
+              <a:buClr>
+                <a:srgbClr val="055F56"/>
+              </a:buClr>
+              <a:buFont typeface="Arial"/>
+              <a:buChar char="•"/>
+            </a:pPr>
             <a:r>
               <a:rPr lang="en-US" sz="1650" dirty="0">
                 <a:solidFill>
                   <a:srgbClr val="000000"/>
                 </a:solidFill>
-                <a:latin typeface="Segoe UI"/>
-                <a:cs typeface="Segoe UI"/>
+                <a:latin typeface="Arial"/>
+                <a:cs typeface="Arial"/>
               </a:rPr>
               <a:t>Điền mỗi bài một dòng trong bảng ma trận tài liệu</a:t>
             </a:r>
@@ -21814,25 +21574,19 @@
               <a:spcBef>
                 <a:spcPts val="450"/>
               </a:spcBef>
-              <a:buNone/>
-            </a:pPr>
-            <a:r>
-              <a:rPr lang="en-US" sz="1650" b="1" dirty="0">
-                <a:solidFill>
-                  <a:srgbClr val="055F56"/>
-                </a:solidFill>
-                <a:latin typeface="Segoe UI"/>
-                <a:cs typeface="Segoe UI"/>
-              </a:rPr>
-              <a:t>4.  </a:t>
-            </a:r>
+              <a:buClr>
+                <a:srgbClr val="055F56"/>
+              </a:buClr>
+              <a:buFont typeface="Arial"/>
+              <a:buChar char="•"/>
+            </a:pPr>
             <a:r>
               <a:rPr lang="en-US" sz="1650" dirty="0">
                 <a:solidFill>
                   <a:srgbClr val="000000"/>
                 </a:solidFill>
-                <a:latin typeface="Segoe UI"/>
-                <a:cs typeface="Segoe UI"/>
+                <a:latin typeface="Arial"/>
+                <a:cs typeface="Arial"/>
               </a:rPr>
               <a:t>Viết nháp đặt vấn đề: đã biết, chưa biết, vì sao ở đây</a:t>
             </a:r>
@@ -21845,25 +21599,19 @@
               <a:spcBef>
                 <a:spcPts val="450"/>
               </a:spcBef>
-              <a:buNone/>
-            </a:pPr>
-            <a:r>
-              <a:rPr lang="en-US" sz="1650" b="1" dirty="0">
-                <a:solidFill>
-                  <a:srgbClr val="055F56"/>
-                </a:solidFill>
-                <a:latin typeface="Segoe UI"/>
-                <a:cs typeface="Segoe UI"/>
-              </a:rPr>
-              <a:t>5.  </a:t>
-            </a:r>
+              <a:buClr>
+                <a:srgbClr val="055F56"/>
+              </a:buClr>
+              <a:buFont typeface="Arial"/>
+              <a:buChar char="•"/>
+            </a:pPr>
             <a:r>
               <a:rPr lang="en-US" sz="1650" dirty="0">
                 <a:solidFill>
                   <a:srgbClr val="000000"/>
                 </a:solidFill>
-                <a:latin typeface="Segoe UI"/>
-                <a:cs typeface="Segoe UI"/>
+                <a:latin typeface="Arial"/>
+                <a:cs typeface="Arial"/>
               </a:rPr>
               <a:t>Tên đề tài tạm (10-16 từ) + 3-6 từ khóa</a:t>
             </a:r>
@@ -21876,25 +21624,19 @@
               <a:spcBef>
                 <a:spcPts val="450"/>
               </a:spcBef>
-              <a:buNone/>
-            </a:pPr>
-            <a:r>
-              <a:rPr lang="en-US" sz="1650" b="1" dirty="0">
-                <a:solidFill>
-                  <a:srgbClr val="055F56"/>
-                </a:solidFill>
-                <a:latin typeface="Segoe UI"/>
-                <a:cs typeface="Segoe UI"/>
-              </a:rPr>
-              <a:t>6.  </a:t>
-            </a:r>
+              <a:buClr>
+                <a:srgbClr val="055F56"/>
+              </a:buClr>
+              <a:buFont typeface="Arial"/>
+              <a:buChar char="•"/>
+            </a:pPr>
             <a:r>
               <a:rPr lang="en-US" sz="1650" dirty="0">
                 <a:solidFill>
                   <a:srgbClr val="000000"/>
                 </a:solidFill>
-                <a:latin typeface="Segoe UI"/>
-                <a:cs typeface="Segoe UI"/>
+                <a:latin typeface="Arial"/>
+                <a:cs typeface="Arial"/>
               </a:rPr>
               <a:t>Một nhóm đọc to tên đề tài và khoảng trống</a:t>
             </a:r>
@@ -21938,8 +21680,8 @@
                 <a:solidFill>
                   <a:srgbClr val="055F56"/>
                 </a:solidFill>
-                <a:latin typeface="Segoe UI"/>
-                <a:cs typeface="Segoe UI"/>
+                <a:latin typeface="Arial"/>
+                <a:cs typeface="Arial"/>
               </a:rPr>
               <a:t>Thời gian</a:t>
             </a:r>
@@ -21959,8 +21701,8 @@
                 <a:solidFill>
                   <a:srgbClr val="000000"/>
                 </a:solidFill>
-                <a:latin typeface="Segoe UI"/>
-                <a:cs typeface="Segoe UI"/>
+                <a:latin typeface="Arial"/>
+                <a:cs typeface="Arial"/>
               </a:rPr>
               <a:t>0-8 phút: chạy tìm kiếm</a:t>
             </a:r>
@@ -21980,8 +21722,8 @@
                 <a:solidFill>
                   <a:srgbClr val="000000"/>
                 </a:solidFill>
-                <a:latin typeface="Segoe UI"/>
-                <a:cs typeface="Segoe UI"/>
+                <a:latin typeface="Arial"/>
+                <a:cs typeface="Arial"/>
               </a:rPr>
               <a:t>8-16: sàng lọc + chọn 5 bài</a:t>
             </a:r>
@@ -22001,8 +21743,8 @@
                 <a:solidFill>
                   <a:srgbClr val="000000"/>
                 </a:solidFill>
-                <a:latin typeface="Segoe UI"/>
-                <a:cs typeface="Segoe UI"/>
+                <a:latin typeface="Arial"/>
+                <a:cs typeface="Arial"/>
               </a:rPr>
               <a:t>16-22: các dòng ma trận</a:t>
             </a:r>
@@ -22022,8 +21764,8 @@
                 <a:solidFill>
                   <a:srgbClr val="000000"/>
                 </a:solidFill>
-                <a:latin typeface="Segoe UI"/>
-                <a:cs typeface="Segoe UI"/>
+                <a:latin typeface="Arial"/>
+                <a:cs typeface="Arial"/>
               </a:rPr>
               <a:t>22-28: đặt vấn đề</a:t>
             </a:r>
@@ -22043,8 +21785,8 @@
                 <a:solidFill>
                   <a:srgbClr val="000000"/>
                 </a:solidFill>
-                <a:latin typeface="Segoe UI"/>
-                <a:cs typeface="Segoe UI"/>
+                <a:latin typeface="Arial"/>
+                <a:cs typeface="Arial"/>
               </a:rPr>
               <a:t>28-31: tên đề tài + từ khóa</a:t>
             </a:r>
@@ -22064,8 +21806,8 @@
                 <a:solidFill>
                   <a:srgbClr val="000000"/>
                 </a:solidFill>
-                <a:latin typeface="Segoe UI"/>
-                <a:cs typeface="Segoe UI"/>
+                <a:latin typeface="Arial"/>
+                <a:cs typeface="Arial"/>
               </a:rPr>
               <a:t>31-33: 1 nhóm đọc to</a:t>
             </a:r>
@@ -22111,8 +21853,8 @@
                 <a:solidFill>
                   <a:srgbClr val="055F56"/>
                 </a:solidFill>
-                <a:latin typeface="Segoe UI"/>
-                <a:cs typeface="Segoe UI"/>
+                <a:latin typeface="Arial"/>
+                <a:cs typeface="Arial"/>
               </a:rPr>
               <a:t>SẢN PHẨM   </a:t>
             </a:r>
@@ -22121,8 +21863,8 @@
                 <a:solidFill>
                   <a:srgbClr val="000000"/>
                 </a:solidFill>
-                <a:latin typeface="Segoe UI"/>
-                <a:cs typeface="Segoe UI"/>
+                <a:latin typeface="Arial"/>
+                <a:cs typeface="Arial"/>
               </a:rPr>
               <a:t>Hoàn thành Đề cương Phần 1: tìm kiếm, 5 tài liệu, đặt vấn đề, tên đề tài</a:t>
             </a:r>
@@ -22159,7 +21901,7 @@
                     <a:lumMod val="50000"/>
                   </a:schemeClr>
                 </a:solidFill>
-                <a:latin typeface="Verdana"/>
+                <a:latin typeface="Arial"/>
               </a:rPr>
               <a:t>Neudata | #ClearDataClearImpact</a:t>
             </a:r>
@@ -22289,8 +22031,8 @@
                 <a:solidFill>
                   <a:srgbClr val="0D7377"/>
                 </a:solidFill>
-                <a:latin typeface="Segoe UI"/>
-                <a:cs typeface="Segoe UI"/>
+                <a:latin typeface="Arial"/>
+                <a:cs typeface="Arial"/>
               </a:rPr>
               <a:t>2.1  Tìm bằng chứng</a:t>
             </a:r>
@@ -22359,8 +22101,8 @@
                 <a:solidFill>
                   <a:srgbClr val="0D7377"/>
                 </a:solidFill>
-                <a:latin typeface="Segoe UI"/>
-                <a:cs typeface="Segoe UI"/>
+                <a:latin typeface="Arial"/>
+                <a:cs typeface="Arial"/>
               </a:rPr>
               <a:t>Trước khi nghiên cứu, hãy tìm xem điều gì đã được biết.</a:t>
             </a:r>
@@ -22377,8 +22119,8 @@
                 <a:solidFill>
                   <a:srgbClr val="595959"/>
                 </a:solidFill>
-                <a:latin typeface="Segoe UI"/>
-                <a:cs typeface="Segoe UI"/>
+                <a:latin typeface="Arial"/>
+                <a:cs typeface="Arial"/>
               </a:rPr>
               <a:t>40 phút: phễu tìm kiếm, từ PICO đến khối tìm kiếm, Boolean, MeSH, công cụ tìm kiếm và trình diễn PubMed trực tiếp</a:t>
             </a:r>
@@ -22415,7 +22157,7 @@
                     <a:lumMod val="50000"/>
                   </a:schemeClr>
                 </a:solidFill>
-                <a:latin typeface="Verdana"/>
+                <a:latin typeface="Arial"/>
               </a:rPr>
               <a:t>Neudata | #ClearDataClearImpact</a:t>
             </a:r>
@@ -22545,8 +22287,8 @@
                 <a:solidFill>
                   <a:srgbClr val="0D7377"/>
                 </a:solidFill>
-                <a:latin typeface="Segoe UI"/>
-                <a:cs typeface="Segoe UI"/>
+                <a:latin typeface="Arial"/>
+                <a:cs typeface="Arial"/>
               </a:rPr>
               <a:t>Từ khóa của buổi học</a:t>
             </a:r>
@@ -22613,7 +22355,7 @@
                           <a:solidFill>
                             <a:srgbClr val="FFFFFF"/>
                           </a:solidFill>
-                          <a:latin typeface="Segoe UI"/>
+                          <a:latin typeface="Arial"/>
                         </a:rPr>
                         <a:t>Từ khóa</a:t>
                       </a:r>
@@ -22636,7 +22378,7 @@
                           <a:solidFill>
                             <a:srgbClr val="FFFFFF"/>
                           </a:solidFill>
-                          <a:latin typeface="Segoe UI"/>
+                          <a:latin typeface="Arial"/>
                         </a:rPr>
                         <a:t>Trong một câu</a:t>
                       </a:r>
@@ -22661,7 +22403,7 @@
                           <a:solidFill>
                             <a:srgbClr val="000000"/>
                           </a:solidFill>
-                          <a:latin typeface="Segoe UI"/>
+                          <a:latin typeface="Arial"/>
                         </a:rPr>
                         <a:t>MeSH</a:t>
                       </a:r>
@@ -22684,7 +22426,7 @@
                           <a:solidFill>
                             <a:srgbClr val="000000"/>
                           </a:solidFill>
-                          <a:latin typeface="Segoe UI"/>
+                          <a:latin typeface="Arial"/>
                         </a:rPr>
                         <a:t>Nhãn chung PubMed gán cho nhiều cách viết của một ý</a:t>
                       </a:r>
@@ -22709,7 +22451,7 @@
                           <a:solidFill>
                             <a:srgbClr val="000000"/>
                           </a:solidFill>
-                          <a:latin typeface="Segoe UI"/>
+                          <a:latin typeface="Arial"/>
                         </a:rPr>
                         <a:t>AND / OR / NOT</a:t>
                       </a:r>
@@ -22732,7 +22474,7 @@
                           <a:solidFill>
                             <a:srgbClr val="000000"/>
                           </a:solidFill>
-                          <a:latin typeface="Segoe UI"/>
+                          <a:latin typeface="Arial"/>
                         </a:rPr>
                         <a:t>Thu hẹp / mở rộng / loại bỏ. OR trong khối, AND giữa các khối</a:t>
                       </a:r>
@@ -22757,7 +22499,7 @@
                           <a:solidFill>
                             <a:srgbClr val="000000"/>
                           </a:solidFill>
-                          <a:latin typeface="Segoe UI"/>
+                          <a:latin typeface="Arial"/>
                         </a:rPr>
                         <a:t>Phần mềm quản lý tài liệu</a:t>
                       </a:r>
@@ -22780,7 +22522,7 @@
                           <a:solidFill>
                             <a:srgbClr val="000000"/>
                           </a:solidFill>
-                          <a:latin typeface="Segoe UI"/>
+                          <a:latin typeface="Arial"/>
                         </a:rPr>
                         <a:t>Lưu mỗi bài một lần và định dạng trích dẫn theo mọi kiểu</a:t>
                       </a:r>
@@ -22805,7 +22547,7 @@
                           <a:solidFill>
                             <a:srgbClr val="000000"/>
                           </a:solidFill>
-                          <a:latin typeface="Segoe UI"/>
+                          <a:latin typeface="Arial"/>
                         </a:rPr>
                         <a:t>Viết chắp vá</a:t>
                       </a:r>
@@ -22828,7 +22570,7 @@
                           <a:solidFill>
                             <a:srgbClr val="000000"/>
                           </a:solidFill>
-                          <a:latin typeface="Segoe UI"/>
+                          <a:latin typeface="Arial"/>
                         </a:rPr>
                         <a:t>Chép và đổi vài từ: đạo văn dù có trích dẫn</a:t>
                       </a:r>
@@ -22853,7 +22595,7 @@
                           <a:solidFill>
                             <a:srgbClr val="000000"/>
                           </a:solidFill>
-                          <a:latin typeface="Segoe UI"/>
+                          <a:latin typeface="Arial"/>
                         </a:rPr>
                         <a:t>IMRaD</a:t>
                       </a:r>
@@ -22876,7 +22618,7 @@
                           <a:solidFill>
                             <a:srgbClr val="000000"/>
                           </a:solidFill>
-                          <a:latin typeface="Segoe UI"/>
+                          <a:latin typeface="Arial"/>
                         </a:rPr>
                         <a:t>Đặt vấn đề, Phương pháp, Kết quả và Bàn luận</a:t>
                       </a:r>
@@ -22901,7 +22643,7 @@
                           <a:solidFill>
                             <a:srgbClr val="000000"/>
                           </a:solidFill>
-                          <a:latin typeface="Segoe UI"/>
+                          <a:latin typeface="Arial"/>
                         </a:rPr>
                         <a:t>Thổi phồng (spin)</a:t>
                       </a:r>
@@ -22924,7 +22666,7 @@
                           <a:solidFill>
                             <a:srgbClr val="000000"/>
                           </a:solidFill>
-                          <a:latin typeface="Segoe UI"/>
+                          <a:latin typeface="Arial"/>
                         </a:rPr>
                         <a:t>Lời văn khẳng định nhiều hơn những gì con số cho thấy</a:t>
                       </a:r>
@@ -22971,7 +22713,7 @@
                     <a:lumMod val="50000"/>
                   </a:schemeClr>
                 </a:solidFill>
-                <a:latin typeface="Verdana"/>
+                <a:latin typeface="Arial"/>
               </a:rPr>
               <a:t>Neudata | #ClearDataClearImpact</a:t>
             </a:r>
@@ -23101,8 +22843,8 @@
                 <a:solidFill>
                   <a:srgbClr val="0D7377"/>
                 </a:solidFill>
-                <a:latin typeface="Segoe UI"/>
-                <a:cs typeface="Segoe UI"/>
+                <a:latin typeface="Arial"/>
+                <a:cs typeface="Arial"/>
               </a:rPr>
               <a:t>Ôn tập Buổi 2</a:t>
             </a:r>
@@ -23172,10 +22914,10 @@
                 <a:solidFill>
                   <a:srgbClr val="FFFFFF"/>
                 </a:solidFill>
-                <a:latin typeface="Segoe UI"/>
-                <a:cs typeface="Segoe UI"/>
-              </a:rPr>
-              <a:t>1. Tìm kiếm</a:t>
+                <a:latin typeface="Arial"/>
+                <a:cs typeface="Arial"/>
+              </a:rPr>
+              <a:t>Tìm kiếm</a:t>
             </a:r>
           </a:p>
         </p:txBody>
@@ -23221,8 +22963,8 @@
                 <a:solidFill>
                   <a:srgbClr val="000000"/>
                 </a:solidFill>
-                <a:latin typeface="Segoe UI"/>
-                <a:cs typeface="Segoe UI"/>
+                <a:latin typeface="Arial"/>
+                <a:cs typeface="Arial"/>
               </a:rPr>
               <a:t>Khối PICO, MeSH +</a:t>
             </a:r>
@@ -23242,8 +22984,8 @@
                 <a:solidFill>
                   <a:srgbClr val="000000"/>
                 </a:solidFill>
-                <a:latin typeface="Segoe UI"/>
-                <a:cs typeface="Segoe UI"/>
+                <a:latin typeface="Arial"/>
+                <a:cs typeface="Arial"/>
               </a:rPr>
               <a:t>từ tự do; OR trong khối,</a:t>
             </a:r>
@@ -23263,8 +23005,8 @@
                 <a:solidFill>
                   <a:srgbClr val="000000"/>
                 </a:solidFill>
-                <a:latin typeface="Segoe UI"/>
-                <a:cs typeface="Segoe UI"/>
+                <a:latin typeface="Arial"/>
+                <a:cs typeface="Arial"/>
               </a:rPr>
               <a:t>AND giữa khối; ghi lại</a:t>
             </a:r>
@@ -23306,10 +23048,10 @@
                 <a:solidFill>
                   <a:srgbClr val="FFFFFF"/>
                 </a:solidFill>
-                <a:latin typeface="Segoe UI"/>
-                <a:cs typeface="Segoe UI"/>
-              </a:rPr>
-              <a:t>2. Trích dẫn trung thực</a:t>
+                <a:latin typeface="Arial"/>
+                <a:cs typeface="Arial"/>
+              </a:rPr>
+              <a:t>Trích dẫn trung thực</a:t>
             </a:r>
           </a:p>
         </p:txBody>
@@ -23355,8 +23097,8 @@
                 <a:solidFill>
                   <a:srgbClr val="000000"/>
                 </a:solidFill>
-                <a:latin typeface="Segoe UI"/>
-                <a:cs typeface="Segoe UI"/>
+                <a:latin typeface="Arial"/>
+                <a:cs typeface="Arial"/>
               </a:rPr>
               <a:t>Phần mềm quản lý tài</a:t>
             </a:r>
@@ -23376,8 +23118,8 @@
                 <a:solidFill>
                   <a:srgbClr val="000000"/>
                 </a:solidFill>
-                <a:latin typeface="Segoe UI"/>
-                <a:cs typeface="Segoe UI"/>
+                <a:latin typeface="Arial"/>
+                <a:cs typeface="Arial"/>
               </a:rPr>
               <a:t>liệu từ ngày đầu; lời</a:t>
             </a:r>
@@ -23397,8 +23139,8 @@
                 <a:solidFill>
                   <a:srgbClr val="000000"/>
                 </a:solidFill>
-                <a:latin typeface="Segoe UI"/>
-                <a:cs typeface="Segoe UI"/>
+                <a:latin typeface="Arial"/>
+                <a:cs typeface="Arial"/>
               </a:rPr>
               <a:t>của mình; đọc bài mình trích</a:t>
             </a:r>
@@ -23440,10 +23182,10 @@
                 <a:solidFill>
                   <a:srgbClr val="FFFFFF"/>
                 </a:solidFill>
-                <a:latin typeface="Segoe UI"/>
-                <a:cs typeface="Segoe UI"/>
-              </a:rPr>
-              <a:t>3. Đọc thông minh</a:t>
+                <a:latin typeface="Arial"/>
+                <a:cs typeface="Arial"/>
+              </a:rPr>
+              <a:t>Đọc thông minh</a:t>
             </a:r>
           </a:p>
         </p:txBody>
@@ -23489,8 +23231,8 @@
                 <a:solidFill>
                   <a:srgbClr val="000000"/>
                 </a:solidFill>
-                <a:latin typeface="Segoe UI"/>
-                <a:cs typeface="Segoe UI"/>
+                <a:latin typeface="Arial"/>
+                <a:cs typeface="Arial"/>
               </a:rPr>
               <a:t>Tiêu đề, tóm tắt,</a:t>
             </a:r>
@@ -23510,8 +23252,8 @@
                 <a:solidFill>
                   <a:srgbClr val="000000"/>
                 </a:solidFill>
-                <a:latin typeface="Segoe UI"/>
-                <a:cs typeface="Segoe UI"/>
+                <a:latin typeface="Arial"/>
+                <a:cs typeface="Arial"/>
               </a:rPr>
               <a:t>hình bảng, phương pháp;</a:t>
             </a:r>
@@ -23531,8 +23273,8 @@
                 <a:solidFill>
                   <a:srgbClr val="000000"/>
                 </a:solidFill>
-                <a:latin typeface="Segoe UI"/>
-                <a:cs typeface="Segoe UI"/>
+                <a:latin typeface="Arial"/>
+                <a:cs typeface="Arial"/>
               </a:rPr>
               <a:t>con số trước lời văn</a:t>
             </a:r>
@@ -23576,8 +23318,8 @@
                 <a:solidFill>
                   <a:srgbClr val="FFFFFF"/>
                 </a:solidFill>
-                <a:latin typeface="Segoe UI"/>
-                <a:cs typeface="Segoe UI"/>
+                <a:latin typeface="Arial"/>
+                <a:cs typeface="Arial"/>
               </a:rPr>
               <a:t>THÔNG ĐIỆP CHÍNH   </a:t>
             </a:r>
@@ -23586,8 +23328,8 @@
                 <a:solidFill>
                   <a:srgbClr val="FFFFFF"/>
                 </a:solidFill>
-                <a:latin typeface="Segoe UI"/>
-                <a:cs typeface="Segoe UI"/>
+                <a:latin typeface="Arial"/>
+                <a:cs typeface="Arial"/>
               </a:rPr>
               <a:t>Xong Tuần 1-2: nhóm bạn có câu hỏi, năm bài báo và tên đề tài.</a:t>
             </a:r>
@@ -23624,7 +23366,7 @@
                     <a:lumMod val="50000"/>
                   </a:schemeClr>
                 </a:solidFill>
-                <a:latin typeface="Verdana"/>
+                <a:latin typeface="Arial"/>
               </a:rPr>
               <a:t>Neudata | #ClearDataClearImpact</a:t>
             </a:r>
@@ -23754,8 +23496,8 @@
                 <a:solidFill>
                   <a:srgbClr val="0D7377"/>
                 </a:solidFill>
-                <a:latin typeface="Segoe UI"/>
-                <a:cs typeface="Segoe UI"/>
+                <a:latin typeface="Arial"/>
+                <a:cs typeface="Arial"/>
               </a:rPr>
               <a:t>Câu hỏi cuối buổi</a:t>
             </a:r>
@@ -23825,8 +23567,8 @@
                 <a:solidFill>
                   <a:srgbClr val="FFFFFF"/>
                 </a:solidFill>
-                <a:latin typeface="Segoe UI"/>
-                <a:cs typeface="Segoe UI"/>
+                <a:latin typeface="Arial"/>
+                <a:cs typeface="Arial"/>
               </a:rPr>
               <a:t>CÂU HỎI NHANH   |   2 phút</a:t>
             </a:r>
@@ -23863,25 +23605,19 @@
               <a:spcBef>
                 <a:spcPts val="450"/>
               </a:spcBef>
-              <a:buNone/>
-            </a:pPr>
-            <a:r>
-              <a:rPr lang="en-US" sz="1650" b="1" dirty="0">
-                <a:solidFill>
-                  <a:srgbClr val="6C3483"/>
-                </a:solidFill>
-                <a:latin typeface="Segoe UI"/>
-                <a:cs typeface="Segoe UI"/>
-              </a:rPr>
-              <a:t>1.  </a:t>
-            </a:r>
+              <a:buClr>
+                <a:srgbClr val="6C3483"/>
+              </a:buClr>
+              <a:buFont typeface="Arial"/>
+              <a:buChar char="•"/>
+            </a:pPr>
             <a:r>
               <a:rPr lang="en-US" sz="1650" dirty="0">
                 <a:solidFill>
                   <a:srgbClr val="000000"/>
                 </a:solidFill>
-                <a:latin typeface="Segoe UI"/>
-                <a:cs typeface="Segoe UI"/>
+                <a:latin typeface="Arial"/>
+                <a:cs typeface="Arial"/>
               </a:rPr>
               <a:t>Chuỗi nào cho NHIỀU kết quả hơn: septic shock AND fluids, hay septic shock OR fluids?</a:t>
             </a:r>
@@ -23894,25 +23630,19 @@
               <a:spcBef>
                 <a:spcPts val="450"/>
               </a:spcBef>
-              <a:buNone/>
-            </a:pPr>
-            <a:r>
-              <a:rPr lang="en-US" sz="1650" b="1" dirty="0">
-                <a:solidFill>
-                  <a:srgbClr val="6C3483"/>
-                </a:solidFill>
-                <a:latin typeface="Segoe UI"/>
-                <a:cs typeface="Segoe UI"/>
-              </a:rPr>
-              <a:t>2.  </a:t>
-            </a:r>
+              <a:buClr>
+                <a:srgbClr val="6C3483"/>
+              </a:buClr>
+              <a:buFont typeface="Arial"/>
+              <a:buChar char="•"/>
+            </a:pPr>
             <a:r>
               <a:rPr lang="en-US" sz="1650" dirty="0">
                 <a:solidFill>
                   <a:srgbClr val="000000"/>
                 </a:solidFill>
-                <a:latin typeface="Segoe UI"/>
-                <a:cs typeface="Segoe UI"/>
+                <a:latin typeface="Arial"/>
+                <a:cs typeface="Arial"/>
               </a:rPr>
               <a:t>Kết cục chính của Bài báo 1 là gì?</a:t>
             </a:r>
@@ -23925,25 +23655,19 @@
               <a:spcBef>
                 <a:spcPts val="450"/>
               </a:spcBef>
-              <a:buNone/>
-            </a:pPr>
-            <a:r>
-              <a:rPr lang="en-US" sz="1650" b="1" dirty="0">
-                <a:solidFill>
-                  <a:srgbClr val="6C3483"/>
-                </a:solidFill>
-                <a:latin typeface="Segoe UI"/>
-                <a:cs typeface="Segoe UI"/>
-              </a:rPr>
-              <a:t>3.  </a:t>
-            </a:r>
+              <a:buClr>
+                <a:srgbClr val="6C3483"/>
+              </a:buClr>
+              <a:buFont typeface="Arial"/>
+              <a:buChar char="•"/>
+            </a:pPr>
             <a:r>
               <a:rPr lang="en-US" sz="1650" dirty="0">
                 <a:solidFill>
                   <a:srgbClr val="000000"/>
                 </a:solidFill>
-                <a:latin typeface="Segoe UI"/>
-                <a:cs typeface="Segoe UI"/>
+                <a:latin typeface="Arial"/>
+                <a:cs typeface="Arial"/>
               </a:rPr>
               <a:t>Viết cả hai câu trả lời lên giấy dán (không cần ghi tên) và dán lên cửa khi ra về</a:t>
             </a:r>
@@ -23989,8 +23713,8 @@
                 <a:solidFill>
                   <a:srgbClr val="6C3483"/>
                 </a:solidFill>
-                <a:latin typeface="Segoe UI"/>
-                <a:cs typeface="Segoe UI"/>
+                <a:latin typeface="Arial"/>
+                <a:cs typeface="Arial"/>
               </a:rPr>
               <a:t>SẢN PHẨM   </a:t>
             </a:r>
@@ -23999,8 +23723,8 @@
                 <a:solidFill>
                   <a:srgbClr val="000000"/>
                 </a:solidFill>
-                <a:latin typeface="Segoe UI"/>
-                <a:cs typeface="Segoe UI"/>
+                <a:latin typeface="Arial"/>
+                <a:cs typeface="Arial"/>
               </a:rPr>
               <a:t>Mỗi người một tờ giấy dán (giảng viên đọc trước Buổi 3)</a:t>
             </a:r>
@@ -24037,7 +23761,7 @@
                     <a:lumMod val="50000"/>
                   </a:schemeClr>
                 </a:solidFill>
-                <a:latin typeface="Verdana"/>
+                <a:latin typeface="Arial"/>
               </a:rPr>
               <a:t>Neudata | #ClearDataClearImpact</a:t>
             </a:r>
@@ -24167,8 +23891,8 @@
                 <a:solidFill>
                   <a:srgbClr val="0D7377"/>
                 </a:solidFill>
-                <a:latin typeface="Segoe UI"/>
-                <a:cs typeface="Segoe UI"/>
+                <a:latin typeface="Arial"/>
+                <a:cs typeface="Arial"/>
               </a:rPr>
               <a:t>Bài về nhà trước Buổi 3 (thứ Bảy tuần sau)</a:t>
             </a:r>
@@ -24238,8 +23962,8 @@
                 <a:solidFill>
                   <a:srgbClr val="FFFFFF"/>
                 </a:solidFill>
-                <a:latin typeface="Segoe UI"/>
-                <a:cs typeface="Segoe UI"/>
+                <a:latin typeface="Arial"/>
+                <a:cs typeface="Arial"/>
               </a:rPr>
               <a:t>BÀI TẬP CÁ NHÂN</a:t>
             </a:r>
@@ -24276,25 +24000,19 @@
               <a:spcBef>
                 <a:spcPts val="450"/>
               </a:spcBef>
-              <a:buNone/>
-            </a:pPr>
-            <a:r>
-              <a:rPr lang="en-US" sz="1650" b="1" dirty="0">
-                <a:solidFill>
-                  <a:srgbClr val="0B376C"/>
-                </a:solidFill>
-                <a:latin typeface="Segoe UI"/>
-                <a:cs typeface="Segoe UI"/>
-              </a:rPr>
-              <a:t>1.  </a:t>
-            </a:r>
+              <a:buClr>
+                <a:srgbClr val="0B376C"/>
+              </a:buClr>
+              <a:buFont typeface="Arial"/>
+              <a:buChar char="•"/>
+            </a:pPr>
             <a:r>
               <a:rPr lang="en-US" sz="1650" dirty="0">
                 <a:solidFill>
                   <a:srgbClr val="000000"/>
                 </a:solidFill>
-                <a:latin typeface="Segoe UI"/>
-                <a:cs typeface="Segoe UI"/>
+                <a:latin typeface="Arial"/>
+                <a:cs typeface="Arial"/>
               </a:rPr>
               <a:t>Nhóm: hoàn thành 5 tài liệu chính và phần đặt vấn đề</a:t>
             </a:r>
@@ -24307,25 +24025,19 @@
               <a:spcBef>
                 <a:spcPts val="450"/>
               </a:spcBef>
-              <a:buNone/>
-            </a:pPr>
-            <a:r>
-              <a:rPr lang="en-US" sz="1650" b="1" dirty="0">
-                <a:solidFill>
-                  <a:srgbClr val="0B376C"/>
-                </a:solidFill>
-                <a:latin typeface="Segoe UI"/>
-                <a:cs typeface="Segoe UI"/>
-              </a:rPr>
-              <a:t>2.  </a:t>
-            </a:r>
+              <a:buClr>
+                <a:srgbClr val="0B376C"/>
+              </a:buClr>
+              <a:buFont typeface="Arial"/>
+              <a:buChar char="•"/>
+            </a:pPr>
             <a:r>
               <a:rPr lang="en-US" sz="1650" dirty="0">
                 <a:solidFill>
                   <a:srgbClr val="000000"/>
                 </a:solidFill>
-                <a:latin typeface="Segoe UI"/>
-                <a:cs typeface="Segoe UI"/>
+                <a:latin typeface="Arial"/>
+                <a:cs typeface="Arial"/>
               </a:rPr>
               <a:t>Mỗi thành viên: đọc một bài (quy trình 15 phút) và điền dòng của bài đó</a:t>
             </a:r>
@@ -24338,25 +24050,19 @@
               <a:spcBef>
                 <a:spcPts val="450"/>
               </a:spcBef>
-              <a:buNone/>
-            </a:pPr>
-            <a:r>
-              <a:rPr lang="en-US" sz="1650" b="1" dirty="0">
-                <a:solidFill>
-                  <a:srgbClr val="0B376C"/>
-                </a:solidFill>
-                <a:latin typeface="Segoe UI"/>
-                <a:cs typeface="Segoe UI"/>
-              </a:rPr>
-              <a:t>3.  </a:t>
-            </a:r>
+              <a:buClr>
+                <a:srgbClr val="0B376C"/>
+              </a:buClr>
+              <a:buFont typeface="Arial"/>
+              <a:buChar char="•"/>
+            </a:pPr>
             <a:r>
               <a:rPr lang="en-US" sz="1650" dirty="0">
                 <a:solidFill>
                   <a:srgbClr val="000000"/>
                 </a:solidFill>
-                <a:latin typeface="Segoe UI"/>
-                <a:cs typeface="Segoe UI"/>
+                <a:latin typeface="Arial"/>
+                <a:cs typeface="Arial"/>
               </a:rPr>
               <a:t>Mọi người: đọc tóm tắt Bài báo 2 (Hyun) với bảng đọc</a:t>
             </a:r>
@@ -24369,25 +24075,19 @@
               <a:spcBef>
                 <a:spcPts val="450"/>
               </a:spcBef>
-              <a:buNone/>
-            </a:pPr>
-            <a:r>
-              <a:rPr lang="en-US" sz="1650" b="1" dirty="0">
-                <a:solidFill>
-                  <a:srgbClr val="0B376C"/>
-                </a:solidFill>
-                <a:latin typeface="Segoe UI"/>
-                <a:cs typeface="Segoe UI"/>
-              </a:rPr>
-              <a:t>4.  </a:t>
-            </a:r>
+              <a:buClr>
+                <a:srgbClr val="0B376C"/>
+              </a:buClr>
+              <a:buFont typeface="Arial"/>
+              <a:buChar char="•"/>
+            </a:pPr>
             <a:r>
               <a:rPr lang="en-US" sz="1650" dirty="0">
                 <a:solidFill>
                   <a:srgbClr val="000000"/>
                 </a:solidFill>
-                <a:latin typeface="Segoe UI"/>
-                <a:cs typeface="Segoe UI"/>
+                <a:latin typeface="Arial"/>
+                <a:cs typeface="Arial"/>
               </a:rPr>
               <a:t>Bài tập 2 (diễn đạt lại) nếu chưa làm trên lớp</a:t>
             </a:r>
@@ -24400,25 +24100,19 @@
               <a:spcBef>
                 <a:spcPts val="450"/>
               </a:spcBef>
-              <a:buNone/>
-            </a:pPr>
-            <a:r>
-              <a:rPr lang="en-US" sz="1650" b="1" dirty="0">
-                <a:solidFill>
-                  <a:srgbClr val="0B376C"/>
-                </a:solidFill>
-                <a:latin typeface="Segoe UI"/>
-                <a:cs typeface="Segoe UI"/>
-              </a:rPr>
-              <a:t>5.  </a:t>
-            </a:r>
+              <a:buClr>
+                <a:srgbClr val="0B376C"/>
+              </a:buClr>
+              <a:buFont typeface="Arial"/>
+              <a:buChar char="•"/>
+            </a:pPr>
             <a:r>
               <a:rPr lang="en-US" sz="1650" dirty="0">
                 <a:solidFill>
                   <a:srgbClr val="000000"/>
                 </a:solidFill>
-                <a:latin typeface="Segoe UI"/>
-                <a:cs typeface="Segoe UI"/>
+                <a:latin typeface="Arial"/>
+                <a:cs typeface="Arial"/>
               </a:rPr>
               <a:t>Không bắt buộc: tra Bài báo 1 (NCT04947904) trên ClinicalTrials.gov</a:t>
             </a:r>
@@ -24462,8 +24156,8 @@
                 <a:solidFill>
                   <a:srgbClr val="0B376C"/>
                 </a:solidFill>
-                <a:latin typeface="Segoe UI"/>
-                <a:cs typeface="Segoe UI"/>
+                <a:latin typeface="Arial"/>
+                <a:cs typeface="Arial"/>
               </a:rPr>
               <a:t>Mang theo thứ Bảy tuần sau</a:t>
             </a:r>
@@ -24484,8 +24178,8 @@
                 <a:solidFill>
                   <a:srgbClr val="000000"/>
                 </a:solidFill>
-                <a:latin typeface="Segoe UI"/>
-                <a:cs typeface="Segoe UI"/>
+                <a:latin typeface="Arial"/>
+                <a:cs typeface="Arial"/>
               </a:rPr>
               <a:t>Đề cương Phần 1 (bản in hoặc trên laptop)</a:t>
             </a:r>
@@ -24506,8 +24200,8 @@
                 <a:solidFill>
                   <a:srgbClr val="000000"/>
                 </a:solidFill>
-                <a:latin typeface="Segoe UI"/>
-                <a:cs typeface="Segoe UI"/>
+                <a:latin typeface="Arial"/>
+                <a:cs typeface="Arial"/>
               </a:rPr>
               <a:t>Bảng ma trận tài liệu đã hoàn thành</a:t>
             </a:r>
@@ -24553,8 +24247,8 @@
                 <a:solidFill>
                   <a:srgbClr val="0B376C"/>
                 </a:solidFill>
-                <a:latin typeface="Segoe UI"/>
-                <a:cs typeface="Segoe UI"/>
+                <a:latin typeface="Arial"/>
+                <a:cs typeface="Arial"/>
               </a:rPr>
               <a:t>SẢN PHẨM   </a:t>
             </a:r>
@@ -24563,8 +24257,8 @@
                 <a:solidFill>
                   <a:srgbClr val="000000"/>
                 </a:solidFill>
-                <a:latin typeface="Segoe UI"/>
-                <a:cs typeface="Segoe UI"/>
+                <a:latin typeface="Arial"/>
+                <a:cs typeface="Arial"/>
               </a:rPr>
               <a:t>Đề cương Phần 1 hoàn chỉnh trước Buổi 3</a:t>
             </a:r>
@@ -24601,7 +24295,7 @@
                     <a:lumMod val="50000"/>
                   </a:schemeClr>
                 </a:solidFill>
-                <a:latin typeface="Verdana"/>
+                <a:latin typeface="Arial"/>
               </a:rPr>
               <a:t>Neudata | #ClearDataClearImpact</a:t>
             </a:r>
@@ -24734,8 +24428,8 @@
                 <a:solidFill>
                   <a:srgbClr val="0D7377"/>
                 </a:solidFill>
-                <a:latin typeface="Segoe UI"/>
-                <a:cs typeface="Segoe UI"/>
+                <a:latin typeface="Arial"/>
+                <a:cs typeface="Arial"/>
               </a:rPr>
               <a:t>Slide bổ sung: Buổi 2</a:t>
             </a:r>
@@ -24752,8 +24446,8 @@
                 <a:solidFill>
                   <a:srgbClr val="595959"/>
                 </a:solidFill>
-                <a:latin typeface="Segoe UI"/>
-                <a:cs typeface="Segoe UI"/>
+                <a:latin typeface="Arial"/>
+                <a:cs typeface="Arial"/>
               </a:rPr>
               <a:t>Dùng nếu còn thời gian, hoặc để tự học</a:t>
             </a:r>
@@ -24790,7 +24484,7 @@
                     <a:lumMod val="50000"/>
                   </a:schemeClr>
                 </a:solidFill>
-                <a:latin typeface="Verdana"/>
+                <a:latin typeface="Arial"/>
               </a:rPr>
               <a:t>Neudata | #ClearDataClearImpact</a:t>
             </a:r>
@@ -24920,8 +24614,8 @@
                 <a:solidFill>
                   <a:srgbClr val="0D7377"/>
                 </a:solidFill>
-                <a:latin typeface="Segoe UI"/>
-                <a:cs typeface="Segoe UI"/>
+                <a:latin typeface="Arial"/>
+                <a:cs typeface="Arial"/>
               </a:rPr>
               <a:t>Ngoài PubMed: những nơi khác để tìm</a:t>
             </a:r>
@@ -24991,8 +24685,8 @@
                 <a:solidFill>
                   <a:srgbClr val="FFFFFF"/>
                 </a:solidFill>
-                <a:latin typeface="Segoe UI"/>
-                <a:cs typeface="Segoe UI"/>
+                <a:latin typeface="Arial"/>
+                <a:cs typeface="Arial"/>
               </a:rPr>
               <a:t>Thư viện Cochrane</a:t>
             </a:r>
@@ -25040,8 +24734,8 @@
                 <a:solidFill>
                   <a:srgbClr val="000000"/>
                 </a:solidFill>
-                <a:latin typeface="Segoe UI"/>
-                <a:cs typeface="Segoe UI"/>
+                <a:latin typeface="Arial"/>
+                <a:cs typeface="Arial"/>
               </a:rPr>
               <a:t>Tổng quan hệ thống</a:t>
             </a:r>
@@ -25061,8 +24755,8 @@
                 <a:solidFill>
                   <a:srgbClr val="000000"/>
                 </a:solidFill>
-                <a:latin typeface="Segoe UI"/>
-                <a:cs typeface="Segoe UI"/>
+                <a:latin typeface="Arial"/>
+                <a:cs typeface="Arial"/>
               </a:rPr>
               <a:t>và sổ đăng ký</a:t>
             </a:r>
@@ -25082,8 +24776,8 @@
                 <a:solidFill>
                   <a:srgbClr val="000000"/>
                 </a:solidFill>
-                <a:latin typeface="Segoe UI"/>
-                <a:cs typeface="Segoe UI"/>
+                <a:latin typeface="Arial"/>
+                <a:cs typeface="Arial"/>
               </a:rPr>
               <a:t>thử nghiệm</a:t>
             </a:r>
@@ -25125,8 +24819,8 @@
                 <a:solidFill>
                   <a:srgbClr val="FFFFFF"/>
                 </a:solidFill>
-                <a:latin typeface="Segoe UI"/>
-                <a:cs typeface="Segoe UI"/>
+                <a:latin typeface="Arial"/>
+                <a:cs typeface="Arial"/>
               </a:rPr>
               <a:t>Embase</a:t>
             </a:r>
@@ -25174,8 +24868,8 @@
                 <a:solidFill>
                   <a:srgbClr val="000000"/>
                 </a:solidFill>
-                <a:latin typeface="Segoe UI"/>
-                <a:cs typeface="Segoe UI"/>
+                <a:latin typeface="Arial"/>
+                <a:cs typeface="Arial"/>
               </a:rPr>
               <a:t>Cơ sở dữ liệu y sinh</a:t>
             </a:r>
@@ -25195,8 +24889,8 @@
                 <a:solidFill>
                   <a:srgbClr val="000000"/>
                 </a:solidFill>
-                <a:latin typeface="Segoe UI"/>
-                <a:cs typeface="Segoe UI"/>
+                <a:latin typeface="Arial"/>
+                <a:cs typeface="Arial"/>
               </a:rPr>
               <a:t>lớn; mạnh về thuốc</a:t>
             </a:r>
@@ -25216,8 +24910,8 @@
                 <a:solidFill>
                   <a:srgbClr val="000000"/>
                 </a:solidFill>
-                <a:latin typeface="Segoe UI"/>
-                <a:cs typeface="Segoe UI"/>
+                <a:latin typeface="Arial"/>
+                <a:cs typeface="Arial"/>
               </a:rPr>
               <a:t>(cần đăng ký)</a:t>
             </a:r>
@@ -25259,8 +24953,8 @@
                 <a:solidFill>
                   <a:srgbClr val="FFFFFF"/>
                 </a:solidFill>
-                <a:latin typeface="Segoe UI"/>
-                <a:cs typeface="Segoe UI"/>
+                <a:latin typeface="Arial"/>
+                <a:cs typeface="Arial"/>
               </a:rPr>
               <a:t>CINAHL</a:t>
             </a:r>
@@ -25308,8 +25002,8 @@
                 <a:solidFill>
                   <a:srgbClr val="000000"/>
                 </a:solidFill>
-                <a:latin typeface="Segoe UI"/>
-                <a:cs typeface="Segoe UI"/>
+                <a:latin typeface="Arial"/>
+                <a:cs typeface="Arial"/>
               </a:rPr>
               <a:t>Y văn điều dưỡng</a:t>
             </a:r>
@@ -25329,8 +25023,8 @@
                 <a:solidFill>
                   <a:srgbClr val="000000"/>
                 </a:solidFill>
-                <a:latin typeface="Segoe UI"/>
-                <a:cs typeface="Segoe UI"/>
+                <a:latin typeface="Arial"/>
+                <a:cs typeface="Arial"/>
               </a:rPr>
               <a:t>và các ngành sức khỏe</a:t>
             </a:r>
@@ -25350,8 +25044,8 @@
                 <a:solidFill>
                   <a:srgbClr val="000000"/>
                 </a:solidFill>
-                <a:latin typeface="Segoe UI"/>
-                <a:cs typeface="Segoe UI"/>
+                <a:latin typeface="Arial"/>
+                <a:cs typeface="Arial"/>
               </a:rPr>
               <a:t>(cần đăng ký)</a:t>
             </a:r>
@@ -25393,8 +25087,8 @@
                 <a:solidFill>
                   <a:srgbClr val="FFFFFF"/>
                 </a:solidFill>
-                <a:latin typeface="Segoe UI"/>
-                <a:cs typeface="Segoe UI"/>
+                <a:latin typeface="Arial"/>
+                <a:cs typeface="Arial"/>
               </a:rPr>
               <a:t>Sổ đăng ký thử nghiệm</a:t>
             </a:r>
@@ -25442,8 +25136,8 @@
                 <a:solidFill>
                   <a:srgbClr val="000000"/>
                 </a:solidFill>
-                <a:latin typeface="Segoe UI"/>
-                <a:cs typeface="Segoe UI"/>
+                <a:latin typeface="Arial"/>
+                <a:cs typeface="Arial"/>
               </a:rPr>
               <a:t>ClinicalTrials.gov,</a:t>
             </a:r>
@@ -25463,8 +25157,8 @@
                 <a:solidFill>
                   <a:srgbClr val="000000"/>
                 </a:solidFill>
-                <a:latin typeface="Segoe UI"/>
-                <a:cs typeface="Segoe UI"/>
+                <a:latin typeface="Arial"/>
+                <a:cs typeface="Arial"/>
               </a:rPr>
               <a:t>WHO ICTRP: thử nghiệm</a:t>
             </a:r>
@@ -25484,8 +25178,8 @@
                 <a:solidFill>
                   <a:srgbClr val="000000"/>
                 </a:solidFill>
-                <a:latin typeface="Segoe UI"/>
-                <a:cs typeface="Segoe UI"/>
+                <a:latin typeface="Arial"/>
+                <a:cs typeface="Arial"/>
               </a:rPr>
               <a:t>đang làm, chưa công bố</a:t>
             </a:r>
@@ -25529,8 +25223,8 @@
                 <a:solidFill>
                   <a:srgbClr val="FFFFFF"/>
                 </a:solidFill>
-                <a:latin typeface="Segoe UI"/>
-                <a:cs typeface="Segoe UI"/>
+                <a:latin typeface="Arial"/>
+                <a:cs typeface="Arial"/>
               </a:rPr>
               <a:t>THÔNG ĐIỆP CHÍNH   </a:t>
             </a:r>
@@ -25539,8 +25233,8 @@
                 <a:solidFill>
                   <a:srgbClr val="FFFFFF"/>
                 </a:solidFill>
-                <a:latin typeface="Segoe UI"/>
-                <a:cs typeface="Segoe UI"/>
+                <a:latin typeface="Arial"/>
+                <a:cs typeface="Arial"/>
               </a:rPr>
               <a:t>Với đề cương, PubMed + một sổ đăng ký là đủ; tổng quan hệ thống tìm trên nhiều cơ sở dữ liệu.</a:t>
             </a:r>
@@ -25577,7 +25271,7 @@
                     <a:lumMod val="50000"/>
                   </a:schemeClr>
                 </a:solidFill>
-                <a:latin typeface="Verdana"/>
+                <a:latin typeface="Arial"/>
               </a:rPr>
               <a:t>Neudata | #ClearDataClearImpact</a:t>
             </a:r>
@@ -25707,8 +25401,8 @@
                 <a:solidFill>
                   <a:srgbClr val="0D7377"/>
                 </a:solidFill>
-                <a:latin typeface="Segoe UI"/>
-                <a:cs typeface="Segoe UI"/>
+                <a:latin typeface="Arial"/>
+                <a:cs typeface="Arial"/>
               </a:rPr>
               <a:t>PubMed Clinical Queries: bộ lọc có sẵn</a:t>
             </a:r>
@@ -25780,8 +25474,8 @@
                 <a:solidFill>
                   <a:srgbClr val="FFFFFF"/>
                 </a:solidFill>
-                <a:latin typeface="Segoe UI"/>
-                <a:cs typeface="Segoe UI"/>
+                <a:latin typeface="Arial"/>
+                <a:cs typeface="Arial"/>
               </a:rPr>
               <a:t>Mở</a:t>
             </a:r>
@@ -25829,8 +25523,8 @@
                 <a:solidFill>
                   <a:srgbClr val="000000"/>
                 </a:solidFill>
-                <a:latin typeface="Segoe UI"/>
-                <a:cs typeface="Segoe UI"/>
+                <a:latin typeface="Arial"/>
+                <a:cs typeface="Arial"/>
               </a:rPr>
               <a:t>Trang chủ PubMed:</a:t>
             </a:r>
@@ -25850,8 +25544,8 @@
                 <a:solidFill>
                   <a:srgbClr val="000000"/>
                 </a:solidFill>
-                <a:latin typeface="Segoe UI"/>
-                <a:cs typeface="Segoe UI"/>
+                <a:latin typeface="Arial"/>
+                <a:cs typeface="Arial"/>
               </a:rPr>
               <a:t>Clinical Queries</a:t>
             </a:r>
@@ -25871,8 +25565,8 @@
                 <a:solidFill>
                   <a:srgbClr val="000000"/>
                 </a:solidFill>
-                <a:latin typeface="Segoe UI"/>
-                <a:cs typeface="Segoe UI"/>
+                <a:latin typeface="Arial"/>
+                <a:cs typeface="Arial"/>
               </a:rPr>
               <a:t>(mục Find)</a:t>
             </a:r>
@@ -25916,8 +25610,8 @@
                 <a:solidFill>
                   <a:srgbClr val="FFFFFF"/>
                 </a:solidFill>
-                <a:latin typeface="Segoe UI"/>
-                <a:cs typeface="Segoe UI"/>
+                <a:latin typeface="Arial"/>
+                <a:cs typeface="Arial"/>
               </a:rPr>
               <a:t>Gõ</a:t>
             </a:r>
@@ -25965,8 +25659,8 @@
                 <a:solidFill>
                   <a:srgbClr val="000000"/>
                 </a:solidFill>
-                <a:latin typeface="Segoe UI"/>
-                <a:cs typeface="Segoe UI"/>
+                <a:latin typeface="Arial"/>
+                <a:cs typeface="Arial"/>
               </a:rPr>
               <a:t>Từ khóa chủ đề,</a:t>
             </a:r>
@@ -25986,8 +25680,8 @@
                 <a:solidFill>
                   <a:srgbClr val="000000"/>
                 </a:solidFill>
-                <a:latin typeface="Segoe UI"/>
-                <a:cs typeface="Segoe UI"/>
+                <a:latin typeface="Arial"/>
+                <a:cs typeface="Arial"/>
               </a:rPr>
               <a:t>ví dụ septic shock</a:t>
             </a:r>
@@ -26007,8 +25701,8 @@
                 <a:solidFill>
                   <a:srgbClr val="000000"/>
                 </a:solidFill>
-                <a:latin typeface="Segoe UI"/>
-                <a:cs typeface="Segoe UI"/>
+                <a:latin typeface="Arial"/>
+                <a:cs typeface="Arial"/>
               </a:rPr>
               <a:t>fluid restriction</a:t>
             </a:r>
@@ -26052,8 +25746,8 @@
                 <a:solidFill>
                   <a:srgbClr val="FFFFFF"/>
                 </a:solidFill>
-                <a:latin typeface="Segoe UI"/>
-                <a:cs typeface="Segoe UI"/>
+                <a:latin typeface="Arial"/>
+                <a:cs typeface="Arial"/>
               </a:rPr>
               <a:t>Chọn</a:t>
             </a:r>
@@ -26101,8 +25795,8 @@
                 <a:solidFill>
                   <a:srgbClr val="000000"/>
                 </a:solidFill>
-                <a:latin typeface="Segoe UI"/>
-                <a:cs typeface="Segoe UI"/>
+                <a:latin typeface="Arial"/>
+                <a:cs typeface="Arial"/>
               </a:rPr>
               <a:t>Loại: điều trị,</a:t>
             </a:r>
@@ -26122,8 +25816,8 @@
                 <a:solidFill>
                   <a:srgbClr val="000000"/>
                 </a:solidFill>
-                <a:latin typeface="Segoe UI"/>
-                <a:cs typeface="Segoe UI"/>
+                <a:latin typeface="Arial"/>
+                <a:cs typeface="Arial"/>
               </a:rPr>
               <a:t>chẩn đoán, nguyên nhân,</a:t>
             </a:r>
@@ -26143,8 +25837,8 @@
                 <a:solidFill>
                   <a:srgbClr val="000000"/>
                 </a:solidFill>
-                <a:latin typeface="Segoe UI"/>
-                <a:cs typeface="Segoe UI"/>
+                <a:latin typeface="Arial"/>
+                <a:cs typeface="Arial"/>
               </a:rPr>
               <a:t>tiên lượng...</a:t>
             </a:r>
@@ -26188,8 +25882,8 @@
                 <a:solidFill>
                   <a:srgbClr val="FFFFFF"/>
                 </a:solidFill>
-                <a:latin typeface="Segoe UI"/>
-                <a:cs typeface="Segoe UI"/>
+                <a:latin typeface="Arial"/>
+                <a:cs typeface="Arial"/>
               </a:rPr>
               <a:t>Phạm vi</a:t>
             </a:r>
@@ -26237,8 +25931,8 @@
                 <a:solidFill>
                   <a:srgbClr val="000000"/>
                 </a:solidFill>
-                <a:latin typeface="Segoe UI"/>
-                <a:cs typeface="Segoe UI"/>
+                <a:latin typeface="Arial"/>
+                <a:cs typeface="Arial"/>
               </a:rPr>
               <a:t>Rộng (tìm nhiều hơn)</a:t>
             </a:r>
@@ -26258,8 +25952,8 @@
                 <a:solidFill>
                   <a:srgbClr val="000000"/>
                 </a:solidFill>
-                <a:latin typeface="Segoe UI"/>
-                <a:cs typeface="Segoe UI"/>
+                <a:latin typeface="Arial"/>
+                <a:cs typeface="Arial"/>
               </a:rPr>
               <a:t>hoặc hẹp (chính xác</a:t>
             </a:r>
@@ -26279,8 +25973,8 @@
                 <a:solidFill>
                   <a:srgbClr val="000000"/>
                 </a:solidFill>
-                <a:latin typeface="Segoe UI"/>
-                <a:cs typeface="Segoe UI"/>
+                <a:latin typeface="Arial"/>
+                <a:cs typeface="Arial"/>
               </a:rPr>
               <a:t>hơn)</a:t>
             </a:r>
@@ -26324,8 +26018,8 @@
                 <a:solidFill>
                   <a:srgbClr val="FFFFFF"/>
                 </a:solidFill>
-                <a:latin typeface="Segoe UI"/>
-                <a:cs typeface="Segoe UI"/>
+                <a:latin typeface="Arial"/>
+                <a:cs typeface="Arial"/>
               </a:rPr>
               <a:t>THÔNG ĐIỆP CHÍNH   </a:t>
             </a:r>
@@ -26334,8 +26028,8 @@
                 <a:solidFill>
                   <a:srgbClr val="FFFFFF"/>
                 </a:solidFill>
-                <a:latin typeface="Segoe UI"/>
-                <a:cs typeface="Segoe UI"/>
+                <a:latin typeface="Arial"/>
+                <a:cs typeface="Arial"/>
               </a:rPr>
               <a:t>Lối tắt nhanh để hỏi 'có bằng chứng tốt không?', không thay thế tìm kiếm của bạn.</a:t>
             </a:r>
@@ -26372,7 +26066,7 @@
                     <a:lumMod val="50000"/>
                   </a:schemeClr>
                 </a:solidFill>
-                <a:latin typeface="Verdana"/>
+                <a:latin typeface="Arial"/>
               </a:rPr>
               <a:t>Neudata | #ClearDataClearImpact</a:t>
             </a:r>
@@ -26502,8 +26196,8 @@
                 <a:solidFill>
                   <a:srgbClr val="0D7377"/>
                 </a:solidFill>
-                <a:latin typeface="Segoe UI"/>
-                <a:cs typeface="Segoe UI"/>
+                <a:latin typeface="Arial"/>
+                <a:cs typeface="Arial"/>
               </a:rPr>
               <a:t>Trình diễn tùy chọn: Google Scholar và 'Cited by'</a:t>
             </a:r>
@@ -26573,8 +26267,8 @@
                 <a:solidFill>
                   <a:srgbClr val="FFFFFF"/>
                 </a:solidFill>
-                <a:latin typeface="Segoe UI"/>
-                <a:cs typeface="Segoe UI"/>
+                <a:latin typeface="Arial"/>
+                <a:cs typeface="Arial"/>
               </a:rPr>
               <a:t>TRÌNH DIỄN TRỰC TIẾP   |   3 phút</a:t>
             </a:r>
@@ -26611,25 +26305,19 @@
               <a:spcBef>
                 <a:spcPts val="450"/>
               </a:spcBef>
-              <a:buNone/>
-            </a:pPr>
-            <a:r>
-              <a:rPr lang="en-US" sz="1650" b="1" dirty="0">
-                <a:solidFill>
-                  <a:srgbClr val="B5651D"/>
-                </a:solidFill>
-                <a:latin typeface="Segoe UI"/>
-                <a:cs typeface="Segoe UI"/>
-              </a:rPr>
-              <a:t>1.  </a:t>
-            </a:r>
+              <a:buClr>
+                <a:srgbClr val="B5651D"/>
+              </a:buClr>
+              <a:buFont typeface="Arial"/>
+              <a:buChar char="•"/>
+            </a:pPr>
             <a:r>
               <a:rPr lang="en-US" sz="1650" dirty="0">
                 <a:solidFill>
                   <a:srgbClr val="000000"/>
                 </a:solidFill>
-                <a:latin typeface="Segoe UI"/>
-                <a:cs typeface="Segoe UI"/>
+                <a:latin typeface="Arial"/>
+                <a:cs typeface="Arial"/>
               </a:rPr>
               <a:t>Tìm: restrictive fluid septic shock mortality</a:t>
             </a:r>
@@ -26642,25 +26330,19 @@
               <a:spcBef>
                 <a:spcPts val="450"/>
               </a:spcBef>
-              <a:buNone/>
-            </a:pPr>
-            <a:r>
-              <a:rPr lang="en-US" sz="1650" b="1" dirty="0">
-                <a:solidFill>
-                  <a:srgbClr val="B5651D"/>
-                </a:solidFill>
-                <a:latin typeface="Segoe UI"/>
-                <a:cs typeface="Segoe UI"/>
-              </a:rPr>
-              <a:t>2.  </a:t>
-            </a:r>
+              <a:buClr>
+                <a:srgbClr val="B5651D"/>
+              </a:buClr>
+              <a:buFont typeface="Arial"/>
+              <a:buChar char="•"/>
+            </a:pPr>
             <a:r>
               <a:rPr lang="en-US" sz="1650" dirty="0">
                 <a:solidFill>
                   <a:srgbClr val="000000"/>
                 </a:solidFill>
-                <a:latin typeface="Segoe UI"/>
-                <a:cs typeface="Segoe UI"/>
+                <a:latin typeface="Arial"/>
+                <a:cs typeface="Arial"/>
               </a:rPr>
               <a:t>Xem: tạp chí, luận văn, bản thảo trước in, xếp hạng bằng thuật toán ẩn</a:t>
             </a:r>
@@ -26673,25 +26355,19 @@
               <a:spcBef>
                 <a:spcPts val="450"/>
               </a:spcBef>
-              <a:buNone/>
-            </a:pPr>
-            <a:r>
-              <a:rPr lang="en-US" sz="1650" b="1" dirty="0">
-                <a:solidFill>
-                  <a:srgbClr val="B5651D"/>
-                </a:solidFill>
-                <a:latin typeface="Segoe UI"/>
-                <a:cs typeface="Segoe UI"/>
-              </a:rPr>
-              <a:t>3.  </a:t>
-            </a:r>
+              <a:buClr>
+                <a:srgbClr val="B5651D"/>
+              </a:buClr>
+              <a:buFont typeface="Arial"/>
+              <a:buChar char="•"/>
+            </a:pPr>
             <a:r>
               <a:rPr lang="en-US" sz="1650" dirty="0">
                 <a:solidFill>
                   <a:srgbClr val="000000"/>
                 </a:solidFill>
-                <a:latin typeface="Segoe UI"/>
-                <a:cs typeface="Segoe UI"/>
+                <a:latin typeface="Arial"/>
+                <a:cs typeface="Arial"/>
               </a:rPr>
               <a:t>Dưới một thử nghiệm chính, bấm 'Cited by', rồi tìm trong các bài trích dẫn</a:t>
             </a:r>
@@ -26704,25 +26380,19 @@
               <a:spcBef>
                 <a:spcPts val="450"/>
               </a:spcBef>
-              <a:buNone/>
-            </a:pPr>
-            <a:r>
-              <a:rPr lang="en-US" sz="1650" b="1" dirty="0">
-                <a:solidFill>
-                  <a:srgbClr val="B5651D"/>
-                </a:solidFill>
-                <a:latin typeface="Segoe UI"/>
-                <a:cs typeface="Segoe UI"/>
-              </a:rPr>
-              <a:t>4.  </a:t>
-            </a:r>
+              <a:buClr>
+                <a:srgbClr val="B5651D"/>
+              </a:buClr>
+              <a:buFont typeface="Arial"/>
+              <a:buChar char="•"/>
+            </a:pPr>
             <a:r>
               <a:rPr lang="en-US" sz="1650" dirty="0">
                 <a:solidFill>
                   <a:srgbClr val="000000"/>
                 </a:solidFill>
-                <a:latin typeface="Segoe UI"/>
-                <a:cs typeface="Segoe UI"/>
+                <a:latin typeface="Arial"/>
+                <a:cs typeface="Arial"/>
               </a:rPr>
               <a:t>Bấm biểu tượng ngoặc kép để xem các định dạng xuất</a:t>
             </a:r>
@@ -26768,8 +26438,8 @@
                 <a:solidFill>
                   <a:srgbClr val="B5651D"/>
                 </a:solidFill>
-                <a:latin typeface="Segoe UI"/>
-                <a:cs typeface="Segoe UI"/>
+                <a:latin typeface="Arial"/>
+                <a:cs typeface="Arial"/>
               </a:rPr>
               <a:t>SẢN PHẨM   </a:t>
             </a:r>
@@ -26778,8 +26448,8 @@
                 <a:solidFill>
                   <a:srgbClr val="000000"/>
                 </a:solidFill>
-                <a:latin typeface="Segoe UI"/>
-                <a:cs typeface="Segoe UI"/>
+                <a:latin typeface="Arial"/>
+                <a:cs typeface="Arial"/>
               </a:rPr>
               <a:t>Học viên thấy Scholar bổ sung gì và thiếu gì</a:t>
             </a:r>
@@ -26816,7 +26486,7 @@
                     <a:lumMod val="50000"/>
                   </a:schemeClr>
                 </a:solidFill>
-                <a:latin typeface="Verdana"/>
+                <a:latin typeface="Arial"/>
               </a:rPr>
               <a:t>Neudata | #ClearDataClearImpact</a:t>
             </a:r>
@@ -26946,8 +26616,8 @@
                 <a:solidFill>
                   <a:srgbClr val="0D7377"/>
                 </a:solidFill>
-                <a:latin typeface="Segoe UI"/>
-                <a:cs typeface="Segoe UI"/>
+                <a:latin typeface="Arial"/>
+                <a:cs typeface="Arial"/>
               </a:rPr>
               <a:t>Tái sử dụng văn bản, công cụ AI và kiểm tra trùng lặp</a:t>
             </a:r>
@@ -27017,8 +26687,8 @@
                 <a:solidFill>
                   <a:srgbClr val="FFFFFF"/>
                 </a:solidFill>
-                <a:latin typeface="Segoe UI"/>
-                <a:cs typeface="Segoe UI"/>
+                <a:latin typeface="Arial"/>
+                <a:cs typeface="Arial"/>
               </a:rPr>
               <a:t>Tái sử dụng văn bản</a:t>
             </a:r>
@@ -27066,8 +26736,8 @@
                 <a:solidFill>
                   <a:srgbClr val="000000"/>
                 </a:solidFill>
-                <a:latin typeface="Segoe UI"/>
-                <a:cs typeface="Segoe UI"/>
+                <a:latin typeface="Arial"/>
+                <a:cs typeface="Arial"/>
               </a:rPr>
               <a:t>Dùng lại câu chữ đã</a:t>
             </a:r>
@@ -27087,8 +26757,8 @@
                 <a:solidFill>
                   <a:srgbClr val="000000"/>
                 </a:solidFill>
-                <a:latin typeface="Segoe UI"/>
-                <a:cs typeface="Segoe UI"/>
+                <a:latin typeface="Arial"/>
+                <a:cs typeface="Arial"/>
               </a:rPr>
               <a:t>công bố của mình:</a:t>
             </a:r>
@@ -27108,8 +26778,8 @@
                 <a:solidFill>
                   <a:srgbClr val="000000"/>
                 </a:solidFill>
-                <a:latin typeface="Segoe UI"/>
-                <a:cs typeface="Segoe UI"/>
+                <a:latin typeface="Arial"/>
+                <a:cs typeface="Arial"/>
               </a:rPr>
               <a:t>xem chính sách tạp chí</a:t>
             </a:r>
@@ -27151,8 +26821,8 @@
                 <a:solidFill>
                   <a:srgbClr val="FFFFFF"/>
                 </a:solidFill>
-                <a:latin typeface="Segoe UI"/>
-                <a:cs typeface="Segoe UI"/>
+                <a:latin typeface="Arial"/>
+                <a:cs typeface="Arial"/>
               </a:rPr>
               <a:t>AI viết lại câu</a:t>
             </a:r>
@@ -27200,8 +26870,8 @@
                 <a:solidFill>
                   <a:srgbClr val="000000"/>
                 </a:solidFill>
-                <a:latin typeface="Segoe UI"/>
-                <a:cs typeface="Segoe UI"/>
+                <a:latin typeface="Arial"/>
+                <a:cs typeface="Arial"/>
               </a:rPr>
               <a:t>Không xóa được</a:t>
             </a:r>
@@ -27221,8 +26891,8 @@
                 <a:solidFill>
                   <a:srgbClr val="000000"/>
                 </a:solidFill>
-                <a:latin typeface="Segoe UI"/>
-                <a:cs typeface="Segoe UI"/>
+                <a:latin typeface="Arial"/>
+                <a:cs typeface="Arial"/>
               </a:rPr>
               <a:t>đạo văn; bạn vẫn</a:t>
             </a:r>
@@ -27242,8 +26912,8 @@
                 <a:solidFill>
                   <a:srgbClr val="000000"/>
                 </a:solidFill>
-                <a:latin typeface="Segoe UI"/>
-                <a:cs typeface="Segoe UI"/>
+                <a:latin typeface="Arial"/>
+                <a:cs typeface="Arial"/>
               </a:rPr>
               <a:t>chịu trách nhiệm</a:t>
             </a:r>
@@ -27285,8 +26955,8 @@
                 <a:solidFill>
                   <a:srgbClr val="FFFFFF"/>
                 </a:solidFill>
-                <a:latin typeface="Segoe UI"/>
-                <a:cs typeface="Segoe UI"/>
+                <a:latin typeface="Arial"/>
+                <a:cs typeface="Arial"/>
               </a:rPr>
               <a:t>Tài liệu do AI</a:t>
             </a:r>
@@ -27334,8 +27004,8 @@
                 <a:solidFill>
                   <a:srgbClr val="000000"/>
                 </a:solidFill>
-                <a:latin typeface="Segoe UI"/>
-                <a:cs typeface="Segoe UI"/>
+                <a:latin typeface="Arial"/>
+                <a:cs typeface="Arial"/>
               </a:rPr>
               <a:t>Có thể bị bịa;</a:t>
             </a:r>
@@ -27355,8 +27025,8 @@
                 <a:solidFill>
                   <a:srgbClr val="000000"/>
                 </a:solidFill>
-                <a:latin typeface="Segoe UI"/>
-                <a:cs typeface="Segoe UI"/>
+                <a:latin typeface="Arial"/>
+                <a:cs typeface="Arial"/>
               </a:rPr>
               <a:t>tìm từng tài liệu</a:t>
             </a:r>
@@ -27376,8 +27046,8 @@
                 <a:solidFill>
                   <a:srgbClr val="000000"/>
                 </a:solidFill>
-                <a:latin typeface="Segoe UI"/>
-                <a:cs typeface="Segoe UI"/>
+                <a:latin typeface="Arial"/>
+                <a:cs typeface="Arial"/>
               </a:rPr>
               <a:t>trên PubMed</a:t>
             </a:r>
@@ -27419,8 +27089,8 @@
                 <a:solidFill>
                   <a:srgbClr val="FFFFFF"/>
                 </a:solidFill>
-                <a:latin typeface="Segoe UI"/>
-                <a:cs typeface="Segoe UI"/>
+                <a:latin typeface="Arial"/>
+                <a:cs typeface="Arial"/>
               </a:rPr>
               <a:t>Kiểm tra trùng lặp</a:t>
             </a:r>
@@ -27468,8 +27138,8 @@
                 <a:solidFill>
                   <a:srgbClr val="000000"/>
                 </a:solidFill>
-                <a:latin typeface="Segoe UI"/>
-                <a:cs typeface="Segoe UI"/>
+                <a:latin typeface="Arial"/>
+                <a:cs typeface="Arial"/>
               </a:rPr>
               <a:t>Tạp chí sàng lọc</a:t>
             </a:r>
@@ -27489,8 +27159,8 @@
                 <a:solidFill>
                   <a:srgbClr val="000000"/>
                 </a:solidFill>
-                <a:latin typeface="Segoe UI"/>
-                <a:cs typeface="Segoe UI"/>
+                <a:latin typeface="Arial"/>
+                <a:cs typeface="Arial"/>
               </a:rPr>
               <a:t>bài nộp để tìm</a:t>
             </a:r>
@@ -27510,8 +27180,8 @@
                 <a:solidFill>
                   <a:srgbClr val="000000"/>
                 </a:solidFill>
-                <a:latin typeface="Segoe UI"/>
-                <a:cs typeface="Segoe UI"/>
+                <a:latin typeface="Arial"/>
+                <a:cs typeface="Arial"/>
               </a:rPr>
               <a:t>văn bản sao chép</a:t>
             </a:r>
@@ -27555,8 +27225,8 @@
                 <a:solidFill>
                   <a:srgbClr val="FFFFFF"/>
                 </a:solidFill>
-                <a:latin typeface="Segoe UI"/>
-                <a:cs typeface="Segoe UI"/>
+                <a:latin typeface="Arial"/>
+                <a:cs typeface="Arial"/>
               </a:rPr>
               <a:t>THÔNG ĐIỆP CHÍNH   </a:t>
             </a:r>
@@ -27565,8 +27235,8 @@
                 <a:solidFill>
                   <a:srgbClr val="FFFFFF"/>
                 </a:solidFill>
-                <a:latin typeface="Segoe UI"/>
-                <a:cs typeface="Segoe UI"/>
+                <a:latin typeface="Arial"/>
+                <a:cs typeface="Arial"/>
               </a:rPr>
               <a:t>Viết từ hiểu biết, trích dẫn những gì bạn dùng, và tự kiểm tra mọi tài liệu.</a:t>
             </a:r>
@@ -27603,7 +27273,7 @@
                     <a:lumMod val="50000"/>
                   </a:schemeClr>
                 </a:solidFill>
-                <a:latin typeface="Verdana"/>
+                <a:latin typeface="Arial"/>
               </a:rPr>
               <a:t>Neudata | #ClearDataClearImpact</a:t>
             </a:r>
@@ -27757,8 +27427,8 @@
                 <a:solidFill>
                   <a:srgbClr val="4472C4"/>
                 </a:solidFill>
-                <a:latin typeface="Segoe UI"/>
-                <a:cs typeface="Segoe UI"/>
+                <a:latin typeface="Arial"/>
+                <a:cs typeface="Arial"/>
               </a:rPr>
               <a:t>Copyright © Neudata, 2026</a:t>
             </a:r>
@@ -27903,7 +27573,7 @@
                     <a:lumMod val="50000"/>
                   </a:schemeClr>
                 </a:solidFill>
-                <a:latin typeface="Verdana"/>
+                <a:latin typeface="Arial"/>
               </a:rPr>
               <a:t>Neudata | #ClearDataClearImpact</a:t>
             </a:r>
@@ -28009,8 +27679,8 @@
                 <a:solidFill>
                   <a:srgbClr val="0D7377"/>
                 </a:solidFill>
-                <a:latin typeface="Segoe UI"/>
-                <a:cs typeface="Segoe UI"/>
+                <a:latin typeface="Arial"/>
+                <a:cs typeface="Arial"/>
               </a:rPr>
               <a:t>Phễu tìm kiếm</a:t>
             </a:r>
@@ -28106,8 +27776,8 @@
                 <a:solidFill>
                   <a:srgbClr val="FFFFFF"/>
                 </a:solidFill>
-                <a:latin typeface="Segoe UI"/>
-                <a:cs typeface="Segoe UI"/>
+                <a:latin typeface="Arial"/>
+                <a:cs typeface="Arial"/>
               </a:rPr>
               <a:t>THÔNG ĐIỆP CHÍNH   </a:t>
             </a:r>
@@ -28116,8 +27786,8 @@
                 <a:solidFill>
                   <a:srgbClr val="FFFFFF"/>
                 </a:solidFill>
-                <a:latin typeface="Segoe UI"/>
-                <a:cs typeface="Segoe UI"/>
+                <a:latin typeface="Arial"/>
+                <a:cs typeface="Arial"/>
               </a:rPr>
               <a:t>Tìm kiếm tốt bắt đầu rộng, thu hẹp từng bước và được ghi lại.</a:t>
             </a:r>
@@ -28154,7 +27824,7 @@
                     <a:lumMod val="50000"/>
                   </a:schemeClr>
                 </a:solidFill>
-                <a:latin typeface="Verdana"/>
+                <a:latin typeface="Arial"/>
               </a:rPr>
               <a:t>Neudata | #ClearDataClearImpact</a:t>
             </a:r>
@@ -28284,8 +27954,8 @@
                 <a:solidFill>
                   <a:srgbClr val="0D7377"/>
                 </a:solidFill>
-                <a:latin typeface="Segoe UI"/>
-                <a:cs typeface="Segoe UI"/>
+                <a:latin typeface="Arial"/>
+                <a:cs typeface="Arial"/>
               </a:rPr>
               <a:t>Từ PICO đến các khối tìm kiếm</a:t>
             </a:r>
@@ -28381,8 +28051,8 @@
                 <a:solidFill>
                   <a:srgbClr val="FFFFFF"/>
                 </a:solidFill>
-                <a:latin typeface="Segoe UI"/>
-                <a:cs typeface="Segoe UI"/>
+                <a:latin typeface="Arial"/>
+                <a:cs typeface="Arial"/>
               </a:rPr>
               <a:t>THÔNG ĐIỆP CHÍNH   </a:t>
             </a:r>
@@ -28391,8 +28061,8 @@
                 <a:solidFill>
                   <a:srgbClr val="FFFFFF"/>
                 </a:solidFill>
-                <a:latin typeface="Segoe UI"/>
-                <a:cs typeface="Segoe UI"/>
+                <a:latin typeface="Arial"/>
+                <a:cs typeface="Arial"/>
               </a:rPr>
               <a:t>Mỗi khái niệm PICO một khối: OR trong khối, AND giữa các khối.</a:t>
             </a:r>
@@ -28429,7 +28099,7 @@
                     <a:lumMod val="50000"/>
                   </a:schemeClr>
                 </a:solidFill>
-                <a:latin typeface="Verdana"/>
+                <a:latin typeface="Arial"/>
               </a:rPr>
               <a:t>Neudata | #ClearDataClearImpact</a:t>
             </a:r>
@@ -28559,8 +28229,8 @@
                 <a:solidFill>
                   <a:srgbClr val="0D7377"/>
                 </a:solidFill>
-                <a:latin typeface="Segoe UI"/>
-                <a:cs typeface="Segoe UI"/>
+                <a:latin typeface="Arial"/>
+                <a:cs typeface="Arial"/>
               </a:rPr>
               <a:t>Ví dụ mẫu 2: một câu hỏi tại khoa</a:t>
             </a:r>
@@ -28656,8 +28326,8 @@
                 <a:solidFill>
                   <a:srgbClr val="FFFFFF"/>
                 </a:solidFill>
-                <a:latin typeface="Segoe UI"/>
-                <a:cs typeface="Segoe UI"/>
+                <a:latin typeface="Arial"/>
+                <a:cs typeface="Arial"/>
               </a:rPr>
               <a:t>THÔNG ĐIỆP CHÍNH   </a:t>
             </a:r>
@@ -28666,8 +28336,8 @@
                 <a:solidFill>
                   <a:srgbClr val="FFFFFF"/>
                 </a:solidFill>
-                <a:latin typeface="Segoe UI"/>
-                <a:cs typeface="Segoe UI"/>
+                <a:latin typeface="Arial"/>
+                <a:cs typeface="Arial"/>
               </a:rPr>
               <a:t>Cùng một cách cho mọi chủ đề: khái niệm thành khối, từ đồng nghĩa nối bằng OR, các khối nối bằng AND.</a:t>
             </a:r>
@@ -28704,7 +28374,7 @@
                     <a:lumMod val="50000"/>
                   </a:schemeClr>
                 </a:solidFill>
-                <a:latin typeface="Verdana"/>
+                <a:latin typeface="Arial"/>
               </a:rPr>
               <a:t>Neudata | #ClearDataClearImpact</a:t>
             </a:r>
@@ -28834,8 +28504,8 @@
                 <a:solidFill>
                   <a:srgbClr val="0D7377"/>
                 </a:solidFill>
-                <a:latin typeface="Segoe UI"/>
-                <a:cs typeface="Segoe UI"/>
+                <a:latin typeface="Arial"/>
+                <a:cs typeface="Arial"/>
               </a:rPr>
               <a:t>Logic Boolean bằng hình ảnh</a:t>
             </a:r>
@@ -28931,8 +28601,8 @@
                 <a:solidFill>
                   <a:srgbClr val="FFFFFF"/>
                 </a:solidFill>
-                <a:latin typeface="Segoe UI"/>
-                <a:cs typeface="Segoe UI"/>
+                <a:latin typeface="Arial"/>
+                <a:cs typeface="Arial"/>
               </a:rPr>
               <a:t>THÔNG ĐIỆP CHÍNH   </a:t>
             </a:r>
@@ -28941,8 +28611,8 @@
                 <a:solidFill>
                   <a:srgbClr val="FFFFFF"/>
                 </a:solidFill>
-                <a:latin typeface="Segoe UI"/>
-                <a:cs typeface="Segoe UI"/>
+                <a:latin typeface="Arial"/>
+                <a:cs typeface="Arial"/>
               </a:rPr>
               <a:t>AND thu hẹp, OR mở rộng, NOT loại bỏ. Hạn chế dùng NOT.</a:t>
             </a:r>
@@ -28979,7 +28649,7 @@
                     <a:lumMod val="50000"/>
                   </a:schemeClr>
                 </a:solidFill>
-                <a:latin typeface="Verdana"/>
+                <a:latin typeface="Arial"/>
               </a:rPr>
               <a:t>Neudata | #ClearDataClearImpact</a:t>
             </a:r>
@@ -29109,8 +28779,8 @@
                 <a:solidFill>
                   <a:srgbClr val="0D7377"/>
                 </a:solidFill>
-                <a:latin typeface="Segoe UI"/>
-                <a:cs typeface="Segoe UI"/>
+                <a:latin typeface="Arial"/>
+                <a:cs typeface="Arial"/>
               </a:rPr>
               <a:t>Kiểm tra hiểu bài: AND, OR hay NOT?</a:t>
             </a:r>
@@ -29180,8 +28850,8 @@
                 <a:solidFill>
                   <a:srgbClr val="FFFFFF"/>
                 </a:solidFill>
-                <a:latin typeface="Segoe UI"/>
-                <a:cs typeface="Segoe UI"/>
+                <a:latin typeface="Arial"/>
+                <a:cs typeface="Arial"/>
               </a:rPr>
               <a:t>CÂU HỎI NHANH   |   2 phút</a:t>
             </a:r>
@@ -29218,25 +28888,19 @@
               <a:spcBef>
                 <a:spcPts val="450"/>
               </a:spcBef>
-              <a:buNone/>
-            </a:pPr>
-            <a:r>
-              <a:rPr lang="en-US" sz="1650" b="1" dirty="0">
-                <a:solidFill>
-                  <a:srgbClr val="6C3483"/>
-                </a:solidFill>
-                <a:latin typeface="Segoe UI"/>
-                <a:cs typeface="Segoe UI"/>
-              </a:rPr>
-              <a:t>1.  </a:t>
-            </a:r>
+              <a:buClr>
+                <a:srgbClr val="6C3483"/>
+              </a:buClr>
+              <a:buFont typeface="Arial"/>
+              <a:buChar char="•"/>
+            </a:pPr>
             <a:r>
               <a:rPr lang="en-US" sz="1650" dirty="0">
                 <a:solidFill>
                   <a:srgbClr val="000000"/>
                 </a:solidFill>
-                <a:latin typeface="Segoe UI"/>
-                <a:cs typeface="Segoe UI"/>
+                <a:latin typeface="Arial"/>
+                <a:cs typeface="Arial"/>
               </a:rPr>
               <a:t>Bạn muốn bài có CẢ mê sảng VÀ gãy cổ xương đùi: dùng toán tử nào?</a:t>
             </a:r>
@@ -29249,25 +28913,19 @@
               <a:spcBef>
                 <a:spcPts val="450"/>
               </a:spcBef>
-              <a:buNone/>
-            </a:pPr>
-            <a:r>
-              <a:rPr lang="en-US" sz="1650" b="1" dirty="0">
-                <a:solidFill>
-                  <a:srgbClr val="6C3483"/>
-                </a:solidFill>
-                <a:latin typeface="Segoe UI"/>
-                <a:cs typeface="Segoe UI"/>
-              </a:rPr>
-              <a:t>2.  </a:t>
-            </a:r>
+              <a:buClr>
+                <a:srgbClr val="6C3483"/>
+              </a:buClr>
+              <a:buFont typeface="Arial"/>
+              <a:buChar char="•"/>
+            </a:pPr>
             <a:r>
               <a:rPr lang="en-US" sz="1650" dirty="0">
                 <a:solidFill>
                   <a:srgbClr val="000000"/>
                 </a:solidFill>
-                <a:latin typeface="Segoe UI"/>
-                <a:cs typeface="Segoe UI"/>
+                <a:latin typeface="Arial"/>
+                <a:cs typeface="Arial"/>
               </a:rPr>
               <a:t>Bạn muốn bài dùng HOẶC 'pressure ulcer' HOẶC 'bedsore': toán tử nào?</a:t>
             </a:r>
@@ -29280,25 +28938,19 @@
               <a:spcBef>
                 <a:spcPts val="450"/>
               </a:spcBef>
-              <a:buNone/>
-            </a:pPr>
-            <a:r>
-              <a:rPr lang="en-US" sz="1650" b="1" dirty="0">
-                <a:solidFill>
-                  <a:srgbClr val="6C3483"/>
-                </a:solidFill>
-                <a:latin typeface="Segoe UI"/>
-                <a:cs typeface="Segoe UI"/>
-              </a:rPr>
-              <a:t>3.  </a:t>
-            </a:r>
+              <a:buClr>
+                <a:srgbClr val="6C3483"/>
+              </a:buClr>
+              <a:buFont typeface="Arial"/>
+              <a:buChar char="•"/>
+            </a:pPr>
             <a:r>
               <a:rPr lang="en-US" sz="1650" dirty="0">
                 <a:solidFill>
                   <a:srgbClr val="000000"/>
                 </a:solidFill>
-                <a:latin typeface="Segoe UI"/>
-                <a:cs typeface="Segoe UI"/>
+                <a:latin typeface="Arial"/>
+                <a:cs typeface="Arial"/>
               </a:rPr>
               <a:t>Tìm kiếm ra 40.000 kết quả. Thêm khối AND thứ ba sẽ nhiều hơn hay ít hơn?</a:t>
             </a:r>
@@ -29311,25 +28963,19 @@
               <a:spcBef>
                 <a:spcPts val="450"/>
               </a:spcBef>
-              <a:buNone/>
-            </a:pPr>
-            <a:r>
-              <a:rPr lang="en-US" sz="1650" b="1" dirty="0">
-                <a:solidFill>
-                  <a:srgbClr val="6C3483"/>
-                </a:solidFill>
-                <a:latin typeface="Segoe UI"/>
-                <a:cs typeface="Segoe UI"/>
-              </a:rPr>
-              <a:t>4.  </a:t>
-            </a:r>
+              <a:buClr>
+                <a:srgbClr val="6C3483"/>
+              </a:buClr>
+              <a:buFont typeface="Arial"/>
+              <a:buChar char="•"/>
+            </a:pPr>
             <a:r>
               <a:rPr lang="en-US" sz="1650" dirty="0">
                 <a:solidFill>
                   <a:srgbClr val="000000"/>
                 </a:solidFill>
-                <a:latin typeface="Segoe UI"/>
-                <a:cs typeface="Segoe UI"/>
+                <a:latin typeface="Arial"/>
+                <a:cs typeface="Arial"/>
               </a:rPr>
               <a:t>Vì sao 'sepsis NOT children' là rủi ro?</a:t>
             </a:r>
@@ -29375,8 +29021,8 @@
                 <a:solidFill>
                   <a:srgbClr val="6C3483"/>
                 </a:solidFill>
-                <a:latin typeface="Segoe UI"/>
-                <a:cs typeface="Segoe UI"/>
+                <a:latin typeface="Arial"/>
+                <a:cs typeface="Arial"/>
               </a:rPr>
               <a:t>SẢN PHẨM   </a:t>
             </a:r>
@@ -29385,8 +29031,8 @@
                 <a:solidFill>
                   <a:srgbClr val="000000"/>
                 </a:solidFill>
-                <a:latin typeface="Segoe UI"/>
-                <a:cs typeface="Segoe UI"/>
+                <a:latin typeface="Arial"/>
+                <a:cs typeface="Arial"/>
               </a:rPr>
               <a:t>Trả lời to</a:t>
             </a:r>
@@ -29423,7 +29069,7 @@
                     <a:lumMod val="50000"/>
                   </a:schemeClr>
                 </a:solidFill>
-                <a:latin typeface="Verdana"/>
+                <a:latin typeface="Arial"/>
               </a:rPr>
               <a:t>Neudata | #ClearDataClearImpact</a:t>
             </a:r>
@@ -29540,7 +29186,7 @@
     </a:clrScheme>
     <a:fontScheme name="Office">
       <a:majorFont>
-        <a:latin typeface="Calibri"/>
+        <a:latin typeface="Arial"/>
         <a:ea typeface=""/>
         <a:cs typeface=""/>
         <a:font script="Jpan" typeface="ＭＳ Ｐゴシック"/>
@@ -29575,7 +29221,7 @@
         <a:font script="Geor" typeface="Sylfaen"/>
       </a:majorFont>
       <a:minorFont>
-        <a:latin typeface="Calibri"/>
+        <a:latin typeface="Arial"/>
         <a:ea typeface=""/>
         <a:cs typeface=""/>
         <a:font script="Jpan" typeface="ＭＳ Ｐゴシック"/>
@@ -29860,7 +29506,7 @@
     </a:clrScheme>
     <a:fontScheme name="Office">
       <a:majorFont>
-        <a:latin typeface="Calibri Light" panose="020F0302020204030204"/>
+        <a:latin typeface="Arial" panose="020F0302020204030204"/>
         <a:ea typeface=""/>
         <a:cs typeface=""/>
         <a:font script="Jpan" typeface="游ゴシック Light"/>
@@ -29895,7 +29541,7 @@
         <a:font script="Geor" typeface="Sylfaen"/>
       </a:majorFont>
       <a:minorFont>
-        <a:latin typeface="Calibri" panose="020F0502020204030204"/>
+        <a:latin typeface="Arial" panose="020F0502020204030204"/>
         <a:ea typeface=""/>
         <a:cs typeface=""/>
         <a:font script="Jpan" typeface="游ゴシック"/>
@@ -30121,7 +29767,7 @@
     </a:clrScheme>
     <a:fontScheme name="Office">
       <a:majorFont>
-        <a:latin typeface="Calibri Light" panose="020F0302020204030204"/>
+        <a:latin typeface="Arial" panose="020F0302020204030204"/>
         <a:ea typeface=""/>
         <a:cs typeface=""/>
         <a:font script="Jpan" typeface="游ゴシック Light"/>
@@ -30156,7 +29802,7 @@
         <a:font script="Geor" typeface="Sylfaen"/>
       </a:majorFont>
       <a:minorFont>
-        <a:latin typeface="Calibri" panose="020F0502020204030204"/>
+        <a:latin typeface="Arial" panose="020F0502020204030204"/>
         <a:ea typeface=""/>
         <a:cs typeface=""/>
         <a:font script="Jpan" typeface="游ゴシック"/>

--- a/vi/files/slides/Session_2_VN.pptx
+++ b/vi/files/slides/Session_2_VN.pptx
@@ -738,38 +738,20 @@
           <a:lstStyle/>
           <a:p>
             <a:r>
-              <a:rPr lang="en-US" sz="1400" b="1" dirty="0"/>
-              <a:t>MỞ ĐẦU BUỔI 2 (0:00, 19:30).</a:t>
-            </a:r>
-          </a:p>
-          <a:p>
-            <a:r>
               <a:rPr lang="en-US" sz="1400" b="0" dirty="0"/>
-              <a:t>Mở đầu bằng những gì câu hỏi cuối Buổi 1 cho thấy (ví dụ còn bao nhiêu người dùng động từ mơ hồ) và dành một phút cho điểm đó nếu cần.</a:t>
+              <a:t>Bắt đầu 19:30. Nếu câu hỏi cuối Buổi 1 cho thấy nhiều động từ mơ hồ, dành một phút cho mục tiêu.</a:t>
             </a:r>
           </a:p>
           <a:p>
             <a:r>
               <a:rPr lang="en-US" sz="1400" b="0" dirty="0"/>
-              <a:t>Ý chính: thứ Bảy tuần trước mỗi học viên đã bắt đầu câu hỏi của riêng mình. Hôm nay mỗi người tìm xem điều gì đã được biết về câu hỏi đó, lưu tài liệu tham khảo an toàn, và đọc bài báo hiệu quả.</a:t>
+              <a:t>Kiểm tra trong chat: đã có câu hỏi PICO, danh sách từ đồng nghĩa và Zotero. Dán link phiếu bài tập Buổi 2 và tệp PDF gốc của Bài báo 1.</a:t>
             </a:r>
           </a:p>
           <a:p>
             <a:r>
               <a:rPr lang="en-US" sz="1400" b="0" dirty="0"/>
-              <a:t>Nhịp độ: chậm hơn vẻ ngoài. Phần nào cũng có trình diễn hoặc bài tập. Dùng các slide 'Kiểm tra hiểu bài': đó là lúc phát hiện ai bị lạc.</a:t>
-            </a:r>
-          </a:p>
-          <a:p>
-            <a:r>
-              <a:rPr lang="en-US" sz="1400" b="0" dirty="0"/>
-              <a:t>Kiểm tra thực tế trước khi bắt đầu (chat): mọi người có câu hỏi PICO, danh sách từ đồng nghĩa (bài về nhà) và đã cài Zotero. Dán hai đường link vào chat: phiếu bài tập Buổi 2 (PDF) và Bài báo 1 dạng PDF sạch (bản gốc không chú giải, Course/Papers/Paper 1 - Boulet 2024 Crit Care (RCT) - original.pdf, cũng có link DOI ở trang 'Hai bài báo' trên website khóa học).</a:t>
-            </a:r>
-          </a:p>
-          <a:p>
-            <a:r>
-              <a:rPr lang="en-US" sz="1400" b="0" dirty="0"/>
-              <a:t>Thời gian: 1 phút, rồi câu hỏi ôn tập.</a:t>
+              <a:t>Thời gian: 1 phút.</a:t>
             </a:r>
           </a:p>
         </p:txBody>
@@ -850,31 +832,13 @@
           <a:p>
             <a:r>
               <a:rPr lang="en-US" sz="1400" b="0" dirty="0"/>
-              <a:t>Ngoặc kép giữ nguyên cụm từ.</a:t>
+              <a:t>Ví dụ: child* tìm được child, children, childhood. Lưu ý: nó cũng tìm ra childbirth, và từ cắt cụt không được ánh xạ sang MeSH.</a:t>
             </a:r>
           </a:p>
           <a:p>
             <a:r>
               <a:rPr lang="en-US" sz="1400" b="0" dirty="0"/>
-              <a:t>Cắt cụt (dấu sao) hữu ích khi tác giả viết cùng một ý với các đuôi từ khác nhau. Ví dụ lâm sàng: với câu hỏi nhi khoa, child* tìm cả child, children, childhood và childhood-onset trong một lần, thay vì gõ từng từ nối bằng OR. Các gốc từ hữu ích khác: nurs* (nurse, nurses, nursing), restrict* (restricted, restriction, restrictive).</a:t>
-            </a:r>
-          </a:p>
-          <a:p>
-            <a:r>
-              <a:rPr lang="en-US" sz="1400" b="0" dirty="0"/>
-              <a:t>Lưu ý: child* cũng ra cả childbirth, và gốc quá ngắn (flu*) sẽ ra cả influenza và fluoride. Trên PubMed gốc từ cần ít nhất bốn chữ cái, và từ đã cắt cụt không được gắn với MeSH, nên vẫn giữ thuật ngữ MeSH trong khối.</a:t>
-            </a:r>
-          </a:p>
-          <a:p>
-            <a:r>
-              <a:rPr lang="en-US" sz="1400" b="0" dirty="0"/>
-              <a:t>Thẻ trường giới hạn nơi PubMed tìm. Bộ lọc (bên trái trang kết quả) thu hẹp theo loại bài, năm và tuổi. Mỗi bộ lọc cần lý do ghi lại được.</a:t>
-            </a:r>
-          </a:p>
-          <a:p>
-            <a:r>
-              <a:rPr lang="en-US" sz="1400" b="0" dirty="0"/>
-              <a:t>Quan niệm sai: 'lọc lấy toàn văn miễn phí'. Làm vậy bỏ mất bài quan trọng.</a:t>
+              <a:t>Không lọc 'free full text': sẽ mất bài quan trọng.</a:t>
             </a:r>
           </a:p>
           <a:p>
@@ -961,37 +925,13 @@
           <a:p>
             <a:r>
               <a:rPr lang="en-US" sz="1400" b="0" dirty="0"/>
-              <a:t>Giờ ghép các phần lại. Mỗi thành phần PICO thành một khối: thuật ngữ MeSH cộng với từ tự do, nối bằng OR. Các khối nối với nhau bằng AND.</a:t>
+              <a:t>Bỏ khối so sánh: cách viết quá khác nhau.</a:t>
             </a:r>
           </a:p>
           <a:p>
             <a:r>
               <a:rPr lang="en-US" sz="1400" b="0" dirty="0"/>
-              <a:t>Dấu sao (*) là cắt cụt (truncation): restrictive fluid* tìm cả 'restrictive fluids'.</a:t>
-            </a:r>
-          </a:p>
-          <a:p>
-            <a:r>
-              <a:rPr lang="en-US" sz="1400" b="0" dirty="0"/>
-              <a:t>Nhóm so sánh (thường quy) thường bỏ ra vì cách viết quá đa dạng.</a:t>
-            </a:r>
-          </a:p>
-          <a:p>
-            <a:r>
-              <a:rPr lang="en-US" sz="1400" b="0" dirty="0"/>
-              <a:t>Lưu ý: PubMed là cơ sở dữ liệu tiếng Anh, nên luôn tìm bằng thuật ngữ tiếng Anh.</a:t>
-            </a:r>
-          </a:p>
-          <a:p>
-            <a:r>
-              <a:rPr lang="en-US" sz="1400" b="0" dirty="0"/>
-              <a:t>Quan niệm sai: 'cứ gõ cả câu hỏi vào PubMed'. Bạn mất kiểm soát từ đồng nghĩa và logic.</a:t>
-            </a:r>
-          </a:p>
-          <a:p>
-            <a:r>
-              <a:rPr lang="en-US" sz="1400" b="0" dirty="0"/>
-              <a:t>Hỏi cả lớp (chat): 'Tác giả còn dùng từ nào cho restrictive?' Mong đợi: conservative, limited, de-resuscitation, fluid removal, negative fluid balance.</a:t>
+              <a:t>Hỏi: 'Tác giả còn dùng từ nào cho restrictive?' Mong đợi: conservative, limited, de-resuscitation, negative fluid balance.</a:t>
             </a:r>
           </a:p>
           <a:p>
@@ -1078,25 +1018,13 @@
           <a:p>
             <a:r>
               <a:rPr lang="en-US" sz="1400" b="0" dirty="0"/>
-              <a:t>Ví dụ thứ hai, từ khoa phòng, để đồng nghiệp ngoài ICU thấy phương pháp dùng được cho mọi chủ đề. Bố cục giống slide trước.</a:t>
+              <a:t>Ở đây P và O cùng một ý, nên một khối chứa cả hai.</a:t>
             </a:r>
           </a:p>
           <a:p>
             <a:r>
               <a:rPr lang="en-US" sz="1400" b="0" dirty="0"/>
-              <a:t>Ở đây P và O cùng một ý (tổn thương do tì đè) nên một khối chứa cả hai. Khối thứ hai là can thiệp.</a:t>
-            </a:r>
-          </a:p>
-          <a:p>
-            <a:r>
-              <a:rPr lang="en-US" sz="1400" b="0" dirty="0"/>
-              <a:t>MeSH: tác giả viết pressure ulcer, pressure injury, bedsore, decubitus. Đề mục MeSH 'Pressure Ulcer' gom tất cả.</a:t>
-            </a:r>
-          </a:p>
-          <a:p>
-            <a:r>
-              <a:rPr lang="en-US" sz="1400" b="0" dirty="0"/>
-              <a:t>Hỏi cả lớp (chat): 'Tác giả còn dùng từ nào cho xoay trở?' Mong đợi: turning, position change, mobilisation, offloading.</a:t>
+              <a:t>Hỏi: 'Từ khác cho repositioning?' Mong đợi: turning, position change, offloading.</a:t>
             </a:r>
           </a:p>
           <a:p>
@@ -1183,37 +1111,13 @@
           <a:p>
             <a:r>
               <a:rPr lang="en-US" sz="1400" b="0" dirty="0"/>
-              <a:t>PubMed: miễn phí, do Thư viện Y khoa Quốc gia Hoa Kỳ vận hành, tạp chí y sinh, có nhãn MeSH, nhiều bộ lọc. Cùng một chuỗi tìm kiếm cho cùng kết quả về sau, nên có thể báo cáo và lặp lại.</a:t>
+              <a:t>Chạy và báo cáo tìm kiếm trên PubMed. Dùng 'Cited by' của Scholar để tìm bài mới hơn và kiểm tra không sót bài.</a:t>
             </a:r>
           </a:p>
           <a:p>
             <a:r>
               <a:rPr lang="en-US" sz="1400" b="0" dirty="0"/>
-              <a:t>Google Scholar: rất rộng (luận văn, sách, bản thảo trước in), nhưng xếp hạng kết quả theo cách bị ẩn, ít bộ lọc và khó lặp lại.</a:t>
-            </a:r>
-          </a:p>
-          <a:p>
-            <a:r>
-              <a:rPr lang="en-US" sz="1400" b="0" dirty="0"/>
-              <a:t>Dòng 'Tìm bài mới hơn có trích dẫn một bài': mở một thử nghiệm quan trọng và bấm 'Cited by' để thấy mọi bài về sau có trích dẫn nó. Đây là cách tìm nghiên cứu mới và những bài chuỗi PubMed bỏ sót. PubMed chỉ cho thấy điều này với các bài trong PubMed Central.</a:t>
-            </a:r>
-          </a:p>
-          <a:p>
-            <a:r>
-              <a:rPr lang="en-US" sz="1400" b="0" dirty="0"/>
-              <a:t>Tóm lại: chạy và báo cáo tìm kiếm trên PubMed, rồi dùng Scholar để kiểm tra không sót bài quan trọng nào.</a:t>
-            </a:r>
-          </a:p>
-          <a:p>
-            <a:r>
-              <a:rPr lang="en-US" sz="1400" b="0" dirty="0"/>
-              <a:t>Các cơ sở dữ liệu khác (Embase, Thư viện Cochrane, Web of Science, Scopus, CINAHL) có ở slide bổ sung 'Ngoài PubMed'. Với đề cương ở Cấp độ 1, PubMed cộng một sổ đăng ký thử nghiệm là đủ.</a:t>
-            </a:r>
-          </a:p>
-          <a:p>
-            <a:r>
-              <a:rPr lang="en-US" sz="1400" b="0" dirty="0"/>
-              <a:t>Hỏi cả lớp (chat): 'Đồng nghiệp tìm được bài hoàn hảo trên Google Scholar. Cần kiểm tra gì?' Mong đợi: đã bình duyệt chưa hay chỉ là bản thảo trước in? Tạp chí có uy tín không? (Tạp chí săn mồi: Buổi 8.)</a:t>
+              <a:t>Hỏi: 'Đồng nghiệp tìm được một bài rất hợp trên Google Scholar. Cần kiểm tra gì?' Mong đợi: đã bình duyệt hay là preprint, tạp chí có uy tín không.</a:t>
             </a:r>
           </a:p>
           <a:p>
@@ -1300,31 +1204,13 @@
           <a:p>
             <a:r>
               <a:rPr lang="en-US" sz="1400" b="0" dirty="0"/>
-              <a:t>Ý chính: trước khi bắt đầu bất kỳ nghiên cứu nào, hãy nắm tổng quan những gì đã biết về câu hỏi của mình. Bức tranh tổng thể tốt nhất là một tổng quan hệ thống: một tổng quan bạn tìm được, hoặc do chính bạn thực hiện.</a:t>
+              <a:t>Nếu đã có tổng quan tốt, gần đây trả lời câu hỏi của bạn, hãy dựa vào đó. Nếu chưa có hoặc đã cũ, khoảng trống đó là một phần lý do nghiên cứu.</a:t>
             </a:r>
           </a:p>
           <a:p>
             <a:r>
               <a:rPr lang="en-US" sz="1400" b="0" dirty="0"/>
-              <a:t>Tìm ở đâu: Thư viện Cochrane (các tổng quan hệ thống của Cochrane, chủ yếu về điều trị), PubMed với bộ lọc loại bài 'Systematic Review', và PROSPERO (https://www.crd.york.ac.uk/prospero/), sổ đăng ký quốc tế của các tổng quan hệ thống đang lên kế hoạch hoặc đang thực hiện.</a:t>
-            </a:r>
-          </a:p>
-          <a:p>
-            <a:r>
-              <a:rPr lang="en-US" sz="1400" b="0" dirty="0"/>
-              <a:t>Nếu một tổng quan mới và tốt đã trả lời câu hỏi của bạn, đừng làm lại: hãy dựa vào đó và chuyển câu hỏi sang khoảng trống còn lại. Nếu chưa có, hoặc tổng quan đã cũ, khoảng trống đó là một phần lý do cho nghiên cứu của bạn.</a:t>
-            </a:r>
-          </a:p>
-          <a:p>
-            <a:r>
-              <a:rPr lang="en-US" sz="1400" b="0" dirty="0"/>
-              <a:t>Tự làm tổng quan hệ thống và phân tích gộp là một khóa học riêng: Cấp độ 3 có một học phần dành riêng cho chủ đề này (Học phần A: tổng quan hệ thống và phân tích gộp).</a:t>
-            </a:r>
-          </a:p>
-          <a:p>
-            <a:r>
-              <a:rPr lang="en-US" sz="1400" b="0" dirty="0"/>
-              <a:t>Hỏi cả lớp (chat): 'Có ai từng bắt đầu một dự án rồi mới phát hiện nó đã được làm rồi không?'</a:t>
+              <a:t>Hỏi: 'Có ai từng bắt đầu một dự án rồi mới thấy người khác đã làm rồi không?'</a:t>
             </a:r>
           </a:p>
           <a:p>
@@ -1411,31 +1297,19 @@
           <a:p>
             <a:r>
               <a:rPr lang="en-US" sz="1400" b="0" dirty="0"/>
-              <a:t>Làm theo Course/Demos/s2_demo.md, Phần A (PubMed): chuỗi tìm kiếm chính xác, chỗ cần bấm và phương án dự phòng.</a:t>
+              <a:t>Kịch bản: s2_demo_VN.md, Phần A. Nói chậm để mọi người ghi số kết quả.</a:t>
             </a:r>
           </a:p>
           <a:p>
             <a:r>
               <a:rPr lang="en-US" sz="1400" b="0" dirty="0"/>
-              <a:t>Không hứa số kết quả. Dự kiến hàng chục nghìn cho 'septic shock' và vài nghìn cho chuỗi PICO đầy đủ. Con số thay đổi hằng ngày.</a:t>
+              <a:t>CLASSIC (lần đầu nhắc đến): Meyhoff, NEJM 2022, 1554 người lớn, tử vong 90 ngày không thay đổi. Nói điều này khi bài xuất hiện trong kết quả.</a:t>
             </a:r>
           </a:p>
           <a:p>
             <a:r>
               <a:rPr lang="en-US" sz="1400" b="0" dirty="0"/>
-              <a:t>CLASSIC (lần đầu được nhắc đến): một thử nghiệm ngẫu nhiên lớn, Meyhoff và cộng sự, N Engl J Med 2022, 'Restriction of Intravenous Fluid in ICU Patients with Septic Shock'. Tên viết tắt của Conservative versus Liberal Approach to Fluid Therapy of Septic Shock in Intensive Care (cách tiếp cận hạn chế so với tự do trong truyền dịch cho sốc nhiễm khuẩn tại hồi sức). Ở 1554 người lớn bị sốc nhiễm khuẩn tại các ICU châu Âu, hạn chế dịch truyền tĩnh mạch không làm thay đổi tử vong 90 ngày. Đây là thử nghiệm chính đằng sau ví dụ xuyên suốt, nên hãy giải thích khi nó xuất hiện trong kết quả.</a:t>
-            </a:r>
-          </a:p>
-          <a:p>
-            <a:r>
-              <a:rPr lang="en-US" sz="1400" b="0" dirty="0"/>
-              <a:t>Chia sẻ màn hình. Nói chậm và dừng sau mỗi bước để học viên ghi số kết quả vào phiếu. Mời lớp gợi ý từ đồng nghĩa cho các khối trong chat và thêm trực tiếp một, hai từ.</a:t>
-            </a:r>
-          </a:p>
-          <a:p>
-            <a:r>
-              <a:rPr lang="en-US" sz="1400" b="0" dirty="0"/>
-              <a:t>Nếu mạng của bạn bị lỗi, chuyển sang ảnh chụp màn hình (giảng viên thứ hai có thể chia sẻ). Không sửa lỗi trực tiếp.</a:t>
+              <a:t>Không hứa trước số kết quả. Nếu mất mạng, chuyển sang ảnh chụp màn hình.</a:t>
             </a:r>
           </a:p>
           <a:p>
@@ -1522,31 +1396,19 @@
           <a:p>
             <a:r>
               <a:rPr lang="en-US" sz="1400" b="0" dirty="0"/>
-              <a:t>Làm cá nhân: học viên viết chuỗi tìm kiếm vào phiếu bài tập hoặc một tệp văn bản. Chưa tìm kiếm ở bước này.</a:t>
+              <a:t>Mỗi người tự viết chuỗi. Sau 4 phút, mời 2-3 người đọc. Gõ lên màn hình và hỏi lớp thêm một từ đồng nghĩa.</a:t>
             </a:r>
           </a:p>
           <a:p>
             <a:r>
               <a:rPr lang="en-US" sz="1400" b="0" dirty="0"/>
-              <a:t>Sau 4 phút, gọi tên 2 hoặc 3 học viên (báo trước cho cả lớp từ đầu là sẽ gọi). Mỗi người bật micro và đọc to một khối hoặc cả chuỗi. Gõ lại chuỗi đó trên màn hình đang chia sẻ khi họ đọc, và hỏi cả lớp một từ đồng nghĩa còn thiếu.</a:t>
+              <a:t>Chú ý: thiếu ngoặc, trộn AND và OR trong một khối, có khối so sánh, dùng NOT không có lý do.</a:t>
             </a:r>
           </a:p>
           <a:p>
             <a:r>
               <a:rPr lang="en-US" sz="1400" b="0" dirty="0"/>
-              <a:t>Chú ý tìm: thiếu ngoặc, trộn AND và OR trong cùng khối, đưa nhóm so sánh thành một khối, dùng NOT không có lý do.</a:t>
-            </a:r>
-          </a:p>
-          <a:p>
-            <a:r>
-              <a:rPr lang="en-US" sz="1400" b="0" dirty="0"/>
-              <a:t>Ai xong sớm: thêm một bộ lọc và ghi lý do.</a:t>
-            </a:r>
-          </a:p>
-          <a:p>
-            <a:r>
-              <a:rPr lang="en-US" sz="1400" b="0" dirty="0"/>
-              <a:t>Thời gian: 5 phút. Phần 2.1 kết thúc lúc 0:50.</a:t>
+              <a:t>Thời gian: 5 phút. Phần 2.1 kết thúc lúc 20:20.</a:t>
             </a:r>
           </a:p>
         </p:txBody>
@@ -1626,20 +1488,8 @@
           <a:lstStyle/>
           <a:p>
             <a:r>
-              <a:rPr lang="en-US" sz="1400" b="1" dirty="0"/>
-              <a:t>PHẦN 2.2 (0:50-1:10, 20:20-20:40).</a:t>
-            </a:r>
-          </a:p>
-          <a:p>
-            <a:r>
               <a:rPr lang="en-US" sz="1400" b="0" dirty="0"/>
-              <a:t>Ý chính: hai thói quen bảo vệ mọi đề cương và bài báo: lưu tài liệu vào phần mềm quản lý tài liệu ngay từ ngày đầu, và không bao giờ sao chép câu chữ từ nguồn.</a:t>
-            </a:r>
-          </a:p>
-          <a:p>
-            <a:r>
-              <a:rPr lang="en-US" sz="1400" b="0" dirty="0"/>
-              <a:t>Thời gian: 30 giây.</a:t>
+              <a:t>Phần 2.2: 20:20-20:40. Thời gian: 30 giây.</a:t>
             </a:r>
           </a:p>
         </p:txBody>
@@ -1720,25 +1570,7 @@
           <a:p>
             <a:r>
               <a:rPr lang="en-US" sz="1400" b="0" dirty="0"/>
-              <a:t>Ý chính: không bao giờ gõ tay tài liệu tham khảo. Phần mềm quản lý tài liệu lưu mỗi bài một lần và định dạng theo mọi kiểu tạp chí.</a:t>
-            </a:r>
-          </a:p>
-          <a:p>
-            <a:r>
-              <a:rPr lang="en-US" sz="1400" b="0" dirty="0"/>
-              <a:t>Zotero (miễn phí, mã nguồn mở) và Mendeley (miễn phí) tích hợp với Word. EndNote phổ biến ở đại học nhưng trả phí. Trong khóa học này mọi người dùng Zotero (đã cài ở bài về nhà Buổi 1).</a:t>
-            </a:r>
-          </a:p>
-          <a:p>
-            <a:r>
-              <a:rPr lang="en-US" sz="1400" b="0" dirty="0"/>
-              <a:t>Tiện ích trình duyệt (ví dụ Zotero Connector) lưu bài từ trang tạp chí bằng một cú nhấp, thường kèm PDF.</a:t>
-            </a:r>
-          </a:p>
-          <a:p>
-            <a:r>
-              <a:rPr lang="en-US" sz="1400" b="0" dirty="0"/>
-              <a:t>Quan niệm sai: 'cuối cùng mới xử lý tài liệu tham khảo'. Lưu ngay chỉ mất vài giây, còn dựng lại danh mục mất hàng giờ và dễ sai.</a:t>
+              <a:t>Cả lớp dùng Zotero. Lưu ngay chỉ mất vài giây, làm lại danh sách mất hàng giờ.</a:t>
             </a:r>
           </a:p>
           <a:p>
@@ -1825,25 +1657,13 @@
           <a:p>
             <a:r>
               <a:rPr lang="en-US" sz="1400" b="0" dirty="0"/>
-              <a:t>Vancouver (đánh số theo thứ tự trích dẫn) được đa số tạp chí y khoa dùng và theo khuyến nghị ICMJE. APA (tác giả và năm) phổ biến ở điều dưỡng, tâm lý và khoa học xã hội.</a:t>
+              <a:t>Tạp chí nào cũng nêu kiểu trích dẫn trong hướng dẫn cho tác giả. Trích dẫn nghiên cứu gốc cho dữ kiện, không trích tổng quan nhắc lại nó.</a:t>
             </a:r>
           </a:p>
           <a:p>
             <a:r>
               <a:rPr lang="en-US" sz="1400" b="0" dirty="0"/>
-              <a:t>Mỗi tạp chí nêu kiểu trích dẫn trong 'Hướng dẫn cho tác giả' (Guide for authors). Phần mềm quản lý tài liệu đổi giữa hàng nghìn kiểu bằng một cú nhấp.</a:t>
-            </a:r>
-          </a:p>
-          <a:p>
-            <a:r>
-              <a:rPr lang="en-US" sz="1400" b="0" dirty="0"/>
-              <a:t>Ý chính: trích dẫn giúp người đọc kiểm tra nhận định của bạn. Khi có thể, hãy trích nghiên cứu gốc cho dữ kiện và con số, không trích bài tổng quan nhắc lại nó.</a:t>
-            </a:r>
-          </a:p>
-          <a:p>
-            <a:r>
-              <a:rPr lang="en-US" sz="1400" b="0" dirty="0"/>
-              <a:t>Hỏi cả lớp (chat): 'Kiểu nào dùng [1]?' Mong đợi: Vancouver. Ngay sau đây, phần trình diễn Zotero đổi qua lại giữa hai kiểu này.</a:t>
+              <a:t>Hỏi: 'Kiểu nào dùng [1]?' Mong đợi: Vancouver.</a:t>
             </a:r>
           </a:p>
           <a:p>
@@ -1930,19 +1750,7 @@
           <a:p>
             <a:r>
               <a:rPr lang="en-US" sz="1400" b="0" dirty="0"/>
-              <a:t>CÂU HỎI ÔN TẬP (0:00-0:10, 19:30-19:40). Làm cá nhân, gõ câu trả lời vào chat, 6 phút, rồi 2 phút gọi 2-3 người nói đáp án. Đáp án ở slide sau. Các câu hỏi cũng có trong phiếu bài tập Buổi 2.</a:t>
-            </a:r>
-          </a:p>
-          <a:p>
-            <a:r>
-              <a:rPr lang="en-US" sz="1400" b="0" dirty="0"/>
-              <a:t>Bài này cũng khơi lại từ vựng thứ Bảy tuần trước cho buổi tìm kiếm hôm nay.</a:t>
-            </a:r>
-          </a:p>
-          <a:p>
-            <a:r>
-              <a:rPr lang="en-US" sz="1400" b="0" dirty="0"/>
-              <a:t>Người đến muộn: cho tham gia từ câu 2.</a:t>
+              <a:t>Gõ câu trả lời vào chat: 6 phút, rồi mời 2-3 người. Đáp án ở slide sau.</a:t>
             </a:r>
           </a:p>
           <a:p>
@@ -2029,31 +1837,13 @@
           <a:p>
             <a:r>
               <a:rPr lang="en-US" sz="1400" b="0" dirty="0"/>
-              <a:t>Kịch bản cho giảng viên: Course/Demos/s2_demo.md, Phần B (Bước 6), gồm chỗ cần bấm, lời cần nói và cách xử lý khi Zotero lỗi. Cùng kịch bản đó có ở Course/Demos/s2_demo.pdf và trang 'Trình diễn Buổi 2' trên website khóa học.</a:t>
+              <a:t>Kịch bản: s2_demo_VN.md, Phần B. Mọi người làm lại từng bước trên máy mình. Ai bị lỗi Zotero thì xem trước, sửa sau với giảng viên thứ hai.</a:t>
             </a:r>
           </a:p>
           <a:p>
             <a:r>
               <a:rPr lang="en-US" sz="1400" b="0" dirty="0"/>
-              <a:t>Các từ trong dấu nháy trên slide là tên nút của Zotero trong Word, giữ nguyên tiếng Anh.</a:t>
-            </a:r>
-          </a:p>
-          <a:p>
-            <a:r>
-              <a:rPr lang="en-US" sz="1400" b="0" dirty="0"/>
-              <a:t>Chuẩn bị: Zotero desktop và plug-in Word đã cài, một thư viện thử trống, một tài liệu Word trắng.</a:t>
-            </a:r>
-          </a:p>
-          <a:p>
-            <a:r>
-              <a:rPr lang="en-US" sz="1400" b="0" dirty="0"/>
-              <a:t>Mọi người đã cài Zotero ở bài về nhà Buổi 1, nên có thể làm lại từng bước trên máy của mình. Ai cài chưa được thì xem lúc này và sửa sau buổi học với giảng viên thứ hai.</a:t>
-            </a:r>
-          </a:p>
-          <a:p>
-            <a:r>
-              <a:rPr lang="en-US" sz="1400" b="0" dirty="0"/>
-              <a:t>Nếu Zotero lỗi, dùng ảnh chụp màn hình và nói 'cùng tệp này dùng được trong Mendeley và EndNote'.</a:t>
+              <a:t>Nếu Zotero của giảng viên lỗi, chiếu ảnh chụp màn hình.</a:t>
             </a:r>
           </a:p>
           <a:p>
@@ -2140,43 +1930,19 @@
           <a:p>
             <a:r>
               <a:rPr lang="en-US" sz="1400" b="0" dirty="0"/>
-              <a:t>Bên trái: một câu trong phần kết luận của tóm tắt Bài báo 1 (trích nguyên văn có ghi nguồn). Câu ví dụ để nguyên tiếng Anh vì đạo văn được kiểm tra trên ngôn ngữ của bài báo.</a:t>
+              <a:t>Viết chắp vá (patchwriting) là đạo văn, dù có trích dẫn. Cách làm: đọc, gấp bài báo, viết theo trí nhớ, kiểm tra, trích dẫn.</a:t>
             </a:r>
           </a:p>
           <a:p>
             <a:r>
               <a:rPr lang="en-US" sz="1400" b="0" dirty="0"/>
-              <a:t>Ở giữa: 'viết chắp vá' (patchwriting): cùng câu đó chỉ thay vài từ. Dù có trích dẫn, đây vẫn là đạo văn vì cấu trúc và phần lớn từ ngữ bị sao chép. Phần mềm kiểm tra trùng lặp của tạp chí phát hiện dễ dàng.</a:t>
+              <a:t>Hỏi: 'Chép phần Phương pháp từ bài báo cũ của chính mình có được không?' Mong đợi: đó là tái sử dụng văn bản, xem chính sách của tạp chí.</a:t>
             </a:r>
           </a:p>
           <a:p>
             <a:r>
               <a:rPr lang="en-US" sz="1400" b="0" dirty="0"/>
-              <a:t>Bên phải: diễn đạt lại thật sự, với cấu trúc mới, thêm bối cảnh từ bài báo (pilot, 48 người bệnh, loại dịch nào) và có trích dẫn.</a:t>
-            </a:r>
-          </a:p>
-          <a:p>
-            <a:r>
-              <a:rPr lang="en-US" sz="1400" b="0" dirty="0"/>
-              <a:t>Cách làm: đọc, gấp bài báo, viết theo trí nhớ, kiểm tra lại dữ kiện, trích dẫn. Nếu cần nguyên văn, dùng ngoặc kép kèm trích dẫn. Tuy vậy, trong viết y khoa hiếm khi trích nguyên văn.</a:t>
-            </a:r>
-          </a:p>
-          <a:p>
-            <a:r>
-              <a:rPr lang="en-US" sz="1400" b="0" dirty="0"/>
-              <a:t>Quan niệm sai: 'đã trích dẫn thì được chép'. Trích dẫn ghi công cho ý tưởng, nhưng không cho phép chép câu chữ. Công cụ AI viết lại câu cũng không giải quyết được. Bạn vẫn chịu trách nhiệm (Buổi 7).</a:t>
-            </a:r>
-          </a:p>
-          <a:p>
-            <a:r>
-              <a:rPr lang="en-US" sz="1400" b="0" dirty="0"/>
-              <a:t>Hỏi cả lớp (chat): 'Chép phần Phương pháp từ bài báo cũ của chính mình có được không?' Mong đợi: đó là tái sử dụng văn bản. Xem chính sách của tạp chí, và thường phải viết lại hoặc trích dẫn.</a:t>
-            </a:r>
-          </a:p>
-          <a:p>
-            <a:r>
-              <a:rPr lang="en-US" sz="1400" b="0" dirty="0"/>
-              <a:t>Thời gian: 3 phút. Bài tập 2 trong phiếu luyện kỹ năng này ở nhà.</a:t>
+              <a:t>Thời gian: 3 phút.</a:t>
             </a:r>
           </a:p>
         </p:txBody>
@@ -2257,19 +2023,7 @@
           <a:p>
             <a:r>
               <a:rPr lang="en-US" sz="1400" b="0" dirty="0"/>
-              <a:t>Kiến thức phổ thông ('nhiễm khuẩn huyết là một cấp cứu') không cần trích dẫn. Dữ kiện và con số cụ thể thì cần.</a:t>
-            </a:r>
-          </a:p>
-          <a:p>
-            <a:r>
-              <a:rPr lang="en-US" sz="1400" b="0" dirty="0"/>
-              <a:t>Trích một bài chỉ thấy được nhắc lại ở nơi khác sẽ lan truyền lỗi. Hãy kiểm tra bài gốc.</a:t>
-            </a:r>
-          </a:p>
-          <a:p>
-            <a:r>
-              <a:rPr lang="en-US" sz="1400" b="0" dirty="0"/>
-              <a:t>Công cụ trò chuyện AI có thể bịa ra tài liệu tham khảo trông như thật. Mọi tài liệu phải tìm được trên PubMed hoặc trang tạp chí.</a:t>
+              <a:t>Kiến thức phổ thông không cần trích dẫn. Dữ kiện và con số cụ thể thì cần. Kiểm tra mọi tài liệu do AI gợi ý trên PubMed.</a:t>
             </a:r>
           </a:p>
           <a:p>
@@ -2356,7 +2110,7 @@
           <a:p>
             <a:r>
               <a:rPr lang="en-US" sz="1400" b="0" dirty="0"/>
-              <a:t>Đáp án: 1 Không được: viết chắp vá là đạo văn dù có trích dẫn. 2 Được (nhưng hiếm trong viết y khoa). 3 Không được: phát hiện của người khác cần trích dẫn. 4 Không được: có thể lặp lại lỗi, nên hãy đọc và trích bài gốc.</a:t>
+              <a:t>Đáp án: 1 Không được (viết chắp vá). 2 Được, nhưng hiếm. 3 Không được, cần trích dẫn. 4 Không được, đọc và trích dẫn bài gốc.</a:t>
             </a:r>
           </a:p>
           <a:p>
@@ -2443,55 +2197,25 @@
           <a:p>
             <a:r>
               <a:rPr lang="en-US" sz="1400" b="0" dirty="0"/>
-              <a:t>Bài báo tạp chí trên PubMed chỉ là phần nổi của tảng băng. Dưới mặt nước là tài liệu xám: mọi thứ không đăng trên tạp chí. Trong khóa học này tài liệu xám bao gồm cả sổ đăng ký thử nghiệm (như trong bảng thuật ngữ của khóa học), cùng với tóm tắt hội nghị, luận văn, báo cáo, hướng dẫn và bản thảo trước in (preprint).</a:t>
+              <a:t>Kết quả âm tính ít được công bố hơn (sai lệch xuất bản), nên cần tìm cả phần dưới mặt nước.</a:t>
             </a:r>
           </a:p>
           <a:p>
             <a:r>
               <a:rPr lang="en-US" sz="1400" b="0" dirty="0"/>
-              <a:t>Vì sao quan trọng: nghiên cứu có kết quả âm tính hoặc gây thất vọng ít được công bố hơn (sai lệch xuất bản, publication bias), nên y văn đã công bố có thể trông tích cực hơn sự thật. Tìm cả phần dưới mặt nước làm giảm sai lệch này trong những gì bạn tìm được.</a:t>
+              <a:t>So sánh kết cục chính đã đăng ký với bài báo. Bài báo 1 đăng ký NCT04947904, trước khi nhận người bệnh đầu tiên.</a:t>
             </a:r>
           </a:p>
           <a:p>
             <a:r>
               <a:rPr lang="en-US" sz="1400" b="0" dirty="0"/>
-              <a:t>Sổ đăng ký thử nghiệm là gì: một cơ sở dữ liệu công khai, nơi thử nghiệm lâm sàng được ghi lại trước khi tuyển người bệnh đầu tiên. Hồ sơ nêu câu hỏi, thiết kế, kết cục chính dự kiến, cỡ mẫu dự kiến và tình trạng (đang tuyển, đã xong, đã đăng kết quả). Các tạp chí y khoa theo khuyến nghị ICMJE chỉ đăng thử nghiệm đã được đăng ký.</a:t>
+              <a:t>Hỏi: 'Vì sao kiểm tra sổ đăng ký trước khi làm thử nghiệm của mình?' Mong đợi: có thể người khác đang làm đúng nghiên cứu đó.</a:t>
             </a:r>
           </a:p>
           <a:p>
             <a:r>
               <a:rPr lang="en-US" sz="1400" b="0" dirty="0"/>
-              <a:t>Các sổ đăng ký chính: ClinicalTrials.gov (do Thư viện Y khoa Quốc gia Hoa Kỳ vận hành) và Nền tảng Đăng ký Thử nghiệm Lâm sàng Quốc tế của WHO (ICTRP), cho phép tìm cùng lúc trong nhiều sổ đăng ký quốc gia. Tổng quan hệ thống cũng được đăng ký theo cách tương tự, trên PROSPERO.</a:t>
-            </a:r>
-          </a:p>
-          <a:p>
-            <a:r>
-              <a:rPr lang="en-US" sz="1400" b="0" dirty="0"/>
-              <a:t>Cách dùng: so sánh kết cục chính dự kiến với bài báo đã công bố. Đổi kết cục là dấu hiệu cảnh báo. Sổ đăng ký cũng cho thấy các thử nghiệm đã xong nhưng chưa bao giờ công bố kết quả.</a:t>
-            </a:r>
-          </a:p>
-          <a:p>
-            <a:r>
-              <a:rPr lang="en-US" sz="1400" b="0" dirty="0"/>
-              <a:t>Bài báo 1 được đăng ký số NCT04947904, trước khi tuyển người bệnh đầu tiên. Thói quen tốt khi làm bài về nhà: mở hồ sơ đăng ký và so sánh kết cục chính dự kiến với bài báo.</a:t>
-            </a:r>
-          </a:p>
-          <a:p>
-            <a:r>
-              <a:rPr lang="en-US" sz="1400" b="0" dirty="0"/>
-              <a:t>Bản thảo trước in (ví dụ medRxiv) chưa qua bình duyệt. Hãy đọc thật cẩn thận.</a:t>
-            </a:r>
-          </a:p>
-          <a:p>
-            <a:r>
-              <a:rPr lang="en-US" sz="1400" b="0" dirty="0"/>
-              <a:t>Hỏi cả lớp (chat): 'Vì sao nên xem sổ đăng ký trước khi bắt đầu thử nghiệm của mình?' Mong đợi: có thể ai đó đang làm đúng nghiên cứu đó.</a:t>
-            </a:r>
-          </a:p>
-          <a:p>
-            <a:r>
-              <a:rPr lang="en-US" sz="1400" b="0" dirty="0"/>
-              <a:t>Thời gian: 3 phút. Phần 2.2 kết thúc lúc 1:10, rồi giải lao.</a:t>
+              <a:t>Thời gian: 3 phút. Phần 2.2 kết thúc lúc 20:40.</a:t>
             </a:r>
           </a:p>
         </p:txBody>
@@ -2571,26 +2295,8 @@
           <a:lstStyle/>
           <a:p>
             <a:r>
-              <a:rPr lang="en-US" sz="1400" b="1" dirty="0"/>
-              <a:t>GIẢI LAO (1:10-1:25, 20:40-20:55).</a:t>
-            </a:r>
-          </a:p>
-          <a:p>
-            <a:r>
               <a:rPr lang="en-US" sz="1400" b="0" dirty="0"/>
-              <a:t>Nói: hãy đứng dậy, vươn vai và cho mắt nghỉ. Trước khi bắt đầu lại, mở Bài báo 1 (link trong chat).</a:t>
-            </a:r>
-          </a:p>
-          <a:p>
-            <a:r>
-              <a:rPr lang="en-US" sz="1400" b="0" dirty="0"/>
-              <a:t>Trong giờ giải lao: dán vào chat đường link tới Bài báo 1 dạng PDF sạch cho bài tập đọc (Course/Papers/Paper 1 - Boulet 2024 Crit Care (RCT) - original.pdf, hoặc link DOI ở trang 'Hai bài báo' trên website khóa học).</a:t>
-            </a:r>
-          </a:p>
-          <a:p>
-            <a:r>
-              <a:rPr lang="en-US" sz="1400" b="0" dirty="0"/>
-              <a:t>Ghi rõ trong chat giờ bắt đầu lại, và bắt đầu đúng giờ.</a:t>
+              <a:t>Giải lao 20:40-20:55. Dán giờ bắt đầu lại và link tệp PDF gốc của Bài báo 1 vào chat.</a:t>
             </a:r>
           </a:p>
         </p:txBody>
@@ -2670,20 +2376,8 @@
           <a:lstStyle/>
           <a:p>
             <a:r>
-              <a:rPr lang="en-US" sz="1400" b="1" dirty="0"/>
-              <a:t>PHẦN 2.3 (1:25-2:05, 20:55-21:35).</a:t>
-            </a:r>
-          </a:p>
-          <a:p>
-            <a:r>
               <a:rPr lang="en-US" sz="1400" b="0" dirty="0"/>
-              <a:t>Ý chính: người thầy thuốc bận rộn cần một quy trình đọc. Trong 15 phút có thể quyết định bài báo có liên quan không, tìm thấy gì và có đáng tin không.</a:t>
-            </a:r>
-          </a:p>
-          <a:p>
-            <a:r>
-              <a:rPr lang="en-US" sz="1400" b="0" dirty="0"/>
-              <a:t>Kiểm tra trong chat rằng mọi người đã mở tóm tắt gốc của Bài báo 1 trước bài tập.</a:t>
+              <a:t>Phần 2.3: 20:55-21:35. Kiểm tra mọi người đã mở Bài báo 1.</a:t>
             </a:r>
           </a:p>
           <a:p>
@@ -2770,43 +2464,25 @@
           <a:p>
             <a:r>
               <a:rPr lang="en-US" sz="1400" b="0" dirty="0"/>
-              <a:t>IMRaD = Đặt vấn đề (Introduction), Phương pháp (Methods), Kết quả (Results) và Bàn luận (Discussion): cấu trúc chuẩn của bài báo nghiên cứu gốc.</a:t>
+              <a:t>Câu hỏi ở cuối phần Đặt vấn đề, kết cục chính ở phần Phương pháp, con số chính ở phần Kết quả.</a:t>
             </a:r>
           </a:p>
           <a:p>
             <a:r>
               <a:rPr lang="en-US" sz="1400" b="0" dirty="0"/>
-              <a:t>Tiêu đề và tóm tắt nằm trên IMRaD và được đọc đầu tiên. Chúng không phải một chữ cái của IMRaD. Chữ 'a' viết thường trong IMRaD là 'and' (và), không phải 'abstract' (tóm tắt).</a:t>
+              <a:t>Bàn luận là diễn giải của tác giả. Kết quả mới là bằng chứng.</a:t>
             </a:r>
           </a:p>
           <a:p>
             <a:r>
               <a:rPr lang="en-US" sz="1400" b="0" dirty="0"/>
-              <a:t>Đồng hồ cát: Đặt vấn đề thu hẹp từ vấn đề rộng đến câu hỏi cụ thể. Phương pháp và Kết quả hẹp và thuần dữ kiện. Bàn luận mở rộng lại tới ý nghĩa cho thực hành.</a:t>
+              <a:t>Hỏi: 'Tìm ai được đưa vào nghiên cứu ở đâu?' Mong đợi: Phương pháp và Kết quả (sơ đồ, Bảng 1).</a:t>
             </a:r>
           </a:p>
           <a:p>
             <a:r>
               <a:rPr lang="en-US" sz="1400" b="0" dirty="0"/>
-              <a:t>Ý chính: biết hình dạng là biết chỗ cần nhìn. Câu hỏi ở cuối phần Đặt vấn đề, kết cục chính ở Phương pháp, và con số chính ở Kết quả (và tóm tắt).</a:t>
-            </a:r>
-          </a:p>
-          <a:p>
-            <a:r>
-              <a:rPr lang="en-US" sz="1400" b="0" dirty="0"/>
-              <a:t>Quan niệm sai: 'phần Bàn luận cho biết kết quả'. Bàn luận là diễn giải của tác giả. Kết quả mới là bằng chứng.</a:t>
-            </a:r>
-          </a:p>
-          <a:p>
-            <a:r>
-              <a:rPr lang="en-US" sz="1400" b="0" dirty="0"/>
-              <a:t>Hỏi cả lớp (chat): 'Tìm ai được đưa vào nghiên cứu ở đâu?' Mong đợi: Phương pháp (tiêu chuẩn chọn) và Kết quả (sơ đồ, Bảng 1).</a:t>
-            </a:r>
-          </a:p>
-          <a:p>
-            <a:r>
-              <a:rPr lang="en-US" sz="1400" b="0" dirty="0"/>
-              <a:t>Thời gian: 4 phút. Buổi 7 và 8 dạy cách viết từng phần.</a:t>
+              <a:t>Thời gian: 4 phút.</a:t>
             </a:r>
           </a:p>
         </p:txBody>
@@ -2887,31 +2563,7 @@
           <a:p>
             <a:r>
               <a:rPr lang="en-US" sz="1400" b="0" dirty="0"/>
-              <a:t>Đừng đọc từ đầu đến cuối. Bước 1, tiêu đề (30 giây): có liên quan đến câu hỏi của tôi? Bước 2, tóm tắt (3 phút): PICO, thiết kế, kết quả chính. Đa số bài bị loại ở đây.</a:t>
-            </a:r>
-          </a:p>
-          <a:p>
-            <a:r>
-              <a:rPr lang="en-US" sz="1400" b="0" dirty="0"/>
-              <a:t>Bước 3, hình và bảng (4 phút): sơ đồ tuyển chọn (mất ai), Bảng 1 (các nhóm có tương đồng không), bảng kết quả chính.</a:t>
-            </a:r>
-          </a:p>
-          <a:p>
-            <a:r>
-              <a:rPr lang="en-US" sz="1400" b="0" dirty="0"/>
-              <a:t>Bước 4, phương pháp (5 phút): ai, chọn thế nào, kết cục chính, chống sai lệch ra sao. Bước 5, bàn luận (2-3 phút): hạn chế, và kết luận có khớp với dữ liệu không?</a:t>
-            </a:r>
-          </a:p>
-          <a:p>
-            <a:r>
-              <a:rPr lang="en-US" sz="1400" b="0" dirty="0"/>
-              <a:t>Ý chính: chỉ đọc toàn bộ Đặt vấn đề và Bàn luận với bài sẽ trích dẫn hoặc thẩm định sâu.</a:t>
-            </a:r>
-          </a:p>
-          <a:p>
-            <a:r>
-              <a:rPr lang="en-US" sz="1400" b="0" dirty="0"/>
-              <a:t>Quan niệm sai: 'chỉ đọc tóm tắt là đủ'. Tóm tắt bỏ qua hạn chế và có thể bị thổi phồng (các slide tiếp).</a:t>
+              <a:t>Phần lớn bài bị loại ngay ở phần tóm tắt. Tóm tắt thường bỏ qua hạn chế và có thể thổi phồng.</a:t>
             </a:r>
           </a:p>
           <a:p>
@@ -2998,31 +2650,7 @@
           <a:p>
             <a:r>
               <a:rPr lang="en-US" sz="1400" b="0" dirty="0"/>
-              <a:t>Đa số tạp chí lâm sàng yêu cầu tóm tắt có cấu trúc: Bối cảnh, Phương pháp, Kết quả, Kết luận (cộng số đăng ký với thử nghiệm).</a:t>
-            </a:r>
-          </a:p>
-          <a:p>
-            <a:r>
-              <a:rPr lang="en-US" sz="1400" b="0" dirty="0"/>
-              <a:t>Phương pháp phải nêu thiết kế, bối cảnh, đối tượng, can thiệp hoặc phơi nhiễm, so sánh và kết cục chính.</a:t>
-            </a:r>
-          </a:p>
-          <a:p>
-            <a:r>
-              <a:rPr lang="en-US" sz="1400" b="0" dirty="0"/>
-              <a:t>Kết quả phải có số sàng lọc và phân tích, và kết quả chính dưới dạng cỡ tác động kèm khoảng tin cậy (KTC) 95%, không chỉ giá trị p hay chữ 'có ý nghĩa'.</a:t>
-            </a:r>
-          </a:p>
-          <a:p>
-            <a:r>
-              <a:rPr lang="en-US" sz="1400" b="0" dirty="0"/>
-              <a:t>Kết luận trả lời câu hỏi chính, không hơn, không kém. Các hướng dẫn báo cáo có bảng kiểm cho tóm tắt (CONSORT for Abstracts, STROBE), học ở Buổi 8.</a:t>
-            </a:r>
-          </a:p>
-          <a:p>
-            <a:r>
-              <a:rPr lang="en-US" sz="1400" b="0" dirty="0"/>
-              <a:t>Hỏi cả lớp (chat): 'Tóm tắt chỉ viết: tử vong thấp hơn có ý nghĩa (p &lt; 0.05). Thiếu gì?' Mong đợi: tỷ lệ thực tế, cỡ tác động và khoảng tin cậy.</a:t>
+              <a:t>Hỏi: 'Tóm tắt chỉ ghi: tử vong thấp hơn có ý nghĩa (p &lt; 0.05). Thiếu gì?' Mong đợi: tỷ lệ, mức độ tác động và KTC 95%.</a:t>
             </a:r>
           </a:p>
           <a:p>
@@ -3109,19 +2737,13 @@
           <a:p>
             <a:r>
               <a:rPr lang="en-US" sz="1400" b="0" dirty="0"/>
-              <a:t>Đi qua năm đáp án trong 2 phút. Bình chọn nhanh: bạn đúng bao nhiêu câu (0-3, 4 hay 5)?</a:t>
+              <a:t>Bình chọn: đúng bao nhiêu câu (0-3, 4 hay 5)? Nếu nhiều người sai câu 4 hoặc 5, dành một phút cho động từ đo được và H0.</a:t>
             </a:r>
           </a:p>
           <a:p>
             <a:r>
               <a:rPr lang="en-US" sz="1400" b="0" dirty="0"/>
-              <a:t>Nếu nhiều người sai câu 4 hoặc 5, dành thêm một phút: mục tiêu dùng động từ đo được, và H0 luôn nói 'không khác biệt'.</a:t>
-            </a:r>
-          </a:p>
-          <a:p>
-            <a:r>
-              <a:rPr lang="en-US" sz="1400" b="0" dirty="0"/>
-              <a:t>Thời gian: 2 phút. Phần 2.1 bắt đầu lúc 0:10.</a:t>
+              <a:t>Thời gian: 2 phút. Phần 2.1 bắt đầu lúc 19:40.</a:t>
             </a:r>
           </a:p>
         </p:txBody>
@@ -3202,31 +2824,13 @@
           <a:p>
             <a:r>
               <a:rPr lang="en-US" sz="1400" b="0" dirty="0"/>
-              <a:t>Ví dụ mẫu (số liệu minh họa, không từ thử nghiệm thật).</a:t>
+              <a:t>Số liệu minh họa. Với mỗi kết quả, hỏi: lớn bao nhiêu, chắc đến đâu, đo lúc nào?</a:t>
             </a:r>
           </a:p>
           <a:p>
             <a:r>
               <a:rPr lang="en-US" sz="1400" b="0" dirty="0"/>
-              <a:t>Bên trái: 'thấp hơn có ý nghĩa (p &lt; 0.05)' không cho biết khác biệt lớn cỡ nào, chắc chắn đến đâu, hay đo lúc nào.</a:t>
-            </a:r>
-          </a:p>
-          <a:p>
-            <a:r>
-              <a:rPr lang="en-US" sz="1400" b="0" dirty="0"/>
-              <a:t>Bên phải: tỷ lệ mỗi nhóm, độ lớn khác biệt (8 điểm phần trăm), khoảng tin cậy (KTC) 95% và mốc thời gian (28 ngày). Người đọc có thể đánh giá khác biệt có ý nghĩa lâm sàng không.</a:t>
-            </a:r>
-          </a:p>
-          <a:p>
-            <a:r>
-              <a:rPr lang="en-US" sz="1400" b="0" dirty="0"/>
-              <a:t>Ý chính: hỏi 'lớn cỡ nào, chắc đến đâu, lúc nào?' với mọi kết quả bạn đọc. Khoảng tin cậy được giải thích kỹ ở Buổi 6.</a:t>
-            </a:r>
-          </a:p>
-          <a:p>
-            <a:r>
-              <a:rPr lang="en-US" sz="1400" b="0" dirty="0"/>
-              <a:t>Hỏi cả lớp (bình chọn, trái hay phải): 'Câu nào đủ tin cậy để thay đổi thực hành?' Mong đợi: câu bên phải, vì thấy được độ lớn và độ không chắc chắn.</a:t>
+              <a:t>Bình chọn: 'Bạn tin câu nào?' Mong đợi: câu bên phải.</a:t>
             </a:r>
           </a:p>
           <a:p>
@@ -3313,37 +2917,13 @@
           <a:p>
             <a:r>
               <a:rPr lang="en-US" sz="1400" b="0" dirty="0"/>
-              <a:t>Thổi phồng (spin) = trình bày làm kết quả trông tốt hơn mức dữ liệu cho phép. Hay gặp trong tóm tắt của thử nghiệm có kết cục chính không có ý nghĩa.</a:t>
+              <a:t>Dòng 1: p = 0.42 không phải bằng chứng có khác biệt. Dòng 3: tiêu đề Bài báo 2 dùng 'Impact', nhưng kết luận tóm tắt viết đúng là 'associated'.</a:t>
             </a:r>
           </a:p>
           <a:p>
             <a:r>
               <a:rPr lang="en-US" sz="1400" b="0" dirty="0"/>
-              <a:t>Dòng 1: phần Bàn luận của Bài báo 1 gọi p = 0.42 của kết cục chính là 'xu hướng không có ý nghĩa'. p = 0.42 không phải bằng chứng có khác biệt. Cách viết đúng là 'không có khác biệt có ý nghĩa, và khoảng tin cậy rộng'. Đáng khen là kết luận trong phần tóm tắt của Bài báo 1 không thổi phồng.</a:t>
-            </a:r>
-          </a:p>
-          <a:p>
-            <a:r>
-              <a:rPr lang="en-US" sz="1400" b="0" dirty="0"/>
-              <a:t>Dòng 2: nhấn mạnh một kết cục phụ có lợi khi kết cục chính không cho thấy gì.</a:t>
-            </a:r>
-          </a:p>
-          <a:p>
-            <a:r>
-              <a:rPr lang="en-US" sz="1400" b="0" dirty="0"/>
-              <a:t>Dòng 3: từ ngữ nhân quả cho dữ liệu quan sát. Tiêu đề Bài báo 2 viết 'Impact of...' (tác động) dù thuần tập chỉ cho thấy liên quan (phần kết luận tóm tắt viết đúng là 'associated').</a:t>
-            </a:r>
-          </a:p>
-          <a:p>
-            <a:r>
-              <a:rPr lang="en-US" sz="1400" b="0" dirty="0"/>
-              <a:t>Dòng 4: tuyên bố cải thiện dựa trên thay đổi trước-sau trong một nhóm, không so sánh giữa các nhóm.</a:t>
-            </a:r>
-          </a:p>
-          <a:p>
-            <a:r>
-              <a:rPr lang="en-US" sz="1400" b="0" dirty="0"/>
-              <a:t>Quan niệm sai: 'bình duyệt loại bỏ hết thổi phồng'. Bình duyệt giảm bớt, nhưng thổi phồng vẫn thường gặp trong bài đã công bố.</a:t>
+              <a:t>Bình duyệt giảm thổi phồng nhưng không loại bỏ hết.</a:t>
             </a:r>
           </a:p>
           <a:p>
@@ -3430,13 +3010,13 @@
           <a:p>
             <a:r>
               <a:rPr lang="en-US" sz="1400" b="0" dirty="0"/>
-              <a:t>Làm từng câu một. Cho cả lớp 30 giây suy nghĩ, rồi gọi tên một hoặc hai học viên bật micro nói thổi phồng ở đâu và sẽ viết lại thế nào. Hỏi cả lớp có ai không đồng ý trước khi đưa đáp án.</a:t>
+              <a:t>Từng câu một. 30 giây suy nghĩ, rồi mời một hai người.</a:t>
             </a:r>
           </a:p>
           <a:p>
             <a:r>
               <a:rPr lang="en-US" sz="1400" b="0" dirty="0"/>
-              <a:t>Đáp án: 1 Từ nhân quả cho thiết kế quan sát: viết 'có liên quan với tử vong cao hơn'. 2 p = 0.31 không phải bằng chứng có khác biệt: viết 'không có khác biệt có ý nghĩa, và KTC rộng'. 3 Tiêu điểm là kết cục phụ: nêu kết quả chính trước. 4 Thay đổi trước-sau không có nhóm so sánh, và các yếu tố khác có thể đã thay đổi: viết 'tử vong thấp hơn sau khi áp dụng, nhưng không có nhóm chứng nên không thể quy cho quy trình'.</a:t>
+              <a:t>Đáp án: 1 Viết 'có liên quan với'. 2 p = 0.31: không khác biệt có ý nghĩa, KTC rộng. 3 Nêu kết cục chính trước. 4 Không có nhóm chứng, nên không quy được thay đổi cho quy trình.</a:t>
             </a:r>
           </a:p>
           <a:p>
@@ -3523,31 +3103,25 @@
           <a:p>
             <a:r>
               <a:rPr lang="en-US" sz="1400" b="0" dirty="0"/>
-              <a:t>Làm cá nhân, yên lặng trong 8 phút (có thể tắt camera), rồi 4 phút mọi người gõ kết cục chính và kết quả chính vào chat và giảng viên nhận xét. Người mới cần thêm thời gian. Đừng vội.</a:t>
+              <a:t>8 phút tự làm, rồi 4 phút mọi người gõ kết cục chính và kết quả chính vào chat.</a:t>
             </a:r>
           </a:p>
           <a:p>
             <a:r>
               <a:rPr lang="en-US" sz="1400" b="0" dirty="0"/>
-              <a:t>Bài báo nằm ở: Course/Papers/Paper 1 - Boulet 2024 Crit Care (RCT) - original.pdf (bản gốc sạch, không có chú giải của khóa học). Bài báo truy cập mở (CC BY-NC-ND), nên được chia sẻ bản gốc không chỉnh sửa. Trang 'Hai bài báo' trên website khóa học có link DOI (10.1186/s13054-024-05155-z), và giảng viên dán link vào chat trong giờ giải lao. Các bản chú giải (tiếng Anh và tiếng Việt, cũng trong Course/Papers) dùng sau bài tập.</a:t>
+              <a:t>Ô khó nhất: kết cục chính là cân bằng dịch ngày 5, không phải tử vong. KTC 95% (-15.2 đến 41.6) cắt qua số 0.</a:t>
             </a:r>
           </a:p>
           <a:p>
             <a:r>
               <a:rPr lang="en-US" sz="1400" b="0" dirty="0"/>
-              <a:t>Theo dõi chat. Ô khó nhất: kết cục chính (nhiều người ghi 'tử vong', nhưng thực ra là cân bằng dịch tích lũy ngày 5) và kết quả chính (cần chép chênh lệch kèm KTC 95%, -15.2 đến 41.6, cắt qua số 0).</a:t>
+              <a:t>Ai xong sớm: tìm từ nói quá trong tiêu đề Bài báo 2 ('Impact').</a:t>
             </a:r>
           </a:p>
           <a:p>
             <a:r>
               <a:rPr lang="en-US" sz="1400" b="0" dirty="0"/>
-              <a:t>Ai xong sớm: đọc tóm tắt Bài báo 2 và tìm từ trong tiêu đề nói quá so với thiết kế ('Impact').</a:t>
-            </a:r>
-          </a:p>
-          <a:p>
-            <a:r>
-              <a:rPr lang="en-US" sz="1400" b="0" dirty="0"/>
-              <a:t>Thời gian: 12 phút. Đáp án ở slide sau.</a:t>
+              <a:t>Thời gian: 12 phút.</a:t>
             </a:r>
           </a:p>
         </p:txBody>
@@ -3628,31 +3202,25 @@
           <a:p>
             <a:r>
               <a:rPr lang="en-US" sz="1400" b="0" dirty="0"/>
-              <a:t>Đi nhanh qua bảng. Hỏi từng dòng trong chat trước khi hiện đáp án.</a:t>
+              <a:t>Hỏi từng dòng trong chat trước khi hiện đáp án.</a:t>
             </a:r>
           </a:p>
           <a:p>
             <a:r>
               <a:rPr lang="en-US" sz="1400" b="0" dirty="0"/>
-              <a:t>Điểm chính. (1) Thử nghiệm thí điểm (pilot) với 48 người bệnh được phân tích. (2) Kết cục chính là cân bằng dịch tích lũy ngày 5, không phải tử vong. (3) KTC của chênh lệch (-15.2 đến 41.6 ml/kg) chứa số 0, nên không có bằng chứng khác biệt. (4) Kết luận tóm tắt khớp với kết quả (thực hành tốt). (5) Thử nghiệm đã được đăng ký.</a:t>
+              <a:t>Ý chính: thí điểm, 48 người bệnh. Kết cục là cân bằng dịch, không phải tử vong. KTC chứa số 0. Kết luận khớp kết quả. Đã đăng ký.</a:t>
             </a:r>
           </a:p>
           <a:p>
             <a:r>
               <a:rPr lang="en-US" sz="1400" b="0" dirty="0"/>
-              <a:t>Nếu có học viên tinh ý hỏi: trung vị (6.9 vs 35.0 ml/kg) chênh nhau nhiều hơn mức chênh lệch được báo cáo 13.2 vì 13.2 là chênh lệch giữa hai trung bình (phần Phương pháp báo cáo chênh lệch trung bình kèm KTC 95%), không phải chênh lệch giữa hai trung vị. Bản chú giải của khóa học có nêu điểm không khớp này. Để dành cho Buổi 6-8.</a:t>
+              <a:t>Nếu có người hỏi: 13.2 là chênh lệch trung bình, không phải trung vị. Để sau.</a:t>
             </a:r>
           </a:p>
           <a:p>
             <a:r>
               <a:rPr lang="en-US" sz="1400" b="0" dirty="0"/>
-              <a:t>Liên hệ với ví dụ xuyên suốt: thử nghiệm này không trả lời câu hỏi tử vong 28 ngày. Nó trả lời câu hỏi kiểu khả thi về cân bằng dịch. Đó chính là 'phiên bản khả thi' ở slide FINER.</a:t>
-            </a:r>
-          </a:p>
-          <a:p>
-            <a:r>
-              <a:rPr lang="en-US" sz="1400" b="0" dirty="0"/>
-              <a:t>Thời gian: 5 phút, đi từng dòng. Phần 2.3 kết thúc lúc 2:05.</a:t>
+              <a:t>Thời gian: 5 phút. Phần 2.3 kết thúc lúc 21:35.</a:t>
             </a:r>
           </a:p>
         </p:txBody>
@@ -3732,20 +3300,8 @@
           <a:lstStyle/>
           <a:p>
             <a:r>
-              <a:rPr lang="en-US" sz="1400" b="1" dirty="0"/>
-              <a:t>PHẦN 2.4 (2:05-2:20, 21:35-21:50).</a:t>
-            </a:r>
-          </a:p>
-          <a:p>
-            <a:r>
               <a:rPr lang="en-US" sz="1400" b="0" dirty="0"/>
-              <a:t>Ý chính: đọc chưa phải là xong. Phiếu tổng quan tài liệu biến các bài báo thành khoảng trống, khoảng trống thành phần đặt vấn đề, và PICO thành tên đề tài tạm.</a:t>
-            </a:r>
-          </a:p>
-          <a:p>
-            <a:r>
-              <a:rPr lang="en-US" sz="1400" b="0" dirty="0"/>
-              <a:t>Thời gian: 30 giây.</a:t>
+              <a:t>Phần 2.4: 21:35-21:50. Thời gian: 30 giây.</a:t>
             </a:r>
           </a:p>
         </p:txBody>
@@ -3826,25 +3382,7 @@
           <a:p>
             <a:r>
               <a:rPr lang="en-US" sz="1400" b="0" dirty="0"/>
-              <a:t>Phiếu nằm trong Course/Templates (phiếu tổng quan tài liệu, literature review worksheet). Mỗi bài một dòng, các cột giống nhau.</a:t>
-            </a:r>
-          </a:p>
-          <a:p>
-            <a:r>
-              <a:rPr lang="en-US" sz="1400" b="0" dirty="0"/>
-              <a:t>Dòng 1-3 là các bài của khóa học: Bài báo 1 (Boulet 2024, RCT thí điểm: cân bằng dịch, khác biệt không có ý nghĩa), Bài báo 2 (Hyun 2023, thuần tập ghép cặp: cân bằng dương ở ngày 2-3 liên quan với tử vong 28 ngày cao hơn), và CLASSIC (Meyhoff 2022: không khác biệt tử vong 90 ngày).</a:t>
-            </a:r>
-          </a:p>
-          <a:p>
-            <a:r>
-              <a:rPr lang="en-US" sz="1400" b="0" dirty="0"/>
-              <a:t>Lưu ý: ba bài đo kết cục khác nhau ở thời điểm khác nhau. Phiếu tổng quan làm điều này lộ ra ngay.</a:t>
-            </a:r>
-          </a:p>
-          <a:p>
-            <a:r>
-              <a:rPr lang="en-US" sz="1400" b="0" dirty="0"/>
-              <a:t>Ý chính: cột 'hạn chế chính' là nơi khoảng trống, và lý do cho nghiên cứu của bạn, xuất hiện.</a:t>
+              <a:t>Ba bài đo kết cục khác nhau ở thời điểm khác nhau. Cột 'hạn chế chính' cho thấy khoảng trống.</a:t>
             </a:r>
           </a:p>
           <a:p>
@@ -3931,37 +3469,13 @@
           <a:p>
             <a:r>
               <a:rPr lang="en-US" sz="1400" b="0" dirty="0"/>
-              <a:t>Các bài báo bạn đọc trở thành phần Đặt vấn đề của đề cương. Đó là cùng cái phễu như phần trên của đồng hồ cát IMRaD.</a:t>
+              <a:t>Đoạn 2 (khoảng trống) lấy từ cột 'hạn chế chính'.</a:t>
             </a:r>
           </a:p>
           <a:p>
             <a:r>
               <a:rPr lang="en-US" sz="1400" b="0" dirty="0"/>
-              <a:t>Đoạn 1, điều đã biết: quy mô vấn đề và thực hành hiện nay, có trích dẫn.</a:t>
-            </a:r>
-          </a:p>
-          <a:p>
-            <a:r>
-              <a:rPr lang="en-US" sz="1400" b="0" dirty="0"/>
-              <a:t>Đoạn 2, điều chưa biết: khoảng trống (nghiên cứu mâu thuẫn, nghiên cứu quá nhỏ, kết cục chưa được đo). Cột 'hạn chế chính' trong phiếu tổng quan tài liệu là nguồn cho đoạn này.</a:t>
-            </a:r>
-          </a:p>
-          <a:p>
-            <a:r>
-              <a:rPr lang="en-US" sz="1400" b="0" dirty="0"/>
-              <a:t>Đoạn 3: câu hỏi nghiên cứu, mục đích và mục tiêu, nảy ra từ khoảng trống.</a:t>
-            </a:r>
-          </a:p>
-          <a:p>
-            <a:r>
-              <a:rPr lang="en-US" sz="1400" b="0" dirty="0"/>
-              <a:t>Nguyên tắc khoa học: phần Đặt vấn đề không bao giờ chứa số liệu hay kết quả của chính bạn, kể cả kết quả đánh giá thực hành (audit) tại khoa. Kết quả thuộc về phần Kết quả. Số liệu địa phương (ví dụ một tỷ lệ toàn quốc hoặc khu vực) chỉ được dùng khi đã được công bố, kèm trích dẫn.</a:t>
-            </a:r>
-          </a:p>
-          <a:p>
-            <a:r>
-              <a:rPr lang="en-US" sz="1400" b="0" dirty="0"/>
-              <a:t>Quan niệm sai: 'phần tổng quan phải điểm lại mọi thứ đã viết'. Phần Đặt vấn đề của Bài báo 1 đi hết cái phễu trong chưa đến 500 từ.</a:t>
+              <a:t>Không đưa số liệu của mình hay 'kết quả audit của khoa' vào phần Đặt vấn đề. Số liệu địa phương chỉ dùng khi đã công bố và có trích dẫn.</a:t>
             </a:r>
           </a:p>
           <a:p>
@@ -4048,37 +3562,7 @@
           <a:p>
             <a:r>
               <a:rPr lang="en-US" sz="1400" b="0" dirty="0"/>
-              <a:t>Cái phễu khi viết thành văn bản thật, cho phiên bản thí điểm khả thi của ví dụ xuyên suốt (kết cục: cân bằng dịch ngày 5).</a:t>
-            </a:r>
-          </a:p>
-          <a:p>
-            <a:r>
-              <a:rPr lang="en-US" sz="1400" b="0" dirty="0"/>
-              <a:t>Đoạn 1 (đã biết) trích Bài báo 2 [2]. Đoạn 2 (chưa biết) trích CLASSIC [3], CLOVERS [4] và Bài báo 1 [1], và kết thúc bằng khoảng trống. Đoạn 3 nêu câu hỏi và mục tiêu chính, nảy ra từ khoảng trống.</a:t>
-            </a:r>
-          </a:p>
-          <a:p>
-            <a:r>
-              <a:rPr lang="en-US" sz="1400" b="0" dirty="0"/>
-              <a:t>Không đưa số liệu của chính mình hay kết quả đánh giá thực hành (audit) vào đây: đó là kết quả, không phải bối cảnh. Nếu muốn dùng một con số địa phương, hãy dùng số đã công bố và trích dẫn.</a:t>
-            </a:r>
-          </a:p>
-          <a:p>
-            <a:r>
-              <a:rPr lang="en-US" sz="1400" b="0" dirty="0"/>
-              <a:t>Ý chính: mỗi câu nêu dữ kiện đều có số trích dẫn.</a:t>
-            </a:r>
-          </a:p>
-          <a:p>
-            <a:r>
-              <a:rPr lang="en-US" sz="1400" b="0" dirty="0"/>
-              <a:t>Quan niệm sai: 'phần đặt vấn đề phải dài và ấn tượng'. Khoảng 300 từ là đủ cho một đề cương.</a:t>
-            </a:r>
-          </a:p>
-          <a:p>
-            <a:r>
-              <a:rPr lang="en-US" sz="1400" b="0" dirty="0"/>
-              <a:t>Học viên viết đề cương bằng tiếng Anh (được viết tiếng Việt nếu tiếng Anh là quá khó). Luôn tìm kiếm và trích dẫn bằng tiếng Anh.</a:t>
+              <a:t>Mỗi câu nêu dữ kiện đều có số trích dẫn. Khoảng 300 từ là đủ. Viết bằng tiếng Anh, như đề cương.</a:t>
             </a:r>
           </a:p>
           <a:p>
@@ -4165,37 +3649,19 @@
           <a:p>
             <a:r>
               <a:rPr lang="en-US" sz="1400" b="0" dirty="0"/>
-              <a:t>Tên tốt nêu đối tượng, can thiệp và so sánh (hoặc phơi nhiễm), và thiết kế, khoảng 10 đến 16 từ.</a:t>
+              <a:t>Tránh viết tắt và từ chỉ nhân quả ('impact', 'effect of'). Từ khóa: 3-6 thuật ngữ MeSH chưa có trong tên.</a:t>
             </a:r>
           </a:p>
           <a:p>
             <a:r>
               <a:rPr lang="en-US" sz="1400" b="0" dirty="0"/>
-              <a:t>Ví dụ từ phiên bản khả thi: 'Restrictive versus usual fluids in adults with septic shock: a pilot randomised trial' (13 từ tiếng Anh). Tiếng Việt: 'Hạn chế dịch so với dịch thường quy ở người lớn bị sốc nhiễm khuẩn: thử nghiệm ngẫu nhiên thí điểm'.</a:t>
+              <a:t>Hỏi: 'Fluids in the ICU có phải tên đề tài tốt không?' Mong đợi: không, thiếu đối tượng, so sánh và thiết kế.</a:t>
             </a:r>
           </a:p>
           <a:p>
             <a:r>
               <a:rPr lang="en-US" sz="1400" b="0" dirty="0"/>
-              <a:t>Tránh viết tắt và từ quảng cáo hay nhân quả ('tác động', 'mới', 'hiệu quả của'), nhất là với thiết kế quan sát (so sánh tiêu đề Bài báo 2).</a:t>
-            </a:r>
-          </a:p>
-          <a:p>
-            <a:r>
-              <a:rPr lang="en-US" sz="1400" b="0" dirty="0"/>
-              <a:t>Từ khóa: 3 đến 6, tốt nhất là thuật ngữ MeSH chưa có trong tiêu đề, để bài được tìm thấy qua nhiều chuỗi tìm kiếm hơn (bản chú giải Bài báo 1 cũng nêu điểm này).</a:t>
-            </a:r>
-          </a:p>
-          <a:p>
-            <a:r>
-              <a:rPr lang="en-US" sz="1400" b="0" dirty="0"/>
-              <a:t>Hỏi cả lớp (chat): 'Dịch truyền ở ICU có phải tên đề tài tốt?' Mong đợi: không. Thiếu đối tượng, so sánh và thiết kế.</a:t>
-            </a:r>
-          </a:p>
-          <a:p>
-            <a:r>
-              <a:rPr lang="en-US" sz="1400" b="0" dirty="0"/>
-              <a:t>Thời gian: 4 phút. Phần 2.4 kết thúc lúc 2:20.</a:t>
+              <a:t>Thời gian: 4 phút. Phần 2.4 kết thúc lúc 21:50.</a:t>
             </a:r>
           </a:p>
         </p:txBody>
@@ -4275,20 +3741,14 @@
           <a:lstStyle/>
           <a:p>
             <a:r>
-              <a:rPr lang="en-US" sz="1400" b="1" dirty="0"/>
-              <a:t>PHẦN 2.1 (0:10-0:50, 19:40-20:20).</a:t>
-            </a:r>
-          </a:p>
-          <a:p>
-            <a:r>
               <a:rPr lang="en-US" sz="1400" b="0" dirty="0"/>
-              <a:t>Ý chính: tìm y văn quyết định câu hỏi có mới không, cung cấp tổng quan cho phần đặt vấn đề, và cho thấy người khác đo kết cục thế nào.</a:t>
+              <a:t>Phần 2.1: 19:40-20:20.</a:t>
             </a:r>
           </a:p>
           <a:p>
             <a:r>
               <a:rPr lang="en-US" sz="1400" b="0" dirty="0"/>
-              <a:t>Hỏi cả lớp (chat): 'Khi cần bằng chứng nhanh, bạn thường làm gì?' Trả lời thật: Google, hỏi đồng nghiệp, UpToDate, hướng dẫn điều trị. Đều ổn cho chăm sóc, nhưng đề cương cần một chiến lược tìm kiếm được ghi lại.</a:t>
+              <a:t>Hỏi: 'Khi cần bằng chứng gấp, bạn thường làm gì?' Google, hỏi đồng nghiệp, hướng dẫn: được cho chăm sóc, nhưng đề cương cần một lần tìm kiếm có ghi chép.</a:t>
             </a:r>
           </a:p>
           <a:p>
@@ -4375,25 +3835,7 @@
           <a:p>
             <a:r>
               <a:rPr lang="en-US" sz="1400" b="0" dirty="0"/>
-              <a:t>XÂY DỰNG ĐỀ CƯƠNG 2 (2:20-2:55, 21:50-22:25). 35 phút bắt đầu từ slide này.</a:t>
-            </a:r>
-          </a:p>
-          <a:p>
-            <a:r>
-              <a:rPr lang="en-US" sz="1400" b="0" dirty="0"/>
-              <a:t>Ý chính: mọi điều học hôm nay được áp dụng cho câu hỏi của riêng mỗi học viên từ thứ Bảy tuần trước. Mỗi người làm đề cương của mình. Không ai làm theo nhóm.</a:t>
-            </a:r>
-          </a:p>
-          <a:p>
-            <a:r>
-              <a:rPr lang="en-US" sz="1400" b="0" dirty="0"/>
-              <a:t>Cuối phần này, mỗi học viên có một chuỗi tìm kiếm được ghi lại, một số trong 5 tài liệu đã lưu vào Zotero và phiếu tổng quan, và bản nháp đầu tiên của phần đặt vấn đề và tên đề tài. Phần còn lại là bài về nhà.</a:t>
-            </a:r>
-          </a:p>
-          <a:p>
-            <a:r>
-              <a:rPr lang="en-US" sz="1400" b="0" dirty="0"/>
-              <a:t>Chuyển ngay sang slide sau.</a:t>
+              <a:t>Xây dựng đề cương 2: 21:50-22:25. Chuyển ngay sang slide sau.</a:t>
             </a:r>
           </a:p>
         </p:txBody>
@@ -4474,37 +3916,31 @@
           <a:p>
             <a:r>
               <a:rPr lang="en-US" sz="1400" b="0" dirty="0"/>
-              <a:t>Phút 0-10, cả lớp: chạy lại chuỗi tìm kiếm của ví dụ xuyên suốt từ phần trình diễn, cùng sàng lọc các tiêu đề đầu tiên (học viên gõ 'giữ' hoặc 'bỏ' trong chat và gợi ý thêm từ khóa), lưu hai bài vào Zotero, điền một dòng phiếu tổng quan và chỉ ra đoạn đặt vấn đề và tên đề tài mẫu.</a:t>
+              <a:t>Phút 0-10: chạy lại chuỗi tìm kiếm trong phần trình diễn, cùng sàng lọc tiêu đề trong chat, lưu hai bài vào Zotero, điền một dòng phiếu.</a:t>
             </a:r>
           </a:p>
           <a:p>
             <a:r>
               <a:rPr lang="en-US" sz="1400" b="0" dirty="0"/>
-              <a:t>Phút 10-30, mỗi người tự làm với câu hỏi của mình. Có thể tắt camera. Giảng viên trả lời câu hỏi trong chat. Lỗi hay gặp: quá nhiều kết quả (thêm khối hoặc bộ lọc), quá ít (thêm từ đồng nghĩa), có khối so sánh, AND trong một khối.</a:t>
+              <a:t>Phút 10-30: mỗi người tự làm. Lỗi hay gặp: quá nhiều kết quả (thêm khối), quá ít (thêm từ đồng nghĩa), có khối so sánh.</a:t>
             </a:r>
           </a:p>
           <a:p>
             <a:r>
               <a:rPr lang="en-US" sz="1400" b="0" dirty="0"/>
-              <a:t>Ai chưa xong 5 tài liệu thì ghi lại chuỗi tìm kiếm, cơ sở dữ liệu và ngày. Phần còn lại thành bài về nhà.</a:t>
+              <a:t>Phút 30-35: hai bạn tình nguyện đọc tên đề tài và câu nêu khoảng trống.</a:t>
             </a:r>
           </a:p>
           <a:p>
             <a:r>
               <a:rPr lang="en-US" sz="1400" b="0" dirty="0"/>
-              <a:t>Phút 30-35: hai bạn tình nguyện bật micro đọc to tên đề tài và câu nêu khoảng trống, và cả lớp góp một ý cải thiện cho mỗi bạn trong chat.</a:t>
+              <a:t>Đáp án: s2_solutions_VN, Bài tập 4.</a:t>
             </a:r>
           </a:p>
           <a:p>
             <a:r>
               <a:rPr lang="en-US" sz="1400" b="0" dirty="0"/>
-              <a:t>Thế nào là tốt: Course/Solutions/s2_solutions.md (Bài tập 4).</a:t>
-            </a:r>
-          </a:p>
-          <a:p>
-            <a:r>
-              <a:rPr lang="en-US" sz="1400" b="0" dirty="0"/>
-              <a:t>Thời gian: 35 phút. Tổng kết bắt đầu lúc 2:55 (22:25).</a:t>
+              <a:t>Thời gian: 35 phút. Tổng kết lúc 22:25.</a:t>
             </a:r>
           </a:p>
         </p:txBody>
@@ -4584,20 +4020,8 @@
           <a:lstStyle/>
           <a:p>
             <a:r>
-              <a:rPr lang="en-US" sz="1400" b="1" dirty="0"/>
-              <a:t>TỔNG KẾT (2:55-3:00, 22:25-22:30).</a:t>
-            </a:r>
-          </a:p>
-          <a:p>
-            <a:r>
               <a:rPr lang="en-US" sz="1400" b="0" dirty="0"/>
-              <a:t>Đọc nhanh sáu từ khóa. Chúng cũng có trong bảng thuật ngữ của khóa học (Anh-Việt).</a:t>
-            </a:r>
-          </a:p>
-          <a:p>
-            <a:r>
-              <a:rPr lang="en-US" sz="1400" b="0" dirty="0"/>
-              <a:t>Thời gian: 1 phút.</a:t>
+              <a:t>Đọc nhanh các từ khóa. Thời gian: 1 phút.</a:t>
             </a:r>
           </a:p>
         </p:txBody>
@@ -4678,13 +4102,7 @@
           <a:p>
             <a:r>
               <a:rPr lang="en-US" sz="1400" b="0" dirty="0"/>
-              <a:t>Đọc ba thông điệp, rồi hỏi một học viên: 'Điều đầu tiên bạn tìm trong phần tóm tắt là gì?' Mong đợi: kết cục chính và kết quả của nó kèm KTC.</a:t>
-            </a:r>
-          </a:p>
-          <a:p>
-            <a:r>
-              <a:rPr lang="en-US" sz="1400" b="0" dirty="0"/>
-              <a:t>Nối sang buổi sau: hai thứ Bảy tới (Buổi 3 và 4) lớp sẽ chọn thiết kế phù hợp cho từng câu hỏi, và tìm hiểu sai lệch, yếu tố gây nhiễu và các số đo tác động qua hai bài báo về dịch truyền.</a:t>
+              <a:t>Hỏi một người: 'Điều đầu tiên bạn tìm trong tóm tắt là gì?' Mong đợi: kết cục chính và kết quả kèm KTC.</a:t>
             </a:r>
           </a:p>
           <a:p>
@@ -4771,13 +4189,13 @@
           <a:p>
             <a:r>
               <a:rPr lang="en-US" sz="1400" b="0" dirty="0"/>
-              <a:t>Không chấm điểm. Đáp án: Câu 1 OR (chỉ cần một trong hai từ). Câu 2 Cân bằng dịch tích lũy ngày 5 (ml/kg), không phải tử vong.</a:t>
+              <a:t>Đáp án: Câu 1 OR. Câu 2 Cân bằng dịch tích lũy ngày 5, không phải tử vong.</a:t>
             </a:r>
           </a:p>
           <a:p>
             <a:r>
               <a:rPr lang="en-US" sz="1400" b="0" dirty="0"/>
-              <a:t>Lưu khung chat và đọc câu trả lời trong tuần. Nếu hơn một phần tư trả lời sai câu nào, mở đầu Buổi 3 bằng điểm đó.</a:t>
+              <a:t>Nếu hơn một phần tư sai một trong hai câu, mở đầu Buổi 3 bằng câu đó.</a:t>
             </a:r>
           </a:p>
           <a:p>
@@ -4864,31 +4282,13 @@
           <a:p>
             <a:r>
               <a:rPr lang="en-US" sz="1400" b="0" dirty="0"/>
-              <a:t>Nói rõ khối lượng: khoảng 60-90 phút trong tuần, tự làm.</a:t>
+              <a:t>Khoảng 60-90 phút trong tuần. Buổi 3 dùng tóm tắt của cả hai bài.</a:t>
             </a:r>
           </a:p>
           <a:p>
             <a:r>
               <a:rPr lang="en-US" sz="1400" b="0" dirty="0"/>
-              <a:t>Hai bài báo nằm trong Course/Papers (có bản chú giải tiếng Anh và tiếng Việt). Buổi 3 dùng cả hai tóm tắt để so sánh RCT với thuần tập.</a:t>
-            </a:r>
-          </a:p>
-          <a:p>
-            <a:r>
-              <a:rPr lang="en-US" sz="1400" b="0" dirty="0"/>
-              <a:t>Nhắc học viên email Phần 1 cho giảng viên nếu khóa học có nhận xét bằng văn bản giữa các buổi.</a:t>
-            </a:r>
-          </a:p>
-          <a:p>
-            <a:r>
-              <a:rPr lang="en-US" sz="1400" b="0" dirty="0"/>
-              <a:t>Kết thúc đúng giờ. Cảm ơn cả lớp.</a:t>
-            </a:r>
-          </a:p>
-          <a:p>
-            <a:r>
-              <a:rPr lang="en-US" sz="1400" b="0" dirty="0"/>
-              <a:t>Thời gian: 1 phút.</a:t>
+              <a:t>Thời gian: 1 phút. Kết thúc đúng giờ.</a:t>
             </a:r>
           </a:p>
         </p:txBody>
@@ -4969,19 +4369,7 @@
           <a:p>
             <a:r>
               <a:rPr lang="en-US" sz="1400" b="0" dirty="0"/>
-              <a:t>SLIDE BỔ SUNG (Buổi 2).</a:t>
-            </a:r>
-          </a:p>
-          <a:p>
-            <a:r>
-              <a:rPr lang="en-US" sz="1400" b="0" dirty="0"/>
-              <a:t>Mọi slide sau slide này là tùy chọn. Dùng nếu lớp đi nhanh hoặc có người hỏi, hoặc giới thiệu để học viên tự học.</a:t>
-            </a:r>
-          </a:p>
-          <a:p>
-            <a:r>
-              <a:rPr lang="en-US" sz="1400" b="0" dirty="0"/>
-              <a:t>Buổi học chính vẫn trọn vẹn khi không dùng các slide này.</a:t>
+              <a:t>Tùy chọn. Dùng nếu còn thời gian, hoặc để tự học.</a:t>
             </a:r>
           </a:p>
         </p:txBody>
@@ -5062,43 +4450,7 @@
           <a:p>
             <a:r>
               <a:rPr lang="en-US" sz="1400" b="0" dirty="0"/>
-              <a:t>EXTRA: các cơ sở dữ liệu khác.</a:t>
-            </a:r>
-          </a:p>
-          <a:p>
-            <a:r>
-              <a:rPr lang="en-US" sz="1400" b="0" dirty="0"/>
-              <a:t>Thông điệp chính: với đề cương Cấp độ 1, PubMed và một sổ đăng ký là đủ. Tổng quan hệ thống tìm trên nhiều cơ sở dữ liệu.</a:t>
-            </a:r>
-          </a:p>
-          <a:p>
-            <a:r>
-              <a:rPr lang="en-US" sz="1400" b="0" dirty="0"/>
-              <a:t>Trước mọi nghiên cứu mới, hãy tìm tổng quan hệ thống đã có trước (slide chính 'Kiểm tra trước'). Thư viện Cochrane là nơi bắt đầu với câu hỏi điều trị: Cơ sở dữ liệu Tổng quan Hệ thống Cochrane (CDSR) chứa các tổng quan của Cochrane, và CENTRAL là sổ các thử nghiệm có đối chứng.</a:t>
-            </a:r>
-          </a:p>
-          <a:p>
-            <a:r>
-              <a:rPr lang="en-US" sz="1400" b="0" dirty="0"/>
-              <a:t>Embase trùng một phần với MEDLINE nhưng có thêm nhiều tạp chí về thuốc, tạp chí châu Âu và tóm tắt hội nghị. Web of Science và Scopus bao phủ nhiều ngành và mạnh trong việc lần theo trích dẫn. CINAHL là cơ sở dữ liệu điều dưỡng chính. APA PsycInfo bao phủ sức khỏe tâm thần và hành vi.</a:t>
-            </a:r>
-          </a:p>
-          <a:p>
-            <a:r>
-              <a:rPr lang="en-US" sz="1400" b="0" dirty="0"/>
-              <a:t>Epistemonikos (miễn phí) gom các tổng quan hệ thống từ nhiều nguồn. WHO Global Index Medicus tập hợp các cơ sở dữ liệu khu vực, trong đó có Western Pacific Region Index Medicus, có thể quan trọng với các tạp chí tiếng địa phương.</a:t>
-            </a:r>
-          </a:p>
-          <a:p>
-            <a:r>
-              <a:rPr lang="en-US" sz="1400" b="0" dirty="0"/>
-              <a:t>Embase, Web of Science, Scopus và CINAHL thường cần tài khoản của cơ sở. Hãy hỏi thư viện.</a:t>
-            </a:r>
-          </a:p>
-          <a:p>
-            <a:r>
-              <a:rPr lang="en-US" sz="1400" b="0" dirty="0"/>
-              <a:t>Một tổng quan hệ thống tìm trên ít nhất hai hoặc ba cơ sở dữ liệu này, cộng với sổ đăng ký và tài liệu xám. Cấp độ 3 có một học phần riêng về tổng quan hệ thống và phân tích gộp (Học phần A): đề cương và đăng ký PROSPERO, tìm kiếm trên nhiều cơ sở dữ liệu, nguy cơ sai lệch, gộp kết quả và báo cáo theo PRISMA 2020.</a:t>
+              <a:t>Với đề cương Cấp độ 1, PubMed và một sổ đăng ký là đủ. Câu hỏi điều trị nên bắt đầu từ Cochrane Library. Phần lớn cơ sở dữ liệu khác cần tài khoản của cơ quan.</a:t>
             </a:r>
           </a:p>
           <a:p>
@@ -5185,25 +4537,7 @@
           <a:p>
             <a:r>
               <a:rPr lang="en-US" sz="1400" b="0" dirty="0"/>
-              <a:t>EXTRA: PubMed Clinical Queries.</a:t>
-            </a:r>
-          </a:p>
-          <a:p>
-            <a:r>
-              <a:rPr lang="en-US" sz="1400" b="0" dirty="0"/>
-              <a:t>Clinical Queries áp dụng các bộ lọc tìm kiếm đã được kiểm định cho các loại nghiên cứu trả lời câu hỏi lâm sàng.</a:t>
-            </a:r>
-          </a:p>
-          <a:p>
-            <a:r>
-              <a:rPr lang="en-US" sz="1400" b="0" dirty="0"/>
-              <a:t>Hữu ích để xem nhanh trước giao ban hoặc kiểm tra tìm kiếm của mình có bỏ sót thử nghiệm rõ ràng nào không.</a:t>
-            </a:r>
-          </a:p>
-          <a:p>
-            <a:r>
-              <a:rPr lang="en-US" sz="1400" b="0" dirty="0"/>
-              <a:t>Giao diện thỉnh thoảng thay đổi. Hãy kiểm tra trước khi trình diễn trực tiếp.</a:t>
+              <a:t>Hữu ích để kiểm tra chưa sót thử nghiệm quan trọng. Giao diện hay thay đổi, nên xem trước khi chiếu.</a:t>
             </a:r>
           </a:p>
           <a:p>
@@ -5290,25 +4624,7 @@
           <a:p>
             <a:r>
               <a:rPr lang="en-US" sz="1400" b="0" dirty="0"/>
-              <a:t>EXTRA: trình diễn Google Scholar.</a:t>
-            </a:r>
-          </a:p>
-          <a:p>
-            <a:r>
-              <a:rPr lang="en-US" sz="1400" b="0" dirty="0"/>
-              <a:t>Course/Demos/s2_demo.md, Phần C.</a:t>
-            </a:r>
-          </a:p>
-          <a:p>
-            <a:r>
-              <a:rPr lang="en-US" sz="1400" b="0" dirty="0"/>
-              <a:t>Nói: 'Scholar rất tốt để lần theo trích dẫn và tìm tài liệu xám, nhưng không có MeSH, ít bộ lọc, và cùng một tìm kiếm tháng sau có thể ra kết quả khác.'</a:t>
-            </a:r>
-          </a:p>
-          <a:p>
-            <a:r>
-              <a:rPr lang="en-US" sz="1400" b="0" dirty="0"/>
-              <a:t>Nếu Scholar hiện CAPTCHA, đừng cố giải khi đang chia sẻ màn hình. Chuyển sang ảnh chụp màn hình.</a:t>
+              <a:t>Kịch bản: s2_demo_VN.md, Phần C. Nếu Scholar hiện CAPTCHA, chuyển sang ảnh chụp màn hình.</a:t>
             </a:r>
           </a:p>
           <a:p>
@@ -5395,37 +4711,19 @@
           <a:p>
             <a:r>
               <a:rPr lang="en-US" sz="1400" b="0" dirty="0"/>
-              <a:t>Đi theo phễu từ trái sang phải: toàn bộ PubMed, một từ khóa, các khối PICO có cấu trúc, bộ lọc, người đọc sàng lọc, còn lại vài bài chính.</a:t>
+              <a:t>Hai bước cuối do người đọc làm, không phải máy tính.</a:t>
             </a:r>
           </a:p>
           <a:p>
             <a:r>
               <a:rPr lang="en-US" sz="1400" b="0" dirty="0"/>
-              <a:t>Nguồn cho quy mô PubMed: trang 'About' của PubMed (https://pubmed.ncbi.nlm.nih.gov/about/) ghi 'more than 40 million citations and abstracts' (hơn 40 triệu trích dẫn và tóm tắt). Kiểm tra ngày 19/10/2026 (trang cập nhật lần cuối ngày 11/3/2025). Hãy kiểm tra lại trước khi dạy và sửa mốc 'tính đến' nếu con số đã thay đổi.</a:t>
+              <a:t>Hỏi: 'Vì sao phải ghi ngày và chuỗi tìm kiếm?' Mong đợi: để lặp lại được.</a:t>
             </a:r>
           </a:p>
           <a:p>
             <a:r>
               <a:rPr lang="en-US" sz="1400" b="0" dirty="0"/>
-              <a:t>Các con số khác chỉ là bậc độ lớn và thay đổi hằng ngày.</a:t>
-            </a:r>
-          </a:p>
-          <a:p>
-            <a:r>
-              <a:rPr lang="en-US" sz="1400" b="0" dirty="0"/>
-              <a:t>Ý chính: hai bước cuối do con người đọc, không phải máy tính.</a:t>
-            </a:r>
-          </a:p>
-          <a:p>
-            <a:r>
-              <a:rPr lang="en-US" sz="1400" b="0" dirty="0"/>
-              <a:t>Hỏi cả lớp (chat): 'Vì sao phải ghi ngày và chuỗi tìm kiếm?' Mong đợi: để lặp lại được. Tạp chí và người phản biện sẽ yêu cầu.</a:t>
-            </a:r>
-          </a:p>
-          <a:p>
-            <a:r>
-              <a:rPr lang="en-US" sz="1400" b="0" dirty="0"/>
-              <a:t>Slide này dựng bằng các hình có thể chỉnh sửa: có thể sửa con số hoặc thêm tài liệu tham khảo ngay trong PowerPoint.</a:t>
+              <a:t>Quy mô PubMed: 'hơn 40 triệu trích dẫn' (trang About của PubMed, kiểm tra ngày 19/10/2026). Kiểm tra lại trước khi dạy.</a:t>
             </a:r>
           </a:p>
           <a:p>
@@ -5512,19 +4810,7 @@
           <a:p>
             <a:r>
               <a:rPr lang="en-US" sz="1400" b="0" dirty="0"/>
-              <a:t>EXTRA: tái sử dụng văn bản, AI và kiểm tra trùng lặp.</a:t>
-            </a:r>
-          </a:p>
-          <a:p>
-            <a:r>
-              <a:rPr lang="en-US" sz="1400" b="0" dirty="0"/>
-              <a:t>Tái sử dụng văn bản ('tự đạo văn'): dùng lại một phần câu chữ chuẩn ở phần Phương pháp có thể được chấp nhận nếu có trích dẫn và tạp chí cho phép. Không bao giờ dùng lại phần Kết quả hay Bàn luận.</a:t>
-            </a:r>
-          </a:p>
-          <a:p>
-            <a:r>
-              <a:rPr lang="en-US" sz="1400" b="0" dirty="0"/>
-              <a:t>Công cụ AI: tạp chí yêu cầu công khai việc dùng AI (Buổi 7 học kỹ về liêm chính và AI).</a:t>
+              <a:t>Không bao giờ dùng lại câu chữ phần Kết quả hay Bàn luận. Phải công khai việc dùng AI (Buổi 7).</a:t>
             </a:r>
           </a:p>
           <a:p>
@@ -5611,7 +4897,7 @@
           <a:p>
             <a:r>
               <a:rPr lang="en-US" sz="1400" b="0" dirty="0"/>
-              <a:t>Slide bản quyền. Để trên màn hình khi học viên rời phòng họp.</a:t>
+              <a:t>Để trên màn hình khi học viên rời phòng họp.</a:t>
             </a:r>
           </a:p>
         </p:txBody>
@@ -5692,25 +4978,7 @@
           <a:p>
             <a:r>
               <a:rPr lang="en-US" sz="1400" b="0" dirty="0"/>
-              <a:t>AND: chỉ bài có cả hai khái niệm, nên ít kết quả hơn. OR: một trong hai từ, nên nhiều hơn. Dùng OR cho từ đồng nghĩa.</a:t>
-            </a:r>
-          </a:p>
-          <a:p>
-            <a:r>
-              <a:rPr lang="en-US" sz="1400" b="0" dirty="0"/>
-              <a:t>NOT loại mọi bài có nhắc từ thứ hai, kể cả bài tốt chỉ nhắc trẻ sơ sinh một lần. Vì vậy NOT rủi ro.</a:t>
-            </a:r>
-          </a:p>
-          <a:p>
-            <a:r>
-              <a:rPr lang="en-US" sz="1400" b="0" dirty="0"/>
-              <a:t>Mẹo: viết hoa các toán tử, và dùng dấu ngoặc để quyết định thứ tự.</a:t>
-            </a:r>
-          </a:p>
-          <a:p>
-            <a:r>
-              <a:rPr lang="en-US" sz="1400" b="0" dirty="0"/>
-              <a:t>Các vòng tròn là hình PowerPoint chỉnh sửa được: có thể đổi từ tìm kiếm ngay trên slide.</a:t>
+              <a:t>NOT loại cả bài tốt chỉ nhắc thuật ngữ một lần, nên ít dùng. Gõ toán tử bằng chữ in hoa và dùng ngoặc.</a:t>
             </a:r>
           </a:p>
           <a:p>
@@ -5797,7 +5065,7 @@
           <a:p>
             <a:r>
               <a:rPr lang="en-US" sz="1400" b="0" dirty="0"/>
-              <a:t>Đáp án: 1 AND. 2 OR. 3 Ít hơn (AND thu hẹp). 4 Nó loại mọi bài có nhắc trẻ em ở bất kỳ đâu, kể cả nghiên cứu tốt ở người lớn chỉ nhắc trẻ em một lần.</a:t>
+              <a:t>Đáp án: 1 AND. 2 OR. 3 Ít hơn. 4 Loại mọi bài có nhắc đến trẻ em, kể cả nghiên cứu tốt ở người lớn.</a:t>
             </a:r>
           </a:p>
           <a:p>
@@ -5884,31 +5152,13 @@
           <a:p>
             <a:r>
               <a:rPr lang="en-US" sz="1400" b="0" dirty="0"/>
-              <a:t>MeSH (Medical Subject Headings, Đề mục chủ đề y học) là bộ từ vựng chuẩn của Thư viện Y khoa Quốc gia Hoa Kỳ. Người lập chỉ mục gắn thuật ngữ MeSH cho mỗi bài MEDLINE, bất kể tác giả dùng từ gì.</a:t>
+              <a:t>Tìm một thuật ngữ MeSH thì tìm cả các thuật ngữ hẹp hơn bên dưới. Bài mới có thể chưa được gắn MeSH, nên thêm từ [tiab].</a:t>
             </a:r>
           </a:p>
           <a:p>
             <a:r>
               <a:rPr lang="en-US" sz="1400" b="0" dirty="0"/>
-              <a:t>Cây MeSH đi từ rộng đến hẹp. Tìm một thuật ngữ MeSH cũng tìm luôn các thuật ngữ hẹp hơn bên dưới: Sepsis[MeSH] bao gồm Shock, Septic.</a:t>
-            </a:r>
-          </a:p>
-          <a:p>
-            <a:r>
-              <a:rPr lang="en-US" sz="1400" b="0" dirty="0"/>
-              <a:t>Bài mới nhất có thể chưa được gắn MeSH, nên luôn thêm từ tự do [tiab] ([tiab] = tiêu đề hoặc tóm tắt).</a:t>
-            </a:r>
-          </a:p>
-          <a:p>
-            <a:r>
-              <a:rPr lang="en-US" sz="1400" b="0" dirty="0"/>
-              <a:t>Hỏi cả lớp (chat): 'MeSH giúp gì cho điều dưỡng tìm về tổn thương do tì đè?' Mong đợi: tác giả viết pressure ulcer, bedsore, decubitus ulcer, và MeSH gom dưới một đề mục.</a:t>
-            </a:r>
-          </a:p>
-          <a:p>
-            <a:r>
-              <a:rPr lang="en-US" sz="1400" b="0" dirty="0"/>
-              <a:t>Slide sau: cách tìm đúng thuật ngữ MeSH.</a:t>
+              <a:t>Hỏi: 'Vì sao MeSH giúp điều dưỡng tìm về loét tì đè?' Mong đợi: một tiêu đề gom pressure ulcer, bedsore, decubitus ulcer.</a:t>
             </a:r>
           </a:p>
           <a:p>
@@ -5995,31 +5245,7 @@
           <a:p>
             <a:r>
               <a:rPr lang="en-US" sz="1400" b="0" dirty="0"/>
-              <a:t>Học viên không thể biết từ nào là thuật ngữ MeSH. Chỉ cho họ ba cách để tìm.</a:t>
-            </a:r>
-          </a:p>
-          <a:p>
-            <a:r>
-              <a:rPr lang="en-US" sz="1400" b="0" dirty="0"/>
-              <a:t>Cách 1, MeSH Database: trên trang chủ PubMed, mục Explore, bấm 'MeSH Database' (hoặc vào https://www.ncbi.nlm.nih.gov/mesh). Gõ một từ thông dụng. Hồ sơ cho biết đề mục chính thức, định nghĩa, các từ đồng nghĩa mà đề mục gom lại (với Pressure Ulcer: bedsore, decubitus ulcer, pressure injury và các từ khác) và vị trí trong cây MeSH. Nút 'Add to search builder' đưa đề mục sang PubMed.</a:t>
-            </a:r>
-          </a:p>
-          <a:p>
-            <a:r>
-              <a:rPr lang="en-US" sz="1400" b="0" dirty="0"/>
-              <a:t>Cách 2, một bài báo đã biết: mở một bài bạn biết chắc là liên quan (ở ví dụ này là CLASSIC hoặc Bài báo 1), kéo xuống phần 'MeSH terms' và dùng lại các đề mục khớp với khái niệm của bạn. Phần trình diễn sẽ cho thấy điều này.</a:t>
-            </a:r>
-          </a:p>
-          <a:p>
-            <a:r>
-              <a:rPr lang="en-US" sz="1400" b="0" dirty="0"/>
-              <a:t>Cách 3, Search details: chạy các từ tự do, rồi mở 'Search details' trên trang Advanced. Cơ chế tự động gắn thuật ngữ của PubMed cho biết nó đã khớp với đề mục MeSH nào.</a:t>
-            </a:r>
-          </a:p>
-          <a:p>
-            <a:r>
-              <a:rPr lang="en-US" sz="1400" b="0" dirty="0"/>
-              <a:t>Đọc hồ sơ trước khi dùng một đề mục: đôi khi đề mục rộng hơn hoặc hẹp hơn bạn nghĩ.</a:t>
+              <a:t>Giới thiệu nhanh ba cách. Phần trình diễn dùng cách 2. Đọc định nghĩa của tiêu đề trước khi dùng.</a:t>
             </a:r>
           </a:p>
           <a:p>

--- a/vi/files/slides/Session_2_VN.pptx
+++ b/vi/files/slides/Session_2_VN.pptx
@@ -832,7 +832,7 @@
           <a:p>
             <a:r>
               <a:rPr lang="en-US" sz="1400" b="0" dirty="0"/>
-              <a:t>Ví dụ: child* tìm được child, children, childhood. Lưu ý: nó cũng tìm ra childbirth, và từ cắt cụt không được ánh xạ sang MeSH.</a:t>
+              <a:t>Cắt cụt (truncation). Ví dụ: child* tìm được child, children, childhood. Lưu ý: nó cũng tìm ra childbirth, và từ cắt cụt không được ánh xạ sang MeSH.</a:t>
             </a:r>
           </a:p>
           <a:p>
